--- a/Arquitectura de Sistemas Computacionales/Clases/Clase 6 - Seguridad en la nube/Presentacion.pptx
+++ b/Arquitectura de Sistemas Computacionales/Clases/Clase 6 - Seguridad en la nube/Presentacion.pptx
@@ -3377,7 +3377,7 @@
                 </a:solidFill>
                 <a:latin typeface="Calibri"/>
               </a:rPr>
-              <a:t> · Teoría breve · Taller PI · Quiz/cierre.</a:t>
+              <a:t> · Teoría breve · Taller PI · cierre.</a:t>
             </a:r>
           </a:p>
           <a:p>
@@ -4542,7 +4542,7 @@
                 </a:solidFill>
                 <a:latin typeface="Calibri"/>
               </a:rPr>
-              <a:t> Quiz corto / revisión de evidencias.</a:t>
+              <a:t> Revisión de evidencias del PI.</a:t>
             </a:r>
           </a:p>
           <a:p>

--- a/Arquitectura de Sistemas Computacionales/Clases/Clase 6 - Seguridad en la nube/Presentacion.pptx
+++ b/Arquitectura de Sistemas Computacionales/Clases/Clase 6 - Seguridad en la nube/Presentacion.pptx
@@ -3850,7 +3850,7 @@
                 </a:solidFill>
                 <a:latin typeface="Calibri"/>
               </a:rPr>
-              <a:t>Subir evidencias al paquete CloudLite (Drive/repo) y a ExamLab domingo 23:59.</a:t>
+              <a:t>Subir evidencias al paquete CloudLite (Drive/repo) y a ExamLab (https://examlab.lovable.app/) domingo 23:59.</a:t>
             </a:r>
           </a:p>
         </p:txBody>

--- a/Arquitectura de Sistemas Computacionales/Clases/Clase 6 - Seguridad en la nube/Presentacion.pptx
+++ b/Arquitectura de Sistemas Computacionales/Clases/Clase 6 - Seguridad en la nube/Presentacion.pptx
@@ -6574,7 +6574,7 @@
                 </a:solidFill>
                 <a:latin typeface="Calibri"/>
               </a:rPr>
-              <a:t> Listen 5 amenazas STRIDE-lite aplicadas a su dominio.</a:t>
+              <a:t> Paso 1: liste 5 amenazas concretas de su dominio, una por cada categoria de STRIDE-lite (suplantacion, manipulacion, divulgacion de informacion, denegacion de servicio y elevacion de privilegios), verificando que cada amenaza nombre el activo afectado de su propio C4 (por ejemplo la Base de datos Citas o el token del estudiante) y que ninguna sea copiada como frase generica de internet.</a:t>
             </a:r>
           </a:p>
           <a:p>
@@ -6608,7 +6608,7 @@
                 </a:solidFill>
                 <a:latin typeface="Calibri"/>
               </a:rPr>
-              <a:t> Para cada una: control + dónde se ve en el diagrama.</a:t>
+              <a:t> Paso 2: asigne a cada amenaza un control tecnico y la flecha o zona exacta del diagrama donde se ve ese control, verificando que los 5 controles sean distintos entre si y que al menos uno sea preventivo, uno detectivo y uno de contencion; la tabla completa queda en la seccion Seguridad del informe del PI.</a:t>
             </a:r>
           </a:p>
           <a:p>
@@ -6642,7 +6642,7 @@
                 </a:solidFill>
                 <a:latin typeface="Calibri"/>
               </a:rPr>
-              <a:t> Definan política de secretos del repo/Actions.</a:t>
+              <a:t> Paso 3: escriban en ExamLab el diagrama Mermaid de fronteras de confianza con 3 zonas (publica, privada y de datos), los 5 contenedores de la Clase 4 ubicados en su zona, las aristas rotuladas con protocolo y puerto, y una arista punteada de trafico bloqueado, verificando al renderizar que la base de datos y la cola quedan en la zona de datos y que el usuario no tiene ninguna arista solida hacia ellas.</a:t>
             </a:r>
           </a:p>
           <a:p>
@@ -6676,7 +6676,7 @@
                 </a:solidFill>
                 <a:latin typeface="Calibri"/>
               </a:rPr>
-              <a:t> Redacten sección Seguridad del informe PI (1–1.5 páginas).</a:t>
+              <a:t> Paso 4: redacten la politica de secretos con los 6 puntos obligatorios (inventario de 4 secretos, donde vive cada uno, quien accede, rotacion, plan si se filtra, prohibiciones), verificando que ningun secreto quede en el Dockerfile, en el repositorio ni en el YAML en claro y que el plan de filtracion incluya rotar e invalidar la credencial anterior.</a:t>
             </a:r>
           </a:p>
           <a:p>
@@ -6710,7 +6710,7 @@
                 </a:solidFill>
                 <a:latin typeface="Calibri"/>
               </a:rPr>
-              <a:t> Entrega domingo 23:59 (avance PI).</a:t>
+              <a:t> Paso 5: integren la tabla STRIDE, el diagrama y la politica de secretos en la seccion Seguridad del informe (1 a 1.5 paginas) y suban las 5 preguntas a ExamLab (modulo Talleres) antes del domingo 23:59, verificando que cada amenaza de la tabla se pueda senalar con el dedo en el diagrama renderizado.</a:t>
             </a:r>
           </a:p>
         </p:txBody>

--- a/Arquitectura de Sistemas Computacionales/Clases/Clase 6 - Seguridad en la nube/Presentacion.pptx
+++ b/Arquitectura de Sistemas Computacionales/Clases/Clase 6 - Seguridad en la nube/Presentacion.pptx
@@ -4517,7 +4517,7 @@
                 </a:solidFill>
                 <a:latin typeface="Calibri"/>
               </a:rPr>
-              <a:t> Taller guiado PI (demo en vivo + trabajo de equipo).</a:t>
+              <a:t> Taller guiado PI (demo en vivo + avance individual).</a:t>
             </a:r>
           </a:p>
           <a:p>
@@ -5132,7 +5132,7 @@
                 </a:solidFill>
                 <a:latin typeface="Calibri"/>
               </a:rPr>
-              <a:t>–   Equipos 2–3 · todos deben poder explicar el artefacto.</a:t>
+              <a:t>–   Individual por defecto · el docente puede autorizar equipos de 2–3; la entrega en ExamLab siempre es individual.</a:t>
             </a:r>
           </a:p>
         </p:txBody>

--- a/Arquitectura de Sistemas Computacionales/Clases/Clase 6 - Seguridad en la nube/Presentacion.pptx
+++ b/Arquitectura de Sistemas Computacionales/Clases/Clase 6 - Seguridad en la nube/Presentacion.pptx
@@ -3850,7 +3850,7 @@
                 </a:solidFill>
                 <a:latin typeface="Calibri"/>
               </a:rPr>
-              <a:t>Subir evidencias al paquete CloudLite (Drive/repo) y a ExamLab (https://examlab.lovable.app/) domingo 23:59.</a:t>
+              <a:t>Subir evidencias al paquete CloudLite (Drive/repo) y a ExamLab (https://uniaj.examlab.workers.dev/) domingo 23:59.</a:t>
             </a:r>
           </a:p>
         </p:txBody>

--- a/Arquitectura de Sistemas Computacionales/Clases/Clase 6 - Seguridad en la nube/Presentacion.pptx
+++ b/Arquitectura de Sistemas Computacionales/Clases/Clase 6 - Seguridad en la nube/Presentacion.pptx
@@ -16,6 +16,8 @@
     <p:sldId id="264" r:id="rId15"/>
     <p:sldId id="265" r:id="rId16"/>
     <p:sldId id="266" r:id="rId17"/>
+    <p:sldId id="267" r:id="rId18"/>
+    <p:sldId id="268" r:id="rId19"/>
   </p:sldIdLst>
   <p:sldSz cx="12191695" cy="6858000" type="screen4x3"/>
   <p:notesSz cx="6858000" cy="9144000"/>
@@ -3468,7 +3470,7 @@
         <p:spPr>
           <a:xfrm>
             <a:off x="0" y="0"/>
-            <a:ext cx="12191695" cy="960120"/>
+            <a:ext cx="12191695" cy="1170432"/>
           </a:xfrm>
           <a:prstGeom prst="rect">
             <a:avLst/>
@@ -3510,7 +3512,7 @@
         </p:nvSpPr>
         <p:spPr>
           <a:xfrm>
-            <a:off x="0" y="960120"/>
+            <a:off x="0" y="1170432"/>
             <a:ext cx="12191695" cy="41148"/>
           </a:xfrm>
           <a:prstGeom prst="rect">
@@ -3554,7 +3556,7 @@
         <p:spPr>
           <a:xfrm>
             <a:off x="457200" y="164592"/>
-            <a:ext cx="11277295" cy="502920"/>
+            <a:ext cx="11277295" cy="384048"/>
           </a:xfrm>
           <a:prstGeom prst="rect">
             <a:avLst/>
@@ -3574,20 +3576,225 @@
                 </a:solidFill>
                 <a:latin typeface="Calibri"/>
               </a:rPr>
-              <a:t>Para continuar (PI)</a:t>
-            </a:r>
-          </a:p>
-        </p:txBody>
-      </p:sp>
-      <p:sp>
-        <p:nvSpPr>
-          <p:cNvPr id="5" name="Rounded Rectangle 4"/>
+              <a:t>Del boceto a ExamLab (diagrama)</a:t>
+            </a:r>
+          </a:p>
+        </p:txBody>
+      </p:sp>
+      <p:sp>
+        <p:nvSpPr>
+          <p:cNvPr id="5" name="TextBox 4"/>
+          <p:cNvSpPr txBox="1"/>
+          <p:nvPr/>
+        </p:nvSpPr>
+        <p:spPr>
+          <a:xfrm>
+            <a:off x="457200" y="566928"/>
+            <a:ext cx="11277295" cy="411480"/>
+          </a:xfrm>
+          <a:prstGeom prst="rect">
+            <a:avLst/>
+          </a:prstGeom>
+          <a:noFill/>
+        </p:spPr>
+        <p:txBody>
+          <a:bodyPr wrap="square">
+            <a:spAutoFit/>
+          </a:bodyPr>
+          <a:lstStyle/>
+          <a:p>
+            <a:r>
+              <a:rPr sz="1400" b="0" i="0">
+                <a:solidFill>
+                  <a:srgbClr val="B8D8EE"/>
+                </a:solidFill>
+                <a:latin typeface="Calibri"/>
+              </a:rPr>
+              <a:t>El diagrama se entrega como código Mermaid dentro de ExamLab, no como imagen</a:t>
+            </a:r>
+          </a:p>
+        </p:txBody>
+      </p:sp>
+      <p:sp>
+        <p:nvSpPr>
+          <p:cNvPr id="6" name="Rounded Rectangle 5"/>
           <p:cNvSpPr/>
           <p:nvPr/>
         </p:nvSpPr>
         <p:spPr>
           <a:xfrm>
-            <a:off x="457200" y="1261872"/>
+            <a:off x="457200" y="1659636"/>
+            <a:ext cx="11277295" cy="1051560"/>
+          </a:xfrm>
+          <a:prstGeom prst="roundRect">
+            <a:avLst>
+              <a:gd name="adj" fmla="val 12000"/>
+            </a:avLst>
+          </a:prstGeom>
+          <a:solidFill>
+            <a:srgbClr val="F2F2F2"/>
+          </a:solidFill>
+          <a:ln>
+            <a:noFill/>
+          </a:ln>
+        </p:spPr>
+        <p:style>
+          <a:lnRef idx="1">
+            <a:schemeClr val="accent1"/>
+          </a:lnRef>
+          <a:fillRef idx="3">
+            <a:schemeClr val="accent1"/>
+          </a:fillRef>
+          <a:effectRef idx="2">
+            <a:schemeClr val="accent1"/>
+          </a:effectRef>
+          <a:fontRef idx="minor">
+            <a:schemeClr val="lt1"/>
+          </a:fontRef>
+        </p:style>
+        <p:txBody>
+          <a:bodyPr rtlCol="0" anchor="ctr"/>
+          <a:lstStyle/>
+          <a:p>
+            <a:pPr algn="ctr"/>
+          </a:p>
+        </p:txBody>
+      </p:sp>
+      <p:sp>
+        <p:nvSpPr>
+          <p:cNvPr id="7" name="Rounded Rectangle 6"/>
+          <p:cNvSpPr/>
+          <p:nvPr/>
+        </p:nvSpPr>
+        <p:spPr>
+          <a:xfrm>
+            <a:off x="594360" y="1965960"/>
+            <a:ext cx="438912" cy="438912"/>
+          </a:xfrm>
+          <a:prstGeom prst="roundRect">
+            <a:avLst>
+              <a:gd name="adj" fmla="val 12000"/>
+            </a:avLst>
+          </a:prstGeom>
+          <a:solidFill>
+            <a:srgbClr val="095292"/>
+          </a:solidFill>
+          <a:ln>
+            <a:noFill/>
+          </a:ln>
+        </p:spPr>
+        <p:style>
+          <a:lnRef idx="1">
+            <a:schemeClr val="accent1"/>
+          </a:lnRef>
+          <a:fillRef idx="3">
+            <a:schemeClr val="accent1"/>
+          </a:fillRef>
+          <a:effectRef idx="2">
+            <a:schemeClr val="accent1"/>
+          </a:effectRef>
+          <a:fontRef idx="minor">
+            <a:schemeClr val="lt1"/>
+          </a:fontRef>
+        </p:style>
+        <p:txBody>
+          <a:bodyPr rtlCol="0" anchor="ctr"/>
+          <a:lstStyle/>
+          <a:p>
+            <a:pPr algn="ctr"/>
+          </a:p>
+        </p:txBody>
+      </p:sp>
+      <p:sp>
+        <p:nvSpPr>
+          <p:cNvPr id="8" name="TextBox 7"/>
+          <p:cNvSpPr txBox="1"/>
+          <p:nvPr/>
+        </p:nvSpPr>
+        <p:spPr>
+          <a:xfrm>
+            <a:off x="594360" y="1965960"/>
+            <a:ext cx="438912" cy="438912"/>
+          </a:xfrm>
+          <a:prstGeom prst="rect">
+            <a:avLst/>
+          </a:prstGeom>
+          <a:noFill/>
+        </p:spPr>
+        <p:txBody>
+          <a:bodyPr wrap="square" anchor="ctr"/>
+          <a:lstStyle/>
+          <a:p>
+            <a:pPr algn="ctr"/>
+            <a:r>
+              <a:rPr sz="1600" b="1" i="0">
+                <a:solidFill>
+                  <a:srgbClr val="FFFFFF"/>
+                </a:solidFill>
+                <a:latin typeface="Calibri"/>
+              </a:rPr>
+              <a:t>1</a:t>
+            </a:r>
+          </a:p>
+        </p:txBody>
+      </p:sp>
+      <p:sp>
+        <p:nvSpPr>
+          <p:cNvPr id="9" name="TextBox 8"/>
+          <p:cNvSpPr txBox="1"/>
+          <p:nvPr/>
+        </p:nvSpPr>
+        <p:spPr>
+          <a:xfrm>
+            <a:off x="1188720" y="1751076"/>
+            <a:ext cx="10271455" cy="886968"/>
+          </a:xfrm>
+          <a:prstGeom prst="rect">
+            <a:avLst/>
+          </a:prstGeom>
+          <a:noFill/>
+        </p:spPr>
+        <p:txBody>
+          <a:bodyPr wrap="square" anchor="ctr"/>
+          <a:lstStyle/>
+          <a:p>
+            <a:r>
+              <a:rPr sz="1500" b="1" i="0">
+                <a:solidFill>
+                  <a:srgbClr val="095292"/>
+                </a:solidFill>
+                <a:latin typeface="Calibri"/>
+              </a:rPr>
+              <a:t>Disena visual</a:t>
+            </a:r>
+          </a:p>
+          <a:p>
+            <a:pPr>
+              <a:spcBef>
+                <a:spcPts val="200"/>
+              </a:spcBef>
+            </a:pPr>
+            <a:r>
+              <a:rPr sz="1300" b="0" i="0">
+                <a:solidFill>
+                  <a:srgbClr val="333333"/>
+                </a:solidFill>
+                <a:latin typeface="Calibri"/>
+              </a:rPr>
+              <a:t>Dibuja el diagrama como quieras en Excalidraw o draw.io: es mas rapido arrastrar cajas que escribir codigo, y ahi es donde piensas el modelo.</a:t>
+            </a:r>
+          </a:p>
+        </p:txBody>
+      </p:sp>
+      <p:sp>
+        <p:nvSpPr>
+          <p:cNvPr id="10" name="Rounded Rectangle 9"/>
+          <p:cNvSpPr/>
+          <p:nvPr/>
+        </p:nvSpPr>
+        <p:spPr>
+          <a:xfrm>
+            <a:off x="457200" y="2802636"/>
             <a:ext cx="11277295" cy="1051560"/>
           </a:xfrm>
           <a:prstGeom prst="roundRect">
@@ -3626,20 +3833,22 @@
       </p:sp>
       <p:sp>
         <p:nvSpPr>
-          <p:cNvPr id="6" name="Rectangle 5"/>
+          <p:cNvPr id="11" name="Rounded Rectangle 10"/>
           <p:cNvSpPr/>
           <p:nvPr/>
         </p:nvSpPr>
         <p:spPr>
           <a:xfrm>
-            <a:off x="457200" y="1261872"/>
-            <a:ext cx="128016" cy="1051560"/>
-          </a:xfrm>
-          <a:prstGeom prst="rect">
-            <a:avLst/>
+            <a:off x="594360" y="3108960"/>
+            <a:ext cx="438912" cy="438912"/>
+          </a:xfrm>
+          <a:prstGeom prst="roundRect">
+            <a:avLst>
+              <a:gd name="adj" fmla="val 12000"/>
+            </a:avLst>
           </a:prstGeom>
           <a:solidFill>
-            <a:srgbClr val="269CCB"/>
+            <a:srgbClr val="095292"/>
           </a:solidFill>
           <a:ln>
             <a:noFill/>
@@ -3669,14 +3878,14 @@
       </p:sp>
       <p:sp>
         <p:nvSpPr>
-          <p:cNvPr id="7" name="TextBox 6"/>
+          <p:cNvPr id="12" name="TextBox 11"/>
           <p:cNvSpPr txBox="1"/>
           <p:nvPr/>
         </p:nvSpPr>
         <p:spPr>
           <a:xfrm>
-            <a:off x="777240" y="1399031"/>
-            <a:ext cx="10774375" cy="822959"/>
+            <a:off x="594360" y="3108960"/>
+            <a:ext cx="438912" cy="438912"/>
           </a:xfrm>
           <a:prstGeom prst="rect">
             <a:avLst/>
@@ -3684,48 +3893,79 @@
           <a:noFill/>
         </p:spPr>
         <p:txBody>
-          <a:bodyPr wrap="square">
-            <a:spAutoFit/>
-          </a:bodyPr>
-          <a:lstStyle/>
-          <a:p>
-            <a:r>
-              <a:rPr sz="1200" b="1" i="0">
-                <a:solidFill>
-                  <a:srgbClr val="269CCB"/>
-                </a:solidFill>
-                <a:latin typeface="Calibri"/>
-              </a:rPr>
-              <a:t>Info</a:t>
+          <a:bodyPr wrap="square" anchor="ctr"/>
+          <a:lstStyle/>
+          <a:p>
+            <a:pPr algn="ctr"/>
+            <a:r>
+              <a:rPr sz="1600" b="1" i="0">
+                <a:solidFill>
+                  <a:srgbClr val="FFFFFF"/>
+                </a:solidFill>
+                <a:latin typeface="Calibri"/>
+              </a:rPr>
+              <a:t>2</a:t>
+            </a:r>
+          </a:p>
+        </p:txBody>
+      </p:sp>
+      <p:sp>
+        <p:nvSpPr>
+          <p:cNvPr id="13" name="TextBox 12"/>
+          <p:cNvSpPr txBox="1"/>
+          <p:nvPr/>
+        </p:nvSpPr>
+        <p:spPr>
+          <a:xfrm>
+            <a:off x="1188720" y="2894076"/>
+            <a:ext cx="10271455" cy="886968"/>
+          </a:xfrm>
+          <a:prstGeom prst="rect">
+            <a:avLst/>
+          </a:prstGeom>
+          <a:noFill/>
+        </p:spPr>
+        <p:txBody>
+          <a:bodyPr wrap="square" anchor="ctr"/>
+          <a:lstStyle/>
+          <a:p>
+            <a:r>
+              <a:rPr sz="1500" b="1" i="0">
+                <a:solidFill>
+                  <a:srgbClr val="095292"/>
+                </a:solidFill>
+                <a:latin typeface="Calibri"/>
+              </a:rPr>
+              <a:t>Traduce con IA</a:t>
             </a:r>
           </a:p>
           <a:p>
             <a:pPr>
               <a:spcBef>
-                <a:spcPts val="400"/>
+                <a:spcPts val="200"/>
               </a:spcBef>
             </a:pPr>
             <a:r>
-              <a:rPr sz="1400" b="0" i="0">
+              <a:rPr sz="1300" b="0" i="0">
                 <a:solidFill>
                   <a:srgbClr val="333333"/>
                 </a:solidFill>
                 <a:latin typeface="Calibri"/>
               </a:rPr>
-              <a:t>Entregable: Sección Seguridad PI: 5 amenazas STRIDE-lite + controles + secretos/CI</a:t>
-            </a:r>
-          </a:p>
-        </p:txBody>
-      </p:sp>
-      <p:sp>
-        <p:nvSpPr>
-          <p:cNvPr id="8" name="Rounded Rectangle 7"/>
+              <a:t>Copia o describe tu boceto a una IA y pidele el codigo Mermaid: «convierte este diagrama a Mermaid usando flowchart». Revisa el resultado: la IA acierta la sintaxis, no tu modelo.</a:t>
+            </a:r>
+          </a:p>
+        </p:txBody>
+      </p:sp>
+      <p:sp>
+        <p:nvSpPr>
+          <p:cNvPr id="14" name="Rounded Rectangle 13"/>
           <p:cNvSpPr/>
           <p:nvPr/>
         </p:nvSpPr>
         <p:spPr>
           <a:xfrm>
-            <a:off x="457200" y="2478024"/>
+            <a:off x="457200" y="3945636"/>
             <a:ext cx="11277295" cy="1051560"/>
           </a:xfrm>
           <a:prstGeom prst="roundRect">
@@ -3734,7 +3974,7 @@
             </a:avLst>
           </a:prstGeom>
           <a:solidFill>
-            <a:srgbClr val="FFF8E1"/>
+            <a:srgbClr val="F2F2F2"/>
           </a:solidFill>
           <a:ln>
             <a:noFill/>
@@ -3764,20 +4004,22 @@
       </p:sp>
       <p:sp>
         <p:nvSpPr>
-          <p:cNvPr id="9" name="Rectangle 8"/>
+          <p:cNvPr id="15" name="Rounded Rectangle 14"/>
           <p:cNvSpPr/>
           <p:nvPr/>
         </p:nvSpPr>
         <p:spPr>
           <a:xfrm>
-            <a:off x="457200" y="2478024"/>
-            <a:ext cx="128016" cy="1051560"/>
-          </a:xfrm>
-          <a:prstGeom prst="rect">
-            <a:avLst/>
+            <a:off x="594360" y="4251960"/>
+            <a:ext cx="438912" cy="438912"/>
+          </a:xfrm>
+          <a:prstGeom prst="roundRect">
+            <a:avLst>
+              <a:gd name="adj" fmla="val 12000"/>
+            </a:avLst>
           </a:prstGeom>
           <a:solidFill>
-            <a:srgbClr val="FFD000"/>
+            <a:srgbClr val="095292"/>
           </a:solidFill>
           <a:ln>
             <a:noFill/>
@@ -3807,14 +4049,14 @@
       </p:sp>
       <p:sp>
         <p:nvSpPr>
-          <p:cNvPr id="10" name="TextBox 9"/>
+          <p:cNvPr id="16" name="TextBox 15"/>
           <p:cNvSpPr txBox="1"/>
           <p:nvPr/>
         </p:nvSpPr>
         <p:spPr>
           <a:xfrm>
-            <a:off x="777240" y="2615184"/>
-            <a:ext cx="10774375" cy="822959"/>
+            <a:off x="594360" y="4251960"/>
+            <a:ext cx="438912" cy="438912"/>
           </a:xfrm>
           <a:prstGeom prst="rect">
             <a:avLst/>
@@ -3822,48 +4064,79 @@
           <a:noFill/>
         </p:spPr>
         <p:txBody>
-          <a:bodyPr wrap="square">
-            <a:spAutoFit/>
-          </a:bodyPr>
-          <a:lstStyle/>
-          <a:p>
-            <a:r>
-              <a:rPr sz="1200" b="1" i="0">
-                <a:solidFill>
-                  <a:srgbClr val="FFD000"/>
-                </a:solidFill>
-                <a:latin typeface="Calibri"/>
-              </a:rPr>
-              <a:t>Aclaración</a:t>
+          <a:bodyPr wrap="square" anchor="ctr"/>
+          <a:lstStyle/>
+          <a:p>
+            <a:pPr algn="ctr"/>
+            <a:r>
+              <a:rPr sz="1600" b="1" i="0">
+                <a:solidFill>
+                  <a:srgbClr val="FFFFFF"/>
+                </a:solidFill>
+                <a:latin typeface="Calibri"/>
+              </a:rPr>
+              <a:t>3</a:t>
+            </a:r>
+          </a:p>
+        </p:txBody>
+      </p:sp>
+      <p:sp>
+        <p:nvSpPr>
+          <p:cNvPr id="17" name="TextBox 16"/>
+          <p:cNvSpPr txBox="1"/>
+          <p:nvPr/>
+        </p:nvSpPr>
+        <p:spPr>
+          <a:xfrm>
+            <a:off x="1188720" y="4037076"/>
+            <a:ext cx="10271455" cy="886968"/>
+          </a:xfrm>
+          <a:prstGeom prst="rect">
+            <a:avLst/>
+          </a:prstGeom>
+          <a:noFill/>
+        </p:spPr>
+        <p:txBody>
+          <a:bodyPr wrap="square" anchor="ctr"/>
+          <a:lstStyle/>
+          <a:p>
+            <a:r>
+              <a:rPr sz="1500" b="1" i="0">
+                <a:solidFill>
+                  <a:srgbClr val="095292"/>
+                </a:solidFill>
+                <a:latin typeface="Calibri"/>
+              </a:rPr>
+              <a:t>Pega y renderiza en ExamLab</a:t>
             </a:r>
           </a:p>
           <a:p>
             <a:pPr>
               <a:spcBef>
-                <a:spcPts val="400"/>
+                <a:spcPts val="200"/>
               </a:spcBef>
             </a:pPr>
             <a:r>
-              <a:rPr sz="1400" b="0" i="0">
+              <a:rPr sz="1300" b="0" i="0">
                 <a:solidFill>
                   <a:srgbClr val="333333"/>
                 </a:solidFill>
                 <a:latin typeface="Calibri"/>
               </a:rPr>
-              <a:t>Subir evidencias al paquete CloudLite (Drive/repo) y a ExamLab (https://uniaj.examlab.workers.dev/) domingo 23:59.</a:t>
-            </a:r>
-          </a:p>
-        </p:txBody>
-      </p:sp>
-      <p:sp>
-        <p:nvSpPr>
-          <p:cNvPr id="11" name="Rounded Rectangle 10"/>
+              <a:t>Pega ese codigo en la caja de texto de la pregunta y mira como lo dibuja la plataforma. Si no renderiza, corrige ahi mismo: lo que se califica es el diagrama renderizado dentro de ExamLab.</a:t>
+            </a:r>
+          </a:p>
+        </p:txBody>
+      </p:sp>
+      <p:sp>
+        <p:nvSpPr>
+          <p:cNvPr id="18" name="Rounded Rectangle 17"/>
           <p:cNvSpPr/>
           <p:nvPr/>
         </p:nvSpPr>
         <p:spPr>
           <a:xfrm>
-            <a:off x="457200" y="3694176"/>
+            <a:off x="457200" y="5088636"/>
             <a:ext cx="11277295" cy="1051560"/>
           </a:xfrm>
           <a:prstGeom prst="roundRect">
@@ -3872,7 +4145,7 @@
             </a:avLst>
           </a:prstGeom>
           <a:solidFill>
-            <a:srgbClr val="FBE4E4"/>
+            <a:srgbClr val="E8F4FA"/>
           </a:solidFill>
           <a:ln>
             <a:noFill/>
@@ -3902,20 +4175,22 @@
       </p:sp>
       <p:sp>
         <p:nvSpPr>
-          <p:cNvPr id="12" name="Rectangle 11"/>
+          <p:cNvPr id="19" name="Rounded Rectangle 18"/>
           <p:cNvSpPr/>
           <p:nvPr/>
         </p:nvSpPr>
         <p:spPr>
           <a:xfrm>
-            <a:off x="457200" y="3694176"/>
-            <a:ext cx="128016" cy="1051560"/>
-          </a:xfrm>
-          <a:prstGeom prst="rect">
-            <a:avLst/>
+            <a:off x="594360" y="5394960"/>
+            <a:ext cx="438912" cy="438912"/>
+          </a:xfrm>
+          <a:prstGeom prst="roundRect">
+            <a:avLst>
+              <a:gd name="adj" fmla="val 12000"/>
+            </a:avLst>
           </a:prstGeom>
           <a:solidFill>
-            <a:srgbClr val="A02030"/>
+            <a:srgbClr val="095292"/>
           </a:solidFill>
           <a:ln>
             <a:noFill/>
@@ -3945,14 +4220,14 @@
       </p:sp>
       <p:sp>
         <p:nvSpPr>
-          <p:cNvPr id="13" name="TextBox 12"/>
+          <p:cNvPr id="20" name="TextBox 19"/>
           <p:cNvSpPr txBox="1"/>
           <p:nvPr/>
         </p:nvSpPr>
         <p:spPr>
           <a:xfrm>
-            <a:off x="777240" y="3831336"/>
-            <a:ext cx="10774375" cy="822959"/>
+            <a:off x="594360" y="5394960"/>
+            <a:ext cx="438912" cy="438912"/>
           </a:xfrm>
           <a:prstGeom prst="rect">
             <a:avLst/>
@@ -3960,42 +4235,73 @@
           <a:noFill/>
         </p:spPr>
         <p:txBody>
-          <a:bodyPr wrap="square">
-            <a:spAutoFit/>
-          </a:bodyPr>
-          <a:lstStyle/>
-          <a:p>
-            <a:r>
-              <a:rPr sz="1200" b="1" i="0">
-                <a:solidFill>
-                  <a:srgbClr val="A02030"/>
-                </a:solidFill>
-                <a:latin typeface="Calibri"/>
-              </a:rPr>
-              <a:t>Atención</a:t>
+          <a:bodyPr wrap="square" anchor="ctr"/>
+          <a:lstStyle/>
+          <a:p>
+            <a:pPr algn="ctr"/>
+            <a:r>
+              <a:rPr sz="1600" b="1" i="0">
+                <a:solidFill>
+                  <a:srgbClr val="FFFFFF"/>
+                </a:solidFill>
+                <a:latin typeface="Calibri"/>
+              </a:rPr>
+              <a:t>4</a:t>
+            </a:r>
+          </a:p>
+        </p:txBody>
+      </p:sp>
+      <p:sp>
+        <p:nvSpPr>
+          <p:cNvPr id="21" name="TextBox 20"/>
+          <p:cNvSpPr txBox="1"/>
+          <p:nvPr/>
+        </p:nvSpPr>
+        <p:spPr>
+          <a:xfrm>
+            <a:off x="1188720" y="5180076"/>
+            <a:ext cx="10271455" cy="886968"/>
+          </a:xfrm>
+          <a:prstGeom prst="rect">
+            <a:avLst/>
+          </a:prstGeom>
+          <a:noFill/>
+        </p:spPr>
+        <p:txBody>
+          <a:bodyPr wrap="square" anchor="ctr"/>
+          <a:lstStyle/>
+          <a:p>
+            <a:r>
+              <a:rPr sz="1500" b="1" i="0">
+                <a:solidFill>
+                  <a:srgbClr val="095292"/>
+                </a:solidFill>
+                <a:latin typeface="Calibri"/>
+              </a:rPr>
+              <a:t>Guarda el PNG para tu PI</a:t>
             </a:r>
           </a:p>
           <a:p>
             <a:pPr>
               <a:spcBef>
-                <a:spcPts val="400"/>
+                <a:spcPts val="200"/>
               </a:spcBef>
             </a:pPr>
             <a:r>
-              <a:rPr sz="1400" b="0" i="0">
+              <a:rPr sz="1300" b="0" i="0">
                 <a:solidFill>
                   <a:srgbClr val="333333"/>
                 </a:solidFill>
                 <a:latin typeface="Calibri"/>
               </a:rPr>
-              <a:t>Sin cloud de pago ni instalaciones obligatorias de hipervisores/Docker Desktop.</a:t>
-            </a:r>
-          </a:p>
-        </p:txBody>
-      </p:sp>
-      <p:sp>
-        <p:nvSpPr>
-          <p:cNvPr id="14" name="TextBox 13"/>
+              <a:t>Exporta tambien la imagen a la carpeta de tu Proyecto Integrador. Esa copia es para tu informe; no reemplaza la respuesta en la plataforma.</a:t>
+            </a:r>
+          </a:p>
+        </p:txBody>
+      </p:sp>
+      <p:sp>
+        <p:nvSpPr>
+          <p:cNvPr id="22" name="TextBox 21"/>
           <p:cNvSpPr txBox="1"/>
           <p:nvPr/>
         </p:nvSpPr>
@@ -4063,6 +4369,966 @@
         <p:spPr>
           <a:xfrm>
             <a:off x="0" y="0"/>
+            <a:ext cx="12191695" cy="960120"/>
+          </a:xfrm>
+          <a:prstGeom prst="rect">
+            <a:avLst/>
+          </a:prstGeom>
+          <a:solidFill>
+            <a:srgbClr val="095292"/>
+          </a:solidFill>
+          <a:ln>
+            <a:noFill/>
+          </a:ln>
+        </p:spPr>
+        <p:style>
+          <a:lnRef idx="1">
+            <a:schemeClr val="accent1"/>
+          </a:lnRef>
+          <a:fillRef idx="3">
+            <a:schemeClr val="accent1"/>
+          </a:fillRef>
+          <a:effectRef idx="2">
+            <a:schemeClr val="accent1"/>
+          </a:effectRef>
+          <a:fontRef idx="minor">
+            <a:schemeClr val="lt1"/>
+          </a:fontRef>
+        </p:style>
+        <p:txBody>
+          <a:bodyPr rtlCol="0" anchor="ctr"/>
+          <a:lstStyle/>
+          <a:p>
+            <a:pPr algn="ctr"/>
+          </a:p>
+        </p:txBody>
+      </p:sp>
+      <p:sp>
+        <p:nvSpPr>
+          <p:cNvPr id="3" name="Rectangle 2"/>
+          <p:cNvSpPr/>
+          <p:nvPr/>
+        </p:nvSpPr>
+        <p:spPr>
+          <a:xfrm>
+            <a:off x="0" y="960120"/>
+            <a:ext cx="12191695" cy="41148"/>
+          </a:xfrm>
+          <a:prstGeom prst="rect">
+            <a:avLst/>
+          </a:prstGeom>
+          <a:solidFill>
+            <a:srgbClr val="FFD000"/>
+          </a:solidFill>
+          <a:ln>
+            <a:noFill/>
+          </a:ln>
+        </p:spPr>
+        <p:style>
+          <a:lnRef idx="1">
+            <a:schemeClr val="accent1"/>
+          </a:lnRef>
+          <a:fillRef idx="3">
+            <a:schemeClr val="accent1"/>
+          </a:fillRef>
+          <a:effectRef idx="2">
+            <a:schemeClr val="accent1"/>
+          </a:effectRef>
+          <a:fontRef idx="minor">
+            <a:schemeClr val="lt1"/>
+          </a:fontRef>
+        </p:style>
+        <p:txBody>
+          <a:bodyPr rtlCol="0" anchor="ctr"/>
+          <a:lstStyle/>
+          <a:p>
+            <a:pPr algn="ctr"/>
+          </a:p>
+        </p:txBody>
+      </p:sp>
+      <p:sp>
+        <p:nvSpPr>
+          <p:cNvPr id="4" name="TextBox 3"/>
+          <p:cNvSpPr txBox="1"/>
+          <p:nvPr/>
+        </p:nvSpPr>
+        <p:spPr>
+          <a:xfrm>
+            <a:off x="457200" y="164592"/>
+            <a:ext cx="11277295" cy="502920"/>
+          </a:xfrm>
+          <a:prstGeom prst="rect">
+            <a:avLst/>
+          </a:prstGeom>
+          <a:noFill/>
+        </p:spPr>
+        <p:txBody>
+          <a:bodyPr wrap="square">
+            <a:spAutoFit/>
+          </a:bodyPr>
+          <a:lstStyle/>
+          <a:p>
+            <a:r>
+              <a:rPr sz="2600" b="1" i="0">
+                <a:solidFill>
+                  <a:srgbClr val="FFFFFF"/>
+                </a:solidFill>
+                <a:latin typeface="Calibri"/>
+              </a:rPr>
+              <a:t>Taller PI (paso a paso)</a:t>
+            </a:r>
+          </a:p>
+        </p:txBody>
+      </p:sp>
+      <p:sp>
+        <p:nvSpPr>
+          <p:cNvPr id="5" name="TextBox 4"/>
+          <p:cNvSpPr txBox="1"/>
+          <p:nvPr/>
+        </p:nvSpPr>
+        <p:spPr>
+          <a:xfrm>
+            <a:off x="457200" y="1170432"/>
+            <a:ext cx="11277295" cy="5230368"/>
+          </a:xfrm>
+          <a:prstGeom prst="rect">
+            <a:avLst/>
+          </a:prstGeom>
+          <a:noFill/>
+        </p:spPr>
+        <p:txBody>
+          <a:bodyPr wrap="square">
+            <a:spAutoFit/>
+          </a:bodyPr>
+          <a:lstStyle/>
+          <a:p>
+            <a:pPr>
+              <a:spcAft>
+                <a:spcPts val="800"/>
+              </a:spcAft>
+            </a:pPr>
+            <a:r>
+              <a:rPr sz="1600" b="1" i="0">
+                <a:solidFill>
+                  <a:srgbClr val="333333"/>
+                </a:solidFill>
+                <a:latin typeface="Calibri"/>
+              </a:rPr>
+              <a:t>1.</a:t>
+            </a:r>
+            <a:r>
+              <a:rPr sz="1600" b="0" i="0">
+                <a:solidFill>
+                  <a:srgbClr val="333333"/>
+                </a:solidFill>
+                <a:latin typeface="Calibri"/>
+              </a:rPr>
+              <a:t> Paso 1: liste 5 amenazas concretas de su dominio, una por cada categoria de STRIDE-lite (suplantacion, manipulacion, divulgacion de informacion, denegacion de servicio y elevacion de privilegios), verificando que cada amenaza nombre el activo afectado de su propio C4 (por ejemplo la Base de datos Citas o el token del estudiante) y que ninguna sea copiada como frase generica de internet.</a:t>
+            </a:r>
+          </a:p>
+          <a:p>
+            <a:pPr>
+              <a:spcAft>
+                <a:spcPts val="800"/>
+              </a:spcAft>
+            </a:pPr>
+            <a:r>
+              <a:rPr sz="1600" b="0" i="0">
+                <a:solidFill>
+                  <a:srgbClr val="333333"/>
+                </a:solidFill>
+                <a:latin typeface="Calibri"/>
+              </a:rPr>
+              <a:t>–   </a:t>
+            </a:r>
+            <a:r>
+              <a:rPr sz="1600" b="1" i="0">
+                <a:solidFill>
+                  <a:srgbClr val="333333"/>
+                </a:solidFill>
+                <a:latin typeface="Calibri"/>
+              </a:rPr>
+              <a:t>2.</a:t>
+            </a:r>
+            <a:r>
+              <a:rPr sz="1600" b="0" i="0">
+                <a:solidFill>
+                  <a:srgbClr val="333333"/>
+                </a:solidFill>
+                <a:latin typeface="Calibri"/>
+              </a:rPr>
+              <a:t> Paso 2: asigne a cada amenaza un control tecnico y la flecha o zona exacta del diagrama donde se ve ese control, verificando que los 5 controles sean distintos entre si y que al menos uno sea preventivo, uno detectivo y uno de contencion; la tabla completa queda en la seccion Seguridad del informe del PI.</a:t>
+            </a:r>
+          </a:p>
+          <a:p>
+            <a:pPr>
+              <a:spcAft>
+                <a:spcPts val="800"/>
+              </a:spcAft>
+            </a:pPr>
+            <a:r>
+              <a:rPr sz="1600" b="0" i="0">
+                <a:solidFill>
+                  <a:srgbClr val="333333"/>
+                </a:solidFill>
+                <a:latin typeface="Calibri"/>
+              </a:rPr>
+              <a:t>–   </a:t>
+            </a:r>
+            <a:r>
+              <a:rPr sz="1600" b="1" i="0">
+                <a:solidFill>
+                  <a:srgbClr val="333333"/>
+                </a:solidFill>
+                <a:latin typeface="Calibri"/>
+              </a:rPr>
+              <a:t>3.</a:t>
+            </a:r>
+            <a:r>
+              <a:rPr sz="1600" b="0" i="0">
+                <a:solidFill>
+                  <a:srgbClr val="333333"/>
+                </a:solidFill>
+                <a:latin typeface="Calibri"/>
+              </a:rPr>
+              <a:t> Paso 3: escriban en ExamLab el diagrama Mermaid de fronteras de confianza con 3 zonas (publica, privada y de datos), los 5 contenedores de la Clase 4 ubicados en su zona, las aristas rotuladas con protocolo y puerto, y una arista punteada de trafico bloqueado, verificando al renderizar que la base de datos y la cola quedan en la zona de datos y que el usuario no tiene ninguna arista solida hacia ellas.</a:t>
+            </a:r>
+          </a:p>
+          <a:p>
+            <a:pPr>
+              <a:spcAft>
+                <a:spcPts val="800"/>
+              </a:spcAft>
+            </a:pPr>
+            <a:r>
+              <a:rPr sz="1600" b="0" i="0">
+                <a:solidFill>
+                  <a:srgbClr val="333333"/>
+                </a:solidFill>
+                <a:latin typeface="Calibri"/>
+              </a:rPr>
+              <a:t>–   </a:t>
+            </a:r>
+            <a:r>
+              <a:rPr sz="1600" b="1" i="0">
+                <a:solidFill>
+                  <a:srgbClr val="333333"/>
+                </a:solidFill>
+                <a:latin typeface="Calibri"/>
+              </a:rPr>
+              <a:t>4.</a:t>
+            </a:r>
+            <a:r>
+              <a:rPr sz="1600" b="0" i="0">
+                <a:solidFill>
+                  <a:srgbClr val="333333"/>
+                </a:solidFill>
+                <a:latin typeface="Calibri"/>
+              </a:rPr>
+              <a:t> Paso 4: redacten la politica de secretos con los 6 puntos obligatorios (inventario de 4 secretos, donde vive cada uno, quien accede, rotacion, plan si se filtra, prohibiciones), verificando que ningun secreto quede en el Dockerfile, en el repositorio ni en el YAML en claro y que el plan de filtracion incluya rotar e invalidar la credencial anterior.</a:t>
+            </a:r>
+          </a:p>
+          <a:p>
+            <a:pPr>
+              <a:spcAft>
+                <a:spcPts val="800"/>
+              </a:spcAft>
+            </a:pPr>
+            <a:r>
+              <a:rPr sz="1600" b="0" i="0">
+                <a:solidFill>
+                  <a:srgbClr val="333333"/>
+                </a:solidFill>
+                <a:latin typeface="Calibri"/>
+              </a:rPr>
+              <a:t>–   </a:t>
+            </a:r>
+            <a:r>
+              <a:rPr sz="1600" b="1" i="0">
+                <a:solidFill>
+                  <a:srgbClr val="333333"/>
+                </a:solidFill>
+                <a:latin typeface="Calibri"/>
+              </a:rPr>
+              <a:t>5.</a:t>
+            </a:r>
+            <a:r>
+              <a:rPr sz="1600" b="0" i="0">
+                <a:solidFill>
+                  <a:srgbClr val="333333"/>
+                </a:solidFill>
+                <a:latin typeface="Calibri"/>
+              </a:rPr>
+              <a:t> Paso 5: integren la tabla STRIDE, el diagrama y la politica de secretos en la seccion Seguridad del informe (1 a 1.5 paginas) y suban las 5 preguntas a ExamLab (modulo Talleres) antes del domingo 23:59, verificando que cada amenaza de la tabla se pueda senalar con el dedo en el diagrama renderizado.</a:t>
+            </a:r>
+          </a:p>
+        </p:txBody>
+      </p:sp>
+      <p:sp>
+        <p:nvSpPr>
+          <p:cNvPr id="6" name="TextBox 5"/>
+          <p:cNvSpPr txBox="1"/>
+          <p:nvPr/>
+        </p:nvSpPr>
+        <p:spPr>
+          <a:xfrm>
+            <a:off x="11185855" y="6473952"/>
+            <a:ext cx="640080" cy="274320"/>
+          </a:xfrm>
+          <a:prstGeom prst="rect">
+            <a:avLst/>
+          </a:prstGeom>
+          <a:noFill/>
+        </p:spPr>
+        <p:txBody>
+          <a:bodyPr wrap="square">
+            <a:spAutoFit/>
+          </a:bodyPr>
+          <a:lstStyle/>
+          <a:p>
+            <a:pPr algn="r"/>
+            <a:r>
+              <a:rPr sz="1100" b="0" i="0">
+                <a:solidFill>
+                  <a:srgbClr val="666666"/>
+                </a:solidFill>
+                <a:latin typeface="Calibri"/>
+              </a:rPr>
+              <a:t>11</a:t>
+            </a:r>
+          </a:p>
+        </p:txBody>
+      </p:sp>
+    </p:spTree>
+  </p:cSld>
+  <p:clrMapOvr>
+    <a:masterClrMapping/>
+  </p:clrMapOvr>
+</p:sld>
+</file>
+
+<file path=ppt/slides/slide12.xml><?xml version="1.0" encoding="utf-8"?>
+<p:sld xmlns:a="http://schemas.openxmlformats.org/drawingml/2006/main" xmlns:p="http://schemas.openxmlformats.org/presentationml/2006/main" xmlns:r="http://schemas.openxmlformats.org/officeDocument/2006/relationships">
+  <p:cSld>
+    <p:bg>
+      <p:bgPr>
+        <a:solidFill>
+          <a:srgbClr val="FFFFFF"/>
+        </a:solidFill>
+        <a:effectLst/>
+      </p:bgPr>
+    </p:bg>
+    <p:spTree>
+      <p:nvGrpSpPr>
+        <p:cNvPr id="1" name=""/>
+        <p:cNvGrpSpPr/>
+        <p:nvPr/>
+      </p:nvGrpSpPr>
+      <p:grpSpPr/>
+      <p:sp>
+        <p:nvSpPr>
+          <p:cNvPr id="2" name="Rectangle 1"/>
+          <p:cNvSpPr/>
+          <p:nvPr/>
+        </p:nvSpPr>
+        <p:spPr>
+          <a:xfrm>
+            <a:off x="0" y="0"/>
+            <a:ext cx="12191695" cy="960120"/>
+          </a:xfrm>
+          <a:prstGeom prst="rect">
+            <a:avLst/>
+          </a:prstGeom>
+          <a:solidFill>
+            <a:srgbClr val="095292"/>
+          </a:solidFill>
+          <a:ln>
+            <a:noFill/>
+          </a:ln>
+        </p:spPr>
+        <p:style>
+          <a:lnRef idx="1">
+            <a:schemeClr val="accent1"/>
+          </a:lnRef>
+          <a:fillRef idx="3">
+            <a:schemeClr val="accent1"/>
+          </a:fillRef>
+          <a:effectRef idx="2">
+            <a:schemeClr val="accent1"/>
+          </a:effectRef>
+          <a:fontRef idx="minor">
+            <a:schemeClr val="lt1"/>
+          </a:fontRef>
+        </p:style>
+        <p:txBody>
+          <a:bodyPr rtlCol="0" anchor="ctr"/>
+          <a:lstStyle/>
+          <a:p>
+            <a:pPr algn="ctr"/>
+          </a:p>
+        </p:txBody>
+      </p:sp>
+      <p:sp>
+        <p:nvSpPr>
+          <p:cNvPr id="3" name="Rectangle 2"/>
+          <p:cNvSpPr/>
+          <p:nvPr/>
+        </p:nvSpPr>
+        <p:spPr>
+          <a:xfrm>
+            <a:off x="0" y="960120"/>
+            <a:ext cx="12191695" cy="41148"/>
+          </a:xfrm>
+          <a:prstGeom prst="rect">
+            <a:avLst/>
+          </a:prstGeom>
+          <a:solidFill>
+            <a:srgbClr val="FFD000"/>
+          </a:solidFill>
+          <a:ln>
+            <a:noFill/>
+          </a:ln>
+        </p:spPr>
+        <p:style>
+          <a:lnRef idx="1">
+            <a:schemeClr val="accent1"/>
+          </a:lnRef>
+          <a:fillRef idx="3">
+            <a:schemeClr val="accent1"/>
+          </a:fillRef>
+          <a:effectRef idx="2">
+            <a:schemeClr val="accent1"/>
+          </a:effectRef>
+          <a:fontRef idx="minor">
+            <a:schemeClr val="lt1"/>
+          </a:fontRef>
+        </p:style>
+        <p:txBody>
+          <a:bodyPr rtlCol="0" anchor="ctr"/>
+          <a:lstStyle/>
+          <a:p>
+            <a:pPr algn="ctr"/>
+          </a:p>
+        </p:txBody>
+      </p:sp>
+      <p:sp>
+        <p:nvSpPr>
+          <p:cNvPr id="4" name="TextBox 3"/>
+          <p:cNvSpPr txBox="1"/>
+          <p:nvPr/>
+        </p:nvSpPr>
+        <p:spPr>
+          <a:xfrm>
+            <a:off x="457200" y="164592"/>
+            <a:ext cx="11277295" cy="502920"/>
+          </a:xfrm>
+          <a:prstGeom prst="rect">
+            <a:avLst/>
+          </a:prstGeom>
+          <a:noFill/>
+        </p:spPr>
+        <p:txBody>
+          <a:bodyPr wrap="square">
+            <a:spAutoFit/>
+          </a:bodyPr>
+          <a:lstStyle/>
+          <a:p>
+            <a:r>
+              <a:rPr sz="2600" b="1" i="0">
+                <a:solidFill>
+                  <a:srgbClr val="FFFFFF"/>
+                </a:solidFill>
+                <a:latin typeface="Calibri"/>
+              </a:rPr>
+              <a:t>Para continuar (PI)</a:t>
+            </a:r>
+          </a:p>
+        </p:txBody>
+      </p:sp>
+      <p:sp>
+        <p:nvSpPr>
+          <p:cNvPr id="5" name="Rounded Rectangle 4"/>
+          <p:cNvSpPr/>
+          <p:nvPr/>
+        </p:nvSpPr>
+        <p:spPr>
+          <a:xfrm>
+            <a:off x="457200" y="1261872"/>
+            <a:ext cx="11277295" cy="1051560"/>
+          </a:xfrm>
+          <a:prstGeom prst="roundRect">
+            <a:avLst>
+              <a:gd name="adj" fmla="val 12000"/>
+            </a:avLst>
+          </a:prstGeom>
+          <a:solidFill>
+            <a:srgbClr val="E8F4FA"/>
+          </a:solidFill>
+          <a:ln>
+            <a:noFill/>
+          </a:ln>
+        </p:spPr>
+        <p:style>
+          <a:lnRef idx="1">
+            <a:schemeClr val="accent1"/>
+          </a:lnRef>
+          <a:fillRef idx="3">
+            <a:schemeClr val="accent1"/>
+          </a:fillRef>
+          <a:effectRef idx="2">
+            <a:schemeClr val="accent1"/>
+          </a:effectRef>
+          <a:fontRef idx="minor">
+            <a:schemeClr val="lt1"/>
+          </a:fontRef>
+        </p:style>
+        <p:txBody>
+          <a:bodyPr rtlCol="0" anchor="ctr"/>
+          <a:lstStyle/>
+          <a:p>
+            <a:pPr algn="ctr"/>
+          </a:p>
+        </p:txBody>
+      </p:sp>
+      <p:sp>
+        <p:nvSpPr>
+          <p:cNvPr id="6" name="Rectangle 5"/>
+          <p:cNvSpPr/>
+          <p:nvPr/>
+        </p:nvSpPr>
+        <p:spPr>
+          <a:xfrm>
+            <a:off x="457200" y="1261872"/>
+            <a:ext cx="128016" cy="1051560"/>
+          </a:xfrm>
+          <a:prstGeom prst="rect">
+            <a:avLst/>
+          </a:prstGeom>
+          <a:solidFill>
+            <a:srgbClr val="269CCB"/>
+          </a:solidFill>
+          <a:ln>
+            <a:noFill/>
+          </a:ln>
+        </p:spPr>
+        <p:style>
+          <a:lnRef idx="1">
+            <a:schemeClr val="accent1"/>
+          </a:lnRef>
+          <a:fillRef idx="3">
+            <a:schemeClr val="accent1"/>
+          </a:fillRef>
+          <a:effectRef idx="2">
+            <a:schemeClr val="accent1"/>
+          </a:effectRef>
+          <a:fontRef idx="minor">
+            <a:schemeClr val="lt1"/>
+          </a:fontRef>
+        </p:style>
+        <p:txBody>
+          <a:bodyPr rtlCol="0" anchor="ctr"/>
+          <a:lstStyle/>
+          <a:p>
+            <a:pPr algn="ctr"/>
+          </a:p>
+        </p:txBody>
+      </p:sp>
+      <p:sp>
+        <p:nvSpPr>
+          <p:cNvPr id="7" name="TextBox 6"/>
+          <p:cNvSpPr txBox="1"/>
+          <p:nvPr/>
+        </p:nvSpPr>
+        <p:spPr>
+          <a:xfrm>
+            <a:off x="777240" y="1399031"/>
+            <a:ext cx="10774375" cy="822959"/>
+          </a:xfrm>
+          <a:prstGeom prst="rect">
+            <a:avLst/>
+          </a:prstGeom>
+          <a:noFill/>
+        </p:spPr>
+        <p:txBody>
+          <a:bodyPr wrap="square">
+            <a:spAutoFit/>
+          </a:bodyPr>
+          <a:lstStyle/>
+          <a:p>
+            <a:r>
+              <a:rPr sz="1200" b="1" i="0">
+                <a:solidFill>
+                  <a:srgbClr val="269CCB"/>
+                </a:solidFill>
+                <a:latin typeface="Calibri"/>
+              </a:rPr>
+              <a:t>Info</a:t>
+            </a:r>
+          </a:p>
+          <a:p>
+            <a:pPr>
+              <a:spcBef>
+                <a:spcPts val="400"/>
+              </a:spcBef>
+            </a:pPr>
+            <a:r>
+              <a:rPr sz="1400" b="0" i="0">
+                <a:solidFill>
+                  <a:srgbClr val="333333"/>
+                </a:solidFill>
+                <a:latin typeface="Calibri"/>
+              </a:rPr>
+              <a:t>Entregable: Sección Seguridad PI: 5 amenazas STRIDE-lite + controles + secretos/CI</a:t>
+            </a:r>
+          </a:p>
+        </p:txBody>
+      </p:sp>
+      <p:sp>
+        <p:nvSpPr>
+          <p:cNvPr id="8" name="Rounded Rectangle 7"/>
+          <p:cNvSpPr/>
+          <p:nvPr/>
+        </p:nvSpPr>
+        <p:spPr>
+          <a:xfrm>
+            <a:off x="457200" y="2478024"/>
+            <a:ext cx="11277295" cy="1051560"/>
+          </a:xfrm>
+          <a:prstGeom prst="roundRect">
+            <a:avLst>
+              <a:gd name="adj" fmla="val 12000"/>
+            </a:avLst>
+          </a:prstGeom>
+          <a:solidFill>
+            <a:srgbClr val="FFF8E1"/>
+          </a:solidFill>
+          <a:ln>
+            <a:noFill/>
+          </a:ln>
+        </p:spPr>
+        <p:style>
+          <a:lnRef idx="1">
+            <a:schemeClr val="accent1"/>
+          </a:lnRef>
+          <a:fillRef idx="3">
+            <a:schemeClr val="accent1"/>
+          </a:fillRef>
+          <a:effectRef idx="2">
+            <a:schemeClr val="accent1"/>
+          </a:effectRef>
+          <a:fontRef idx="minor">
+            <a:schemeClr val="lt1"/>
+          </a:fontRef>
+        </p:style>
+        <p:txBody>
+          <a:bodyPr rtlCol="0" anchor="ctr"/>
+          <a:lstStyle/>
+          <a:p>
+            <a:pPr algn="ctr"/>
+          </a:p>
+        </p:txBody>
+      </p:sp>
+      <p:sp>
+        <p:nvSpPr>
+          <p:cNvPr id="9" name="Rectangle 8"/>
+          <p:cNvSpPr/>
+          <p:nvPr/>
+        </p:nvSpPr>
+        <p:spPr>
+          <a:xfrm>
+            <a:off x="457200" y="2478024"/>
+            <a:ext cx="128016" cy="1051560"/>
+          </a:xfrm>
+          <a:prstGeom prst="rect">
+            <a:avLst/>
+          </a:prstGeom>
+          <a:solidFill>
+            <a:srgbClr val="FFD000"/>
+          </a:solidFill>
+          <a:ln>
+            <a:noFill/>
+          </a:ln>
+        </p:spPr>
+        <p:style>
+          <a:lnRef idx="1">
+            <a:schemeClr val="accent1"/>
+          </a:lnRef>
+          <a:fillRef idx="3">
+            <a:schemeClr val="accent1"/>
+          </a:fillRef>
+          <a:effectRef idx="2">
+            <a:schemeClr val="accent1"/>
+          </a:effectRef>
+          <a:fontRef idx="minor">
+            <a:schemeClr val="lt1"/>
+          </a:fontRef>
+        </p:style>
+        <p:txBody>
+          <a:bodyPr rtlCol="0" anchor="ctr"/>
+          <a:lstStyle/>
+          <a:p>
+            <a:pPr algn="ctr"/>
+          </a:p>
+        </p:txBody>
+      </p:sp>
+      <p:sp>
+        <p:nvSpPr>
+          <p:cNvPr id="10" name="TextBox 9"/>
+          <p:cNvSpPr txBox="1"/>
+          <p:nvPr/>
+        </p:nvSpPr>
+        <p:spPr>
+          <a:xfrm>
+            <a:off x="777240" y="2615184"/>
+            <a:ext cx="10774375" cy="822959"/>
+          </a:xfrm>
+          <a:prstGeom prst="rect">
+            <a:avLst/>
+          </a:prstGeom>
+          <a:noFill/>
+        </p:spPr>
+        <p:txBody>
+          <a:bodyPr wrap="square">
+            <a:spAutoFit/>
+          </a:bodyPr>
+          <a:lstStyle/>
+          <a:p>
+            <a:r>
+              <a:rPr sz="1200" b="1" i="0">
+                <a:solidFill>
+                  <a:srgbClr val="FFD000"/>
+                </a:solidFill>
+                <a:latin typeface="Calibri"/>
+              </a:rPr>
+              <a:t>Aclaración</a:t>
+            </a:r>
+          </a:p>
+          <a:p>
+            <a:pPr>
+              <a:spcBef>
+                <a:spcPts val="400"/>
+              </a:spcBef>
+            </a:pPr>
+            <a:r>
+              <a:rPr sz="1400" b="0" i="0">
+                <a:solidFill>
+                  <a:srgbClr val="333333"/>
+                </a:solidFill>
+                <a:latin typeface="Calibri"/>
+              </a:rPr>
+              <a:t>Subir evidencias al paquete CloudLite (Drive/repo) y a ExamLab (https://uniaj.examlab.workers.dev/) domingo 23:59.</a:t>
+            </a:r>
+          </a:p>
+        </p:txBody>
+      </p:sp>
+      <p:sp>
+        <p:nvSpPr>
+          <p:cNvPr id="11" name="Rounded Rectangle 10"/>
+          <p:cNvSpPr/>
+          <p:nvPr/>
+        </p:nvSpPr>
+        <p:spPr>
+          <a:xfrm>
+            <a:off x="457200" y="3694176"/>
+            <a:ext cx="11277295" cy="1051560"/>
+          </a:xfrm>
+          <a:prstGeom prst="roundRect">
+            <a:avLst>
+              <a:gd name="adj" fmla="val 12000"/>
+            </a:avLst>
+          </a:prstGeom>
+          <a:solidFill>
+            <a:srgbClr val="FBE4E4"/>
+          </a:solidFill>
+          <a:ln>
+            <a:noFill/>
+          </a:ln>
+        </p:spPr>
+        <p:style>
+          <a:lnRef idx="1">
+            <a:schemeClr val="accent1"/>
+          </a:lnRef>
+          <a:fillRef idx="3">
+            <a:schemeClr val="accent1"/>
+          </a:fillRef>
+          <a:effectRef idx="2">
+            <a:schemeClr val="accent1"/>
+          </a:effectRef>
+          <a:fontRef idx="minor">
+            <a:schemeClr val="lt1"/>
+          </a:fontRef>
+        </p:style>
+        <p:txBody>
+          <a:bodyPr rtlCol="0" anchor="ctr"/>
+          <a:lstStyle/>
+          <a:p>
+            <a:pPr algn="ctr"/>
+          </a:p>
+        </p:txBody>
+      </p:sp>
+      <p:sp>
+        <p:nvSpPr>
+          <p:cNvPr id="12" name="Rectangle 11"/>
+          <p:cNvSpPr/>
+          <p:nvPr/>
+        </p:nvSpPr>
+        <p:spPr>
+          <a:xfrm>
+            <a:off x="457200" y="3694176"/>
+            <a:ext cx="128016" cy="1051560"/>
+          </a:xfrm>
+          <a:prstGeom prst="rect">
+            <a:avLst/>
+          </a:prstGeom>
+          <a:solidFill>
+            <a:srgbClr val="A02030"/>
+          </a:solidFill>
+          <a:ln>
+            <a:noFill/>
+          </a:ln>
+        </p:spPr>
+        <p:style>
+          <a:lnRef idx="1">
+            <a:schemeClr val="accent1"/>
+          </a:lnRef>
+          <a:fillRef idx="3">
+            <a:schemeClr val="accent1"/>
+          </a:fillRef>
+          <a:effectRef idx="2">
+            <a:schemeClr val="accent1"/>
+          </a:effectRef>
+          <a:fontRef idx="minor">
+            <a:schemeClr val="lt1"/>
+          </a:fontRef>
+        </p:style>
+        <p:txBody>
+          <a:bodyPr rtlCol="0" anchor="ctr"/>
+          <a:lstStyle/>
+          <a:p>
+            <a:pPr algn="ctr"/>
+          </a:p>
+        </p:txBody>
+      </p:sp>
+      <p:sp>
+        <p:nvSpPr>
+          <p:cNvPr id="13" name="TextBox 12"/>
+          <p:cNvSpPr txBox="1"/>
+          <p:nvPr/>
+        </p:nvSpPr>
+        <p:spPr>
+          <a:xfrm>
+            <a:off x="777240" y="3831336"/>
+            <a:ext cx="10774375" cy="822959"/>
+          </a:xfrm>
+          <a:prstGeom prst="rect">
+            <a:avLst/>
+          </a:prstGeom>
+          <a:noFill/>
+        </p:spPr>
+        <p:txBody>
+          <a:bodyPr wrap="square">
+            <a:spAutoFit/>
+          </a:bodyPr>
+          <a:lstStyle/>
+          <a:p>
+            <a:r>
+              <a:rPr sz="1200" b="1" i="0">
+                <a:solidFill>
+                  <a:srgbClr val="A02030"/>
+                </a:solidFill>
+                <a:latin typeface="Calibri"/>
+              </a:rPr>
+              <a:t>Atención</a:t>
+            </a:r>
+          </a:p>
+          <a:p>
+            <a:pPr>
+              <a:spcBef>
+                <a:spcPts val="400"/>
+              </a:spcBef>
+            </a:pPr>
+            <a:r>
+              <a:rPr sz="1400" b="0" i="0">
+                <a:solidFill>
+                  <a:srgbClr val="333333"/>
+                </a:solidFill>
+                <a:latin typeface="Calibri"/>
+              </a:rPr>
+              <a:t>Sin cloud de pago ni instalaciones obligatorias de hipervisores/Docker Desktop.</a:t>
+            </a:r>
+          </a:p>
+        </p:txBody>
+      </p:sp>
+      <p:sp>
+        <p:nvSpPr>
+          <p:cNvPr id="14" name="TextBox 13"/>
+          <p:cNvSpPr txBox="1"/>
+          <p:nvPr/>
+        </p:nvSpPr>
+        <p:spPr>
+          <a:xfrm>
+            <a:off x="11185855" y="6473952"/>
+            <a:ext cx="640080" cy="274320"/>
+          </a:xfrm>
+          <a:prstGeom prst="rect">
+            <a:avLst/>
+          </a:prstGeom>
+          <a:noFill/>
+        </p:spPr>
+        <p:txBody>
+          <a:bodyPr wrap="square">
+            <a:spAutoFit/>
+          </a:bodyPr>
+          <a:lstStyle/>
+          <a:p>
+            <a:pPr algn="r"/>
+            <a:r>
+              <a:rPr sz="1100" b="0" i="0">
+                <a:solidFill>
+                  <a:srgbClr val="666666"/>
+                </a:solidFill>
+                <a:latin typeface="Calibri"/>
+              </a:rPr>
+              <a:t>12</a:t>
+            </a:r>
+          </a:p>
+        </p:txBody>
+      </p:sp>
+    </p:spTree>
+  </p:cSld>
+  <p:clrMapOvr>
+    <a:masterClrMapping/>
+  </p:clrMapOvr>
+</p:sld>
+</file>
+
+<file path=ppt/slides/slide13.xml><?xml version="1.0" encoding="utf-8"?>
+<p:sld xmlns:a="http://schemas.openxmlformats.org/drawingml/2006/main" xmlns:p="http://schemas.openxmlformats.org/presentationml/2006/main" xmlns:r="http://schemas.openxmlformats.org/officeDocument/2006/relationships">
+  <p:cSld>
+    <p:bg>
+      <p:bgPr>
+        <a:solidFill>
+          <a:srgbClr val="FFFFFF"/>
+        </a:solidFill>
+        <a:effectLst/>
+      </p:bgPr>
+    </p:bg>
+    <p:spTree>
+      <p:nvGrpSpPr>
+        <p:cNvPr id="1" name=""/>
+        <p:cNvGrpSpPr/>
+        <p:nvPr/>
+      </p:nvGrpSpPr>
+      <p:grpSpPr/>
+      <p:sp>
+        <p:nvSpPr>
+          <p:cNvPr id="2" name="Rectangle 1"/>
+          <p:cNvSpPr/>
+          <p:nvPr/>
+        </p:nvSpPr>
+        <p:spPr>
+          <a:xfrm>
+            <a:off x="0" y="0"/>
             <a:ext cx="12191695" cy="164592"/>
           </a:xfrm>
           <a:prstGeom prst="rect">
@@ -6420,7 +7686,7 @@
         <p:spPr>
           <a:xfrm>
             <a:off x="0" y="0"/>
-            <a:ext cx="12191695" cy="960120"/>
+            <a:ext cx="12191695" cy="1170432"/>
           </a:xfrm>
           <a:prstGeom prst="rect">
             <a:avLst/>
@@ -6462,7 +7728,7 @@
         </p:nvSpPr>
         <p:spPr>
           <a:xfrm>
-            <a:off x="0" y="960120"/>
+            <a:off x="0" y="1170432"/>
             <a:ext cx="12191695" cy="41148"/>
           </a:xfrm>
           <a:prstGeom prst="rect">
@@ -6506,7 +7772,7 @@
         <p:spPr>
           <a:xfrm>
             <a:off x="457200" y="164592"/>
-            <a:ext cx="11277295" cy="502920"/>
+            <a:ext cx="11277295" cy="384048"/>
           </a:xfrm>
           <a:prstGeom prst="rect">
             <a:avLst/>
@@ -6526,7 +7792,7 @@
                 </a:solidFill>
                 <a:latin typeface="Calibri"/>
               </a:rPr>
-              <a:t>Taller PI (paso a paso)</a:t>
+              <a:t>Herramientas de hoy</a:t>
             </a:r>
           </a:p>
         </p:txBody>
@@ -6539,8 +7805,8 @@
         </p:nvSpPr>
         <p:spPr>
           <a:xfrm>
-            <a:off x="457200" y="1170432"/>
-            <a:ext cx="11277295" cy="5230368"/>
+            <a:off x="457200" y="566928"/>
+            <a:ext cx="11277295" cy="411480"/>
           </a:xfrm>
           <a:prstGeom prst="rect">
             <a:avLst/>
@@ -6553,171 +7819,837 @@
           </a:bodyPr>
           <a:lstStyle/>
           <a:p>
-            <a:pPr>
-              <a:spcAft>
-                <a:spcPts val="800"/>
-              </a:spcAft>
+            <a:r>
+              <a:rPr sz="1400" b="0" i="0">
+                <a:solidFill>
+                  <a:srgbClr val="B8D8EE"/>
+                </a:solidFill>
+                <a:latin typeface="Calibri"/>
+              </a:rPr>
+              <a:t>Gratis · navegador o free tier · sin cuenta de pago</a:t>
+            </a:r>
+          </a:p>
+        </p:txBody>
+      </p:sp>
+      <p:sp>
+        <p:nvSpPr>
+          <p:cNvPr id="6" name="Rounded Rectangle 5"/>
+          <p:cNvSpPr/>
+          <p:nvPr/>
+        </p:nvSpPr>
+        <p:spPr>
+          <a:xfrm>
+            <a:off x="457200" y="1591056"/>
+            <a:ext cx="3624986" cy="2299716"/>
+          </a:xfrm>
+          <a:prstGeom prst="roundRect">
+            <a:avLst>
+              <a:gd name="adj" fmla="val 12000"/>
+            </a:avLst>
+          </a:prstGeom>
+          <a:solidFill>
+            <a:srgbClr val="F2F2F2"/>
+          </a:solidFill>
+          <a:ln>
+            <a:noFill/>
+          </a:ln>
+        </p:spPr>
+        <p:style>
+          <a:lnRef idx="1">
+            <a:schemeClr val="accent1"/>
+          </a:lnRef>
+          <a:fillRef idx="3">
+            <a:schemeClr val="accent1"/>
+          </a:fillRef>
+          <a:effectRef idx="2">
+            <a:schemeClr val="accent1"/>
+          </a:effectRef>
+          <a:fontRef idx="minor">
+            <a:schemeClr val="lt1"/>
+          </a:fontRef>
+        </p:style>
+        <p:txBody>
+          <a:bodyPr rtlCol="0" anchor="ctr"/>
+          <a:lstStyle/>
+          <a:p>
+            <a:pPr algn="ctr"/>
+          </a:p>
+        </p:txBody>
+      </p:sp>
+      <p:sp>
+        <p:nvSpPr>
+          <p:cNvPr id="7" name="Rectangle 6"/>
+          <p:cNvSpPr/>
+          <p:nvPr/>
+        </p:nvSpPr>
+        <p:spPr>
+          <a:xfrm>
+            <a:off x="457200" y="1591056"/>
+            <a:ext cx="3624986" cy="64008"/>
+          </a:xfrm>
+          <a:prstGeom prst="rect">
+            <a:avLst/>
+          </a:prstGeom>
+          <a:solidFill>
+            <a:srgbClr val="095292"/>
+          </a:solidFill>
+          <a:ln>
+            <a:noFill/>
+          </a:ln>
+        </p:spPr>
+        <p:style>
+          <a:lnRef idx="1">
+            <a:schemeClr val="accent1"/>
+          </a:lnRef>
+          <a:fillRef idx="3">
+            <a:schemeClr val="accent1"/>
+          </a:fillRef>
+          <a:effectRef idx="2">
+            <a:schemeClr val="accent1"/>
+          </a:effectRef>
+          <a:fontRef idx="minor">
+            <a:schemeClr val="lt1"/>
+          </a:fontRef>
+        </p:style>
+        <p:txBody>
+          <a:bodyPr rtlCol="0" anchor="ctr"/>
+          <a:lstStyle/>
+          <a:p>
+            <a:pPr algn="ctr"/>
+          </a:p>
+        </p:txBody>
+      </p:sp>
+      <p:sp>
+        <p:nvSpPr>
+          <p:cNvPr id="8" name="Rectangle 7"/>
+          <p:cNvSpPr/>
+          <p:nvPr/>
+        </p:nvSpPr>
+        <p:spPr>
+          <a:xfrm>
+            <a:off x="457200" y="1655064"/>
+            <a:ext cx="3624986" cy="27432"/>
+          </a:xfrm>
+          <a:prstGeom prst="rect">
+            <a:avLst/>
+          </a:prstGeom>
+          <a:solidFill>
+            <a:srgbClr val="FFD000"/>
+          </a:solidFill>
+          <a:ln>
+            <a:noFill/>
+          </a:ln>
+        </p:spPr>
+        <p:style>
+          <a:lnRef idx="1">
+            <a:schemeClr val="accent1"/>
+          </a:lnRef>
+          <a:fillRef idx="3">
+            <a:schemeClr val="accent1"/>
+          </a:fillRef>
+          <a:effectRef idx="2">
+            <a:schemeClr val="accent1"/>
+          </a:effectRef>
+          <a:fontRef idx="minor">
+            <a:schemeClr val="lt1"/>
+          </a:fontRef>
+        </p:style>
+        <p:txBody>
+          <a:bodyPr rtlCol="0" anchor="ctr"/>
+          <a:lstStyle/>
+          <a:p>
+            <a:pPr algn="ctr"/>
+          </a:p>
+        </p:txBody>
+      </p:sp>
+      <p:pic>
+        <p:nvPicPr>
+          <p:cNvPr id="9" name="Picture 8" descr="excalidraw.png"/>
+          <p:cNvPicPr>
+            <a:picLocks noChangeAspect="1"/>
+          </p:cNvPicPr>
+          <p:nvPr/>
+        </p:nvPicPr>
+        <p:blipFill>
+          <a:blip r:embed="rId2"/>
+          <a:stretch>
+            <a:fillRect/>
+          </a:stretch>
+        </p:blipFill>
+        <p:spPr>
+          <a:xfrm>
+            <a:off x="1659331" y="1847087"/>
+            <a:ext cx="1220724" cy="1220724"/>
+          </a:xfrm>
+          <a:prstGeom prst="rect">
+            <a:avLst/>
+          </a:prstGeom>
+        </p:spPr>
+      </p:pic>
+      <p:sp>
+        <p:nvSpPr>
+          <p:cNvPr id="10" name="TextBox 9"/>
+          <p:cNvSpPr txBox="1"/>
+          <p:nvPr/>
+        </p:nvSpPr>
+        <p:spPr>
+          <a:xfrm>
+            <a:off x="530352" y="3159251"/>
+            <a:ext cx="3478682" cy="621792"/>
+          </a:xfrm>
+          <a:prstGeom prst="rect">
+            <a:avLst/>
+          </a:prstGeom>
+          <a:noFill/>
+        </p:spPr>
+        <p:txBody>
+          <a:bodyPr wrap="square" anchor="t"/>
+          <a:lstStyle/>
+          <a:p>
+            <a:pPr algn="ctr"/>
+            <a:r>
+              <a:rPr sz="1300" b="1" i="0">
+                <a:solidFill>
+                  <a:srgbClr val="095292"/>
+                </a:solidFill>
+                <a:latin typeface="Calibri"/>
+              </a:rPr>
+              <a:t>Excalidraw</a:t>
+            </a:r>
+          </a:p>
+          <a:p>
+            <a:pPr algn="ctr">
+              <a:spcBef>
+                <a:spcPts val="200"/>
+              </a:spcBef>
             </a:pPr>
             <a:r>
-              <a:rPr sz="1600" b="1" i="0">
-                <a:solidFill>
-                  <a:srgbClr val="333333"/>
-                </a:solidFill>
-                <a:latin typeface="Calibri"/>
-              </a:rPr>
-              <a:t>1.</a:t>
-            </a:r>
-            <a:r>
-              <a:rPr sz="1600" b="0" i="0">
-                <a:solidFill>
-                  <a:srgbClr val="333333"/>
-                </a:solidFill>
-                <a:latin typeface="Calibri"/>
-              </a:rPr>
-              <a:t> Paso 1: liste 5 amenazas concretas de su dominio, una por cada categoria de STRIDE-lite (suplantacion, manipulacion, divulgacion de informacion, denegacion de servicio y elevacion de privilegios), verificando que cada amenaza nombre el activo afectado de su propio C4 (por ejemplo la Base de datos Citas o el token del estudiante) y que ninguna sea copiada como frase generica de internet.</a:t>
-            </a:r>
-          </a:p>
-          <a:p>
-            <a:pPr>
-              <a:spcAft>
-                <a:spcPts val="800"/>
-              </a:spcAft>
+              <a:rPr sz="1000" b="0" i="0">
+                <a:solidFill>
+                  <a:srgbClr val="666666"/>
+                </a:solidFill>
+                <a:latin typeface="Calibri"/>
+              </a:rPr>
+              <a:t>Tabla STRIDE</a:t>
+            </a:r>
+          </a:p>
+        </p:txBody>
+      </p:sp>
+      <p:sp>
+        <p:nvSpPr>
+          <p:cNvPr id="11" name="Rounded Rectangle 10"/>
+          <p:cNvSpPr/>
+          <p:nvPr/>
+        </p:nvSpPr>
+        <p:spPr>
+          <a:xfrm>
+            <a:off x="4283354" y="1591056"/>
+            <a:ext cx="3624986" cy="2299716"/>
+          </a:xfrm>
+          <a:prstGeom prst="roundRect">
+            <a:avLst>
+              <a:gd name="adj" fmla="val 12000"/>
+            </a:avLst>
+          </a:prstGeom>
+          <a:solidFill>
+            <a:srgbClr val="F2F2F2"/>
+          </a:solidFill>
+          <a:ln>
+            <a:noFill/>
+          </a:ln>
+        </p:spPr>
+        <p:style>
+          <a:lnRef idx="1">
+            <a:schemeClr val="accent1"/>
+          </a:lnRef>
+          <a:fillRef idx="3">
+            <a:schemeClr val="accent1"/>
+          </a:fillRef>
+          <a:effectRef idx="2">
+            <a:schemeClr val="accent1"/>
+          </a:effectRef>
+          <a:fontRef idx="minor">
+            <a:schemeClr val="lt1"/>
+          </a:fontRef>
+        </p:style>
+        <p:txBody>
+          <a:bodyPr rtlCol="0" anchor="ctr"/>
+          <a:lstStyle/>
+          <a:p>
+            <a:pPr algn="ctr"/>
+          </a:p>
+        </p:txBody>
+      </p:sp>
+      <p:sp>
+        <p:nvSpPr>
+          <p:cNvPr id="12" name="Rectangle 11"/>
+          <p:cNvSpPr/>
+          <p:nvPr/>
+        </p:nvSpPr>
+        <p:spPr>
+          <a:xfrm>
+            <a:off x="4283354" y="1591056"/>
+            <a:ext cx="3624986" cy="64008"/>
+          </a:xfrm>
+          <a:prstGeom prst="rect">
+            <a:avLst/>
+          </a:prstGeom>
+          <a:solidFill>
+            <a:srgbClr val="095292"/>
+          </a:solidFill>
+          <a:ln>
+            <a:noFill/>
+          </a:ln>
+        </p:spPr>
+        <p:style>
+          <a:lnRef idx="1">
+            <a:schemeClr val="accent1"/>
+          </a:lnRef>
+          <a:fillRef idx="3">
+            <a:schemeClr val="accent1"/>
+          </a:fillRef>
+          <a:effectRef idx="2">
+            <a:schemeClr val="accent1"/>
+          </a:effectRef>
+          <a:fontRef idx="minor">
+            <a:schemeClr val="lt1"/>
+          </a:fontRef>
+        </p:style>
+        <p:txBody>
+          <a:bodyPr rtlCol="0" anchor="ctr"/>
+          <a:lstStyle/>
+          <a:p>
+            <a:pPr algn="ctr"/>
+          </a:p>
+        </p:txBody>
+      </p:sp>
+      <p:sp>
+        <p:nvSpPr>
+          <p:cNvPr id="13" name="Rectangle 12"/>
+          <p:cNvSpPr/>
+          <p:nvPr/>
+        </p:nvSpPr>
+        <p:spPr>
+          <a:xfrm>
+            <a:off x="4283354" y="1655064"/>
+            <a:ext cx="3624986" cy="27432"/>
+          </a:xfrm>
+          <a:prstGeom prst="rect">
+            <a:avLst/>
+          </a:prstGeom>
+          <a:solidFill>
+            <a:srgbClr val="FFD000"/>
+          </a:solidFill>
+          <a:ln>
+            <a:noFill/>
+          </a:ln>
+        </p:spPr>
+        <p:style>
+          <a:lnRef idx="1">
+            <a:schemeClr val="accent1"/>
+          </a:lnRef>
+          <a:fillRef idx="3">
+            <a:schemeClr val="accent1"/>
+          </a:fillRef>
+          <a:effectRef idx="2">
+            <a:schemeClr val="accent1"/>
+          </a:effectRef>
+          <a:fontRef idx="minor">
+            <a:schemeClr val="lt1"/>
+          </a:fontRef>
+        </p:style>
+        <p:txBody>
+          <a:bodyPr rtlCol="0" anchor="ctr"/>
+          <a:lstStyle/>
+          <a:p>
+            <a:pPr algn="ctr"/>
+          </a:p>
+        </p:txBody>
+      </p:sp>
+      <p:pic>
+        <p:nvPicPr>
+          <p:cNvPr id="14" name="Picture 13" descr="google_docs.png"/>
+          <p:cNvPicPr>
+            <a:picLocks noChangeAspect="1"/>
+          </p:cNvPicPr>
+          <p:nvPr/>
+        </p:nvPicPr>
+        <p:blipFill>
+          <a:blip r:embed="rId3"/>
+          <a:stretch>
+            <a:fillRect/>
+          </a:stretch>
+        </p:blipFill>
+        <p:spPr>
+          <a:xfrm>
+            <a:off x="5485485" y="1847087"/>
+            <a:ext cx="1220724" cy="1220724"/>
+          </a:xfrm>
+          <a:prstGeom prst="rect">
+            <a:avLst/>
+          </a:prstGeom>
+        </p:spPr>
+      </p:pic>
+      <p:sp>
+        <p:nvSpPr>
+          <p:cNvPr id="15" name="TextBox 14"/>
+          <p:cNvSpPr txBox="1"/>
+          <p:nvPr/>
+        </p:nvSpPr>
+        <p:spPr>
+          <a:xfrm>
+            <a:off x="4356506" y="3159251"/>
+            <a:ext cx="3478682" cy="621792"/>
+          </a:xfrm>
+          <a:prstGeom prst="rect">
+            <a:avLst/>
+          </a:prstGeom>
+          <a:noFill/>
+        </p:spPr>
+        <p:txBody>
+          <a:bodyPr wrap="square" anchor="t"/>
+          <a:lstStyle/>
+          <a:p>
+            <a:pPr algn="ctr"/>
+            <a:r>
+              <a:rPr sz="1300" b="1" i="0">
+                <a:solidFill>
+                  <a:srgbClr val="095292"/>
+                </a:solidFill>
+                <a:latin typeface="Calibri"/>
+              </a:rPr>
+              <a:t>Google Docs</a:t>
+            </a:r>
+          </a:p>
+          <a:p>
+            <a:pPr algn="ctr">
+              <a:spcBef>
+                <a:spcPts val="200"/>
+              </a:spcBef>
             </a:pPr>
             <a:r>
-              <a:rPr sz="1600" b="0" i="0">
-                <a:solidFill>
-                  <a:srgbClr val="333333"/>
-                </a:solidFill>
-                <a:latin typeface="Calibri"/>
-              </a:rPr>
-              <a:t>–   </a:t>
-            </a:r>
-            <a:r>
-              <a:rPr sz="1600" b="1" i="0">
-                <a:solidFill>
-                  <a:srgbClr val="333333"/>
-                </a:solidFill>
-                <a:latin typeface="Calibri"/>
-              </a:rPr>
-              <a:t>2.</a:t>
-            </a:r>
-            <a:r>
-              <a:rPr sz="1600" b="0" i="0">
-                <a:solidFill>
-                  <a:srgbClr val="333333"/>
-                </a:solidFill>
-                <a:latin typeface="Calibri"/>
-              </a:rPr>
-              <a:t> Paso 2: asigne a cada amenaza un control tecnico y la flecha o zona exacta del diagrama donde se ve ese control, verificando que los 5 controles sean distintos entre si y que al menos uno sea preventivo, uno detectivo y uno de contencion; la tabla completa queda en la seccion Seguridad del informe del PI.</a:t>
-            </a:r>
-          </a:p>
-          <a:p>
-            <a:pPr>
-              <a:spcAft>
-                <a:spcPts val="800"/>
-              </a:spcAft>
+              <a:rPr sz="1000" b="0" i="0">
+                <a:solidFill>
+                  <a:srgbClr val="666666"/>
+                </a:solidFill>
+                <a:latin typeface="Calibri"/>
+              </a:rPr>
+              <a:t>Informe PI</a:t>
+            </a:r>
+          </a:p>
+        </p:txBody>
+      </p:sp>
+      <p:sp>
+        <p:nvSpPr>
+          <p:cNvPr id="16" name="Rounded Rectangle 15"/>
+          <p:cNvSpPr/>
+          <p:nvPr/>
+        </p:nvSpPr>
+        <p:spPr>
+          <a:xfrm>
+            <a:off x="8109508" y="1591056"/>
+            <a:ext cx="3624986" cy="2299716"/>
+          </a:xfrm>
+          <a:prstGeom prst="roundRect">
+            <a:avLst>
+              <a:gd name="adj" fmla="val 12000"/>
+            </a:avLst>
+          </a:prstGeom>
+          <a:solidFill>
+            <a:srgbClr val="F2F2F2"/>
+          </a:solidFill>
+          <a:ln>
+            <a:noFill/>
+          </a:ln>
+        </p:spPr>
+        <p:style>
+          <a:lnRef idx="1">
+            <a:schemeClr val="accent1"/>
+          </a:lnRef>
+          <a:fillRef idx="3">
+            <a:schemeClr val="accent1"/>
+          </a:fillRef>
+          <a:effectRef idx="2">
+            <a:schemeClr val="accent1"/>
+          </a:effectRef>
+          <a:fontRef idx="minor">
+            <a:schemeClr val="lt1"/>
+          </a:fontRef>
+        </p:style>
+        <p:txBody>
+          <a:bodyPr rtlCol="0" anchor="ctr"/>
+          <a:lstStyle/>
+          <a:p>
+            <a:pPr algn="ctr"/>
+          </a:p>
+        </p:txBody>
+      </p:sp>
+      <p:sp>
+        <p:nvSpPr>
+          <p:cNvPr id="17" name="Rectangle 16"/>
+          <p:cNvSpPr/>
+          <p:nvPr/>
+        </p:nvSpPr>
+        <p:spPr>
+          <a:xfrm>
+            <a:off x="8109508" y="1591056"/>
+            <a:ext cx="3624986" cy="64008"/>
+          </a:xfrm>
+          <a:prstGeom prst="rect">
+            <a:avLst/>
+          </a:prstGeom>
+          <a:solidFill>
+            <a:srgbClr val="095292"/>
+          </a:solidFill>
+          <a:ln>
+            <a:noFill/>
+          </a:ln>
+        </p:spPr>
+        <p:style>
+          <a:lnRef idx="1">
+            <a:schemeClr val="accent1"/>
+          </a:lnRef>
+          <a:fillRef idx="3">
+            <a:schemeClr val="accent1"/>
+          </a:fillRef>
+          <a:effectRef idx="2">
+            <a:schemeClr val="accent1"/>
+          </a:effectRef>
+          <a:fontRef idx="minor">
+            <a:schemeClr val="lt1"/>
+          </a:fontRef>
+        </p:style>
+        <p:txBody>
+          <a:bodyPr rtlCol="0" anchor="ctr"/>
+          <a:lstStyle/>
+          <a:p>
+            <a:pPr algn="ctr"/>
+          </a:p>
+        </p:txBody>
+      </p:sp>
+      <p:sp>
+        <p:nvSpPr>
+          <p:cNvPr id="18" name="Rectangle 17"/>
+          <p:cNvSpPr/>
+          <p:nvPr/>
+        </p:nvSpPr>
+        <p:spPr>
+          <a:xfrm>
+            <a:off x="8109508" y="1655064"/>
+            <a:ext cx="3624986" cy="27432"/>
+          </a:xfrm>
+          <a:prstGeom prst="rect">
+            <a:avLst/>
+          </a:prstGeom>
+          <a:solidFill>
+            <a:srgbClr val="FFD000"/>
+          </a:solidFill>
+          <a:ln>
+            <a:noFill/>
+          </a:ln>
+        </p:spPr>
+        <p:style>
+          <a:lnRef idx="1">
+            <a:schemeClr val="accent1"/>
+          </a:lnRef>
+          <a:fillRef idx="3">
+            <a:schemeClr val="accent1"/>
+          </a:fillRef>
+          <a:effectRef idx="2">
+            <a:schemeClr val="accent1"/>
+          </a:effectRef>
+          <a:fontRef idx="minor">
+            <a:schemeClr val="lt1"/>
+          </a:fontRef>
+        </p:style>
+        <p:txBody>
+          <a:bodyPr rtlCol="0" anchor="ctr"/>
+          <a:lstStyle/>
+          <a:p>
+            <a:pPr algn="ctr"/>
+          </a:p>
+        </p:txBody>
+      </p:sp>
+      <p:pic>
+        <p:nvPicPr>
+          <p:cNvPr id="19" name="Picture 18" descr="mermaid.png"/>
+          <p:cNvPicPr>
+            <a:picLocks noChangeAspect="1"/>
+          </p:cNvPicPr>
+          <p:nvPr/>
+        </p:nvPicPr>
+        <p:blipFill>
+          <a:blip r:embed="rId4"/>
+          <a:stretch>
+            <a:fillRect/>
+          </a:stretch>
+        </p:blipFill>
+        <p:spPr>
+          <a:xfrm>
+            <a:off x="9311640" y="1847087"/>
+            <a:ext cx="1220724" cy="1220724"/>
+          </a:xfrm>
+          <a:prstGeom prst="rect">
+            <a:avLst/>
+          </a:prstGeom>
+        </p:spPr>
+      </p:pic>
+      <p:sp>
+        <p:nvSpPr>
+          <p:cNvPr id="20" name="TextBox 19"/>
+          <p:cNvSpPr txBox="1"/>
+          <p:nvPr/>
+        </p:nvSpPr>
+        <p:spPr>
+          <a:xfrm>
+            <a:off x="8182660" y="3159251"/>
+            <a:ext cx="3478682" cy="621792"/>
+          </a:xfrm>
+          <a:prstGeom prst="rect">
+            <a:avLst/>
+          </a:prstGeom>
+          <a:noFill/>
+        </p:spPr>
+        <p:txBody>
+          <a:bodyPr wrap="square" anchor="t"/>
+          <a:lstStyle/>
+          <a:p>
+            <a:pPr algn="ctr"/>
+            <a:r>
+              <a:rPr sz="1300" b="1" i="0">
+                <a:solidFill>
+                  <a:srgbClr val="095292"/>
+                </a:solidFill>
+                <a:latin typeface="Calibri"/>
+              </a:rPr>
+              <a:t>Mermaid</a:t>
+            </a:r>
+          </a:p>
+          <a:p>
+            <a:pPr algn="ctr">
+              <a:spcBef>
+                <a:spcPts val="200"/>
+              </a:spcBef>
             </a:pPr>
             <a:r>
-              <a:rPr sz="1600" b="0" i="0">
-                <a:solidFill>
-                  <a:srgbClr val="333333"/>
-                </a:solidFill>
-                <a:latin typeface="Calibri"/>
-              </a:rPr>
-              <a:t>–   </a:t>
-            </a:r>
-            <a:r>
-              <a:rPr sz="1600" b="1" i="0">
-                <a:solidFill>
-                  <a:srgbClr val="333333"/>
-                </a:solidFill>
-                <a:latin typeface="Calibri"/>
-              </a:rPr>
-              <a:t>3.</a:t>
-            </a:r>
-            <a:r>
-              <a:rPr sz="1600" b="0" i="0">
-                <a:solidFill>
-                  <a:srgbClr val="333333"/>
-                </a:solidFill>
-                <a:latin typeface="Calibri"/>
-              </a:rPr>
-              <a:t> Paso 3: escriban en ExamLab el diagrama Mermaid de fronteras de confianza con 3 zonas (publica, privada y de datos), los 5 contenedores de la Clase 4 ubicados en su zona, las aristas rotuladas con protocolo y puerto, y una arista punteada de trafico bloqueado, verificando al renderizar que la base de datos y la cola quedan en la zona de datos y que el usuario no tiene ninguna arista solida hacia ellas.</a:t>
-            </a:r>
-          </a:p>
-          <a:p>
-            <a:pPr>
-              <a:spcAft>
-                <a:spcPts val="800"/>
-              </a:spcAft>
+              <a:rPr sz="1000" b="0" i="0">
+                <a:solidFill>
+                  <a:srgbClr val="666666"/>
+                </a:solidFill>
+                <a:latin typeface="Calibri"/>
+              </a:rPr>
+              <a:t>Codigo del diagrama</a:t>
+            </a:r>
+          </a:p>
+        </p:txBody>
+      </p:sp>
+      <p:sp>
+        <p:nvSpPr>
+          <p:cNvPr id="21" name="Rounded Rectangle 20"/>
+          <p:cNvSpPr/>
+          <p:nvPr/>
+        </p:nvSpPr>
+        <p:spPr>
+          <a:xfrm>
+            <a:off x="4283354" y="4055364"/>
+            <a:ext cx="3624986" cy="2299716"/>
+          </a:xfrm>
+          <a:prstGeom prst="roundRect">
+            <a:avLst>
+              <a:gd name="adj" fmla="val 12000"/>
+            </a:avLst>
+          </a:prstGeom>
+          <a:solidFill>
+            <a:srgbClr val="F2F2F2"/>
+          </a:solidFill>
+          <a:ln>
+            <a:noFill/>
+          </a:ln>
+        </p:spPr>
+        <p:style>
+          <a:lnRef idx="1">
+            <a:schemeClr val="accent1"/>
+          </a:lnRef>
+          <a:fillRef idx="3">
+            <a:schemeClr val="accent1"/>
+          </a:fillRef>
+          <a:effectRef idx="2">
+            <a:schemeClr val="accent1"/>
+          </a:effectRef>
+          <a:fontRef idx="minor">
+            <a:schemeClr val="lt1"/>
+          </a:fontRef>
+        </p:style>
+        <p:txBody>
+          <a:bodyPr rtlCol="0" anchor="ctr"/>
+          <a:lstStyle/>
+          <a:p>
+            <a:pPr algn="ctr"/>
+          </a:p>
+        </p:txBody>
+      </p:sp>
+      <p:sp>
+        <p:nvSpPr>
+          <p:cNvPr id="22" name="Rectangle 21"/>
+          <p:cNvSpPr/>
+          <p:nvPr/>
+        </p:nvSpPr>
+        <p:spPr>
+          <a:xfrm>
+            <a:off x="4283354" y="4055364"/>
+            <a:ext cx="3624986" cy="64008"/>
+          </a:xfrm>
+          <a:prstGeom prst="rect">
+            <a:avLst/>
+          </a:prstGeom>
+          <a:solidFill>
+            <a:srgbClr val="095292"/>
+          </a:solidFill>
+          <a:ln>
+            <a:noFill/>
+          </a:ln>
+        </p:spPr>
+        <p:style>
+          <a:lnRef idx="1">
+            <a:schemeClr val="accent1"/>
+          </a:lnRef>
+          <a:fillRef idx="3">
+            <a:schemeClr val="accent1"/>
+          </a:fillRef>
+          <a:effectRef idx="2">
+            <a:schemeClr val="accent1"/>
+          </a:effectRef>
+          <a:fontRef idx="minor">
+            <a:schemeClr val="lt1"/>
+          </a:fontRef>
+        </p:style>
+        <p:txBody>
+          <a:bodyPr rtlCol="0" anchor="ctr"/>
+          <a:lstStyle/>
+          <a:p>
+            <a:pPr algn="ctr"/>
+          </a:p>
+        </p:txBody>
+      </p:sp>
+      <p:sp>
+        <p:nvSpPr>
+          <p:cNvPr id="23" name="Rectangle 22"/>
+          <p:cNvSpPr/>
+          <p:nvPr/>
+        </p:nvSpPr>
+        <p:spPr>
+          <a:xfrm>
+            <a:off x="4283354" y="4119372"/>
+            <a:ext cx="3624986" cy="27432"/>
+          </a:xfrm>
+          <a:prstGeom prst="rect">
+            <a:avLst/>
+          </a:prstGeom>
+          <a:solidFill>
+            <a:srgbClr val="FFD000"/>
+          </a:solidFill>
+          <a:ln>
+            <a:noFill/>
+          </a:ln>
+        </p:spPr>
+        <p:style>
+          <a:lnRef idx="1">
+            <a:schemeClr val="accent1"/>
+          </a:lnRef>
+          <a:fillRef idx="3">
+            <a:schemeClr val="accent1"/>
+          </a:fillRef>
+          <a:effectRef idx="2">
+            <a:schemeClr val="accent1"/>
+          </a:effectRef>
+          <a:fontRef idx="minor">
+            <a:schemeClr val="lt1"/>
+          </a:fontRef>
+        </p:style>
+        <p:txBody>
+          <a:bodyPr rtlCol="0" anchor="ctr"/>
+          <a:lstStyle/>
+          <a:p>
+            <a:pPr algn="ctr"/>
+          </a:p>
+        </p:txBody>
+      </p:sp>
+      <p:pic>
+        <p:nvPicPr>
+          <p:cNvPr id="24" name="Picture 23" descr="examlab.png"/>
+          <p:cNvPicPr>
+            <a:picLocks noChangeAspect="1"/>
+          </p:cNvPicPr>
+          <p:nvPr/>
+        </p:nvPicPr>
+        <p:blipFill>
+          <a:blip r:embed="rId5"/>
+          <a:stretch>
+            <a:fillRect/>
+          </a:stretch>
+        </p:blipFill>
+        <p:spPr>
+          <a:xfrm>
+            <a:off x="5485485" y="4311396"/>
+            <a:ext cx="1220724" cy="1220724"/>
+          </a:xfrm>
+          <a:prstGeom prst="rect">
+            <a:avLst/>
+          </a:prstGeom>
+        </p:spPr>
+      </p:pic>
+      <p:sp>
+        <p:nvSpPr>
+          <p:cNvPr id="25" name="TextBox 24"/>
+          <p:cNvSpPr txBox="1"/>
+          <p:nvPr/>
+        </p:nvSpPr>
+        <p:spPr>
+          <a:xfrm>
+            <a:off x="4356506" y="5623560"/>
+            <a:ext cx="3478682" cy="621792"/>
+          </a:xfrm>
+          <a:prstGeom prst="rect">
+            <a:avLst/>
+          </a:prstGeom>
+          <a:noFill/>
+        </p:spPr>
+        <p:txBody>
+          <a:bodyPr wrap="square" anchor="t"/>
+          <a:lstStyle/>
+          <a:p>
+            <a:pPr algn="ctr"/>
+            <a:r>
+              <a:rPr sz="1300" b="1" i="0">
+                <a:solidFill>
+                  <a:srgbClr val="095292"/>
+                </a:solidFill>
+                <a:latin typeface="Calibri"/>
+              </a:rPr>
+              <a:t>ExamLab</a:t>
+            </a:r>
+          </a:p>
+          <a:p>
+            <a:pPr algn="ctr">
+              <a:spcBef>
+                <a:spcPts val="200"/>
+              </a:spcBef>
             </a:pPr>
             <a:r>
-              <a:rPr sz="1600" b="0" i="0">
-                <a:solidFill>
-                  <a:srgbClr val="333333"/>
-                </a:solidFill>
-                <a:latin typeface="Calibri"/>
-              </a:rPr>
-              <a:t>–   </a:t>
-            </a:r>
-            <a:r>
-              <a:rPr sz="1600" b="1" i="0">
-                <a:solidFill>
-                  <a:srgbClr val="333333"/>
-                </a:solidFill>
-                <a:latin typeface="Calibri"/>
-              </a:rPr>
-              <a:t>4.</a:t>
-            </a:r>
-            <a:r>
-              <a:rPr sz="1600" b="0" i="0">
-                <a:solidFill>
-                  <a:srgbClr val="333333"/>
-                </a:solidFill>
-                <a:latin typeface="Calibri"/>
-              </a:rPr>
-              <a:t> Paso 4: redacten la politica de secretos con los 6 puntos obligatorios (inventario de 4 secretos, donde vive cada uno, quien accede, rotacion, plan si se filtra, prohibiciones), verificando que ningun secreto quede en el Dockerfile, en el repositorio ni en el YAML en claro y que el plan de filtracion incluya rotar e invalidar la credencial anterior.</a:t>
-            </a:r>
-          </a:p>
-          <a:p>
-            <a:pPr>
-              <a:spcAft>
-                <a:spcPts val="800"/>
-              </a:spcAft>
-            </a:pPr>
-            <a:r>
-              <a:rPr sz="1600" b="0" i="0">
-                <a:solidFill>
-                  <a:srgbClr val="333333"/>
-                </a:solidFill>
-                <a:latin typeface="Calibri"/>
-              </a:rPr>
-              <a:t>–   </a:t>
-            </a:r>
-            <a:r>
-              <a:rPr sz="1600" b="1" i="0">
-                <a:solidFill>
-                  <a:srgbClr val="333333"/>
-                </a:solidFill>
-                <a:latin typeface="Calibri"/>
-              </a:rPr>
-              <a:t>5.</a:t>
-            </a:r>
-            <a:r>
-              <a:rPr sz="1600" b="0" i="0">
-                <a:solidFill>
-                  <a:srgbClr val="333333"/>
-                </a:solidFill>
-                <a:latin typeface="Calibri"/>
-              </a:rPr>
-              <a:t> Paso 5: integren la tabla STRIDE, el diagrama y la politica de secretos en la seccion Seguridad del informe (1 a 1.5 paginas) y suban las 5 preguntas a ExamLab (modulo Talleres) antes del domingo 23:59, verificando que cada amenaza de la tabla se pueda senalar con el dedo en el diagrama renderizado.</a:t>
-            </a:r>
-          </a:p>
-        </p:txBody>
-      </p:sp>
-      <p:sp>
-        <p:nvSpPr>
-          <p:cNvPr id="6" name="TextBox 5"/>
+              <a:rPr sz="1000" b="0" i="0">
+                <a:solidFill>
+                  <a:srgbClr val="666666"/>
+                </a:solidFill>
+                <a:latin typeface="Calibri"/>
+              </a:rPr>
+              <a:t>Donde se entrega</a:t>
+            </a:r>
+          </a:p>
+        </p:txBody>
+      </p:sp>
+      <p:sp>
+        <p:nvSpPr>
+          <p:cNvPr id="26" name="TextBox 25"/>
           <p:cNvSpPr txBox="1"/>
           <p:nvPr/>
         </p:nvSpPr>

--- a/Arquitectura de Sistemas Computacionales/Clases/Clase 6 - Seguridad en la nube/Presentacion.pptx
+++ b/Arquitectura de Sistemas Computacionales/Clases/Clase 6 - Seguridad en la nube/Presentacion.pptx
@@ -17,7 +17,6 @@
     <p:sldId id="265" r:id="rId16"/>
     <p:sldId id="266" r:id="rId17"/>
     <p:sldId id="267" r:id="rId18"/>
-    <p:sldId id="268" r:id="rId19"/>
   </p:sldIdLst>
   <p:sldSz cx="12191695" cy="6858000" type="screen4x3"/>
   <p:notesSz cx="6858000" cy="9144000"/>
@@ -3470,7 +3469,7 @@
         <p:spPr>
           <a:xfrm>
             <a:off x="0" y="0"/>
-            <a:ext cx="12191695" cy="1170432"/>
+            <a:ext cx="12191695" cy="960120"/>
           </a:xfrm>
           <a:prstGeom prst="rect">
             <a:avLst/>
@@ -3512,7 +3511,7 @@
         </p:nvSpPr>
         <p:spPr>
           <a:xfrm>
-            <a:off x="0" y="1170432"/>
+            <a:off x="0" y="960120"/>
             <a:ext cx="12191695" cy="41148"/>
           </a:xfrm>
           <a:prstGeom prst="rect">
@@ -3556,7 +3555,7 @@
         <p:spPr>
           <a:xfrm>
             <a:off x="457200" y="164592"/>
-            <a:ext cx="11277295" cy="384048"/>
+            <a:ext cx="11277295" cy="502920"/>
           </a:xfrm>
           <a:prstGeom prst="rect">
             <a:avLst/>
@@ -3576,7 +3575,7 @@
                 </a:solidFill>
                 <a:latin typeface="Calibri"/>
               </a:rPr>
-              <a:t>Del boceto a ExamLab (diagrama)</a:t>
+              <a:t>Taller PI (paso a paso)</a:t>
             </a:r>
           </a:p>
         </p:txBody>
@@ -3589,8 +3588,8 @@
         </p:nvSpPr>
         <p:spPr>
           <a:xfrm>
-            <a:off x="457200" y="566928"/>
-            <a:ext cx="11277295" cy="411480"/>
+            <a:off x="457200" y="1170432"/>
+            <a:ext cx="11277295" cy="5230368"/>
           </a:xfrm>
           <a:prstGeom prst="rect">
             <a:avLst/>
@@ -3603,705 +3602,137 @@
           </a:bodyPr>
           <a:lstStyle/>
           <a:p>
-            <a:r>
-              <a:rPr sz="1400" b="0" i="0">
-                <a:solidFill>
-                  <a:srgbClr val="B8D8EE"/>
-                </a:solidFill>
-                <a:latin typeface="Calibri"/>
-              </a:rPr>
-              <a:t>El diagrama se entrega como código Mermaid dentro de ExamLab, no como imagen</a:t>
-            </a:r>
-          </a:p>
-        </p:txBody>
-      </p:sp>
-      <p:sp>
-        <p:nvSpPr>
-          <p:cNvPr id="6" name="Rounded Rectangle 5"/>
-          <p:cNvSpPr/>
-          <p:nvPr/>
-        </p:nvSpPr>
-        <p:spPr>
-          <a:xfrm>
-            <a:off x="457200" y="1659636"/>
-            <a:ext cx="11277295" cy="1051560"/>
-          </a:xfrm>
-          <a:prstGeom prst="roundRect">
-            <a:avLst>
-              <a:gd name="adj" fmla="val 12000"/>
-            </a:avLst>
-          </a:prstGeom>
-          <a:solidFill>
-            <a:srgbClr val="F2F2F2"/>
-          </a:solidFill>
-          <a:ln>
-            <a:noFill/>
-          </a:ln>
-        </p:spPr>
-        <p:style>
-          <a:lnRef idx="1">
-            <a:schemeClr val="accent1"/>
-          </a:lnRef>
-          <a:fillRef idx="3">
-            <a:schemeClr val="accent1"/>
-          </a:fillRef>
-          <a:effectRef idx="2">
-            <a:schemeClr val="accent1"/>
-          </a:effectRef>
-          <a:fontRef idx="minor">
-            <a:schemeClr val="lt1"/>
-          </a:fontRef>
-        </p:style>
-        <p:txBody>
-          <a:bodyPr rtlCol="0" anchor="ctr"/>
-          <a:lstStyle/>
-          <a:p>
-            <a:pPr algn="ctr"/>
-          </a:p>
-        </p:txBody>
-      </p:sp>
-      <p:sp>
-        <p:nvSpPr>
-          <p:cNvPr id="7" name="Rounded Rectangle 6"/>
-          <p:cNvSpPr/>
-          <p:nvPr/>
-        </p:nvSpPr>
-        <p:spPr>
-          <a:xfrm>
-            <a:off x="594360" y="1965960"/>
-            <a:ext cx="438912" cy="438912"/>
-          </a:xfrm>
-          <a:prstGeom prst="roundRect">
-            <a:avLst>
-              <a:gd name="adj" fmla="val 12000"/>
-            </a:avLst>
-          </a:prstGeom>
-          <a:solidFill>
-            <a:srgbClr val="095292"/>
-          </a:solidFill>
-          <a:ln>
-            <a:noFill/>
-          </a:ln>
-        </p:spPr>
-        <p:style>
-          <a:lnRef idx="1">
-            <a:schemeClr val="accent1"/>
-          </a:lnRef>
-          <a:fillRef idx="3">
-            <a:schemeClr val="accent1"/>
-          </a:fillRef>
-          <a:effectRef idx="2">
-            <a:schemeClr val="accent1"/>
-          </a:effectRef>
-          <a:fontRef idx="minor">
-            <a:schemeClr val="lt1"/>
-          </a:fontRef>
-        </p:style>
-        <p:txBody>
-          <a:bodyPr rtlCol="0" anchor="ctr"/>
-          <a:lstStyle/>
-          <a:p>
-            <a:pPr algn="ctr"/>
-          </a:p>
-        </p:txBody>
-      </p:sp>
-      <p:sp>
-        <p:nvSpPr>
-          <p:cNvPr id="8" name="TextBox 7"/>
-          <p:cNvSpPr txBox="1"/>
-          <p:nvPr/>
-        </p:nvSpPr>
-        <p:spPr>
-          <a:xfrm>
-            <a:off x="594360" y="1965960"/>
-            <a:ext cx="438912" cy="438912"/>
-          </a:xfrm>
-          <a:prstGeom prst="rect">
-            <a:avLst/>
-          </a:prstGeom>
-          <a:noFill/>
-        </p:spPr>
-        <p:txBody>
-          <a:bodyPr wrap="square" anchor="ctr"/>
-          <a:lstStyle/>
-          <a:p>
-            <a:pPr algn="ctr"/>
+            <a:pPr>
+              <a:spcAft>
+                <a:spcPts val="800"/>
+              </a:spcAft>
+            </a:pPr>
             <a:r>
               <a:rPr sz="1600" b="1" i="0">
                 <a:solidFill>
-                  <a:srgbClr val="FFFFFF"/>
-                </a:solidFill>
-                <a:latin typeface="Calibri"/>
-              </a:rPr>
-              <a:t>1</a:t>
-            </a:r>
-          </a:p>
-        </p:txBody>
-      </p:sp>
-      <p:sp>
-        <p:nvSpPr>
-          <p:cNvPr id="9" name="TextBox 8"/>
-          <p:cNvSpPr txBox="1"/>
-          <p:nvPr/>
-        </p:nvSpPr>
-        <p:spPr>
-          <a:xfrm>
-            <a:off x="1188720" y="1751076"/>
-            <a:ext cx="10271455" cy="886968"/>
-          </a:xfrm>
-          <a:prstGeom prst="rect">
-            <a:avLst/>
-          </a:prstGeom>
-          <a:noFill/>
-        </p:spPr>
-        <p:txBody>
-          <a:bodyPr wrap="square" anchor="ctr"/>
-          <a:lstStyle/>
-          <a:p>
-            <a:r>
-              <a:rPr sz="1500" b="1" i="0">
-                <a:solidFill>
-                  <a:srgbClr val="095292"/>
-                </a:solidFill>
-                <a:latin typeface="Calibri"/>
-              </a:rPr>
-              <a:t>Disena visual</a:t>
+                  <a:srgbClr val="333333"/>
+                </a:solidFill>
+                <a:latin typeface="Calibri"/>
+              </a:rPr>
+              <a:t>1.</a:t>
+            </a:r>
+            <a:r>
+              <a:rPr sz="1600" b="0" i="0">
+                <a:solidFill>
+                  <a:srgbClr val="333333"/>
+                </a:solidFill>
+                <a:latin typeface="Calibri"/>
+              </a:rPr>
+              <a:t> Paso 1: liste en la pregunta 1 cinco amenazas de SU dominio, cada una nombrando el actor o el dato concreto que pone en riesgo y el camino por el que ocurre; use STRIDE como guia de categorias y verifique que ninguna sea una frase de manual que sirva igual para cualquier sistema.</a:t>
             </a:r>
           </a:p>
           <a:p>
             <a:pPr>
-              <a:spcBef>
-                <a:spcPts val="200"/>
-              </a:spcBef>
+              <a:spcAft>
+                <a:spcPts val="800"/>
+              </a:spcAft>
             </a:pPr>
             <a:r>
-              <a:rPr sz="1300" b="0" i="0">
+              <a:rPr sz="1600" b="0" i="0">
                 <a:solidFill>
                   <a:srgbClr val="333333"/>
                 </a:solidFill>
                 <a:latin typeface="Calibri"/>
               </a:rPr>
-              <a:t>Dibuja el diagrama como quieras en Excalidraw o draw.io: es mas rapido arrastrar cajas que escribir codigo, y ahi es donde piensas el modelo.</a:t>
-            </a:r>
-          </a:p>
-        </p:txBody>
-      </p:sp>
-      <p:sp>
-        <p:nvSpPr>
-          <p:cNvPr id="10" name="Rounded Rectangle 9"/>
-          <p:cNvSpPr/>
-          <p:nvPr/>
-        </p:nvSpPr>
-        <p:spPr>
-          <a:xfrm>
-            <a:off x="457200" y="2802636"/>
-            <a:ext cx="11277295" cy="1051560"/>
-          </a:xfrm>
-          <a:prstGeom prst="roundRect">
-            <a:avLst>
-              <a:gd name="adj" fmla="val 12000"/>
-            </a:avLst>
-          </a:prstGeom>
-          <a:solidFill>
-            <a:srgbClr val="E8F4FA"/>
-          </a:solidFill>
-          <a:ln>
-            <a:noFill/>
-          </a:ln>
-        </p:spPr>
-        <p:style>
-          <a:lnRef idx="1">
-            <a:schemeClr val="accent1"/>
-          </a:lnRef>
-          <a:fillRef idx="3">
-            <a:schemeClr val="accent1"/>
-          </a:fillRef>
-          <a:effectRef idx="2">
-            <a:schemeClr val="accent1"/>
-          </a:effectRef>
-          <a:fontRef idx="minor">
-            <a:schemeClr val="lt1"/>
-          </a:fontRef>
-        </p:style>
-        <p:txBody>
-          <a:bodyPr rtlCol="0" anchor="ctr"/>
-          <a:lstStyle/>
-          <a:p>
-            <a:pPr algn="ctr"/>
-          </a:p>
-        </p:txBody>
-      </p:sp>
-      <p:sp>
-        <p:nvSpPr>
-          <p:cNvPr id="11" name="Rounded Rectangle 10"/>
-          <p:cNvSpPr/>
-          <p:nvPr/>
-        </p:nvSpPr>
-        <p:spPr>
-          <a:xfrm>
-            <a:off x="594360" y="3108960"/>
-            <a:ext cx="438912" cy="438912"/>
-          </a:xfrm>
-          <a:prstGeom prst="roundRect">
-            <a:avLst>
-              <a:gd name="adj" fmla="val 12000"/>
-            </a:avLst>
-          </a:prstGeom>
-          <a:solidFill>
-            <a:srgbClr val="095292"/>
-          </a:solidFill>
-          <a:ln>
-            <a:noFill/>
-          </a:ln>
-        </p:spPr>
-        <p:style>
-          <a:lnRef idx="1">
-            <a:schemeClr val="accent1"/>
-          </a:lnRef>
-          <a:fillRef idx="3">
-            <a:schemeClr val="accent1"/>
-          </a:fillRef>
-          <a:effectRef idx="2">
-            <a:schemeClr val="accent1"/>
-          </a:effectRef>
-          <a:fontRef idx="minor">
-            <a:schemeClr val="lt1"/>
-          </a:fontRef>
-        </p:style>
-        <p:txBody>
-          <a:bodyPr rtlCol="0" anchor="ctr"/>
-          <a:lstStyle/>
-          <a:p>
-            <a:pPr algn="ctr"/>
-          </a:p>
-        </p:txBody>
-      </p:sp>
-      <p:sp>
-        <p:nvSpPr>
-          <p:cNvPr id="12" name="TextBox 11"/>
-          <p:cNvSpPr txBox="1"/>
-          <p:nvPr/>
-        </p:nvSpPr>
-        <p:spPr>
-          <a:xfrm>
-            <a:off x="594360" y="3108960"/>
-            <a:ext cx="438912" cy="438912"/>
-          </a:xfrm>
-          <a:prstGeom prst="rect">
-            <a:avLst/>
-          </a:prstGeom>
-          <a:noFill/>
-        </p:spPr>
-        <p:txBody>
-          <a:bodyPr wrap="square" anchor="ctr"/>
-          <a:lstStyle/>
-          <a:p>
-            <a:pPr algn="ctr"/>
+              <a:t>–   </a:t>
+            </a:r>
             <a:r>
               <a:rPr sz="1600" b="1" i="0">
                 <a:solidFill>
-                  <a:srgbClr val="FFFFFF"/>
-                </a:solidFill>
-                <a:latin typeface="Calibri"/>
-              </a:rPr>
-              <a:t>2</a:t>
-            </a:r>
-          </a:p>
-        </p:txBody>
-      </p:sp>
-      <p:sp>
-        <p:nvSpPr>
-          <p:cNvPr id="13" name="TextBox 12"/>
-          <p:cNvSpPr txBox="1"/>
-          <p:nvPr/>
-        </p:nvSpPr>
-        <p:spPr>
-          <a:xfrm>
-            <a:off x="1188720" y="2894076"/>
-            <a:ext cx="10271455" cy="886968"/>
-          </a:xfrm>
-          <a:prstGeom prst="rect">
-            <a:avLst/>
-          </a:prstGeom>
-          <a:noFill/>
-        </p:spPr>
-        <p:txBody>
-          <a:bodyPr wrap="square" anchor="ctr"/>
-          <a:lstStyle/>
-          <a:p>
-            <a:r>
-              <a:rPr sz="1500" b="1" i="0">
-                <a:solidFill>
-                  <a:srgbClr val="095292"/>
-                </a:solidFill>
-                <a:latin typeface="Calibri"/>
-              </a:rPr>
-              <a:t>Traduce con IA</a:t>
+                  <a:srgbClr val="333333"/>
+                </a:solidFill>
+                <a:latin typeface="Calibri"/>
+              </a:rPr>
+              <a:t>2.</a:t>
+            </a:r>
+            <a:r>
+              <a:rPr sz="1600" b="0" i="0">
+                <a:solidFill>
+                  <a:srgbClr val="333333"/>
+                </a:solidFill>
+                <a:latin typeface="Calibri"/>
+              </a:rPr>
+              <a:t> Paso 2: complete en la pregunta 2 la tabla amenaza-control-donde, senalando para cada control la caja o la flecha concreta del C4 Containers o del Despliegue donde se ve; incluya el principio de menor privilegio aplicado a un componente, diciendo que deja de poder hacer.</a:t>
             </a:r>
           </a:p>
           <a:p>
             <a:pPr>
-              <a:spcBef>
-                <a:spcPts val="200"/>
-              </a:spcBef>
+              <a:spcAft>
+                <a:spcPts val="800"/>
+              </a:spcAft>
             </a:pPr>
             <a:r>
-              <a:rPr sz="1300" b="0" i="0">
+              <a:rPr sz="1600" b="0" i="0">
                 <a:solidFill>
                   <a:srgbClr val="333333"/>
                 </a:solidFill>
                 <a:latin typeface="Calibri"/>
               </a:rPr>
-              <a:t>Copia o describe tu boceto a una IA y pidele el codigo Mermaid: «convierte este diagrama a Mermaid usando flowchart». Revisa el resultado: la IA acierta la sintaxis, no tu modelo.</a:t>
-            </a:r>
-          </a:p>
-        </p:txBody>
-      </p:sp>
-      <p:sp>
-        <p:nvSpPr>
-          <p:cNvPr id="14" name="Rounded Rectangle 13"/>
-          <p:cNvSpPr/>
-          <p:nvPr/>
-        </p:nvSpPr>
-        <p:spPr>
-          <a:xfrm>
-            <a:off x="457200" y="3945636"/>
-            <a:ext cx="11277295" cy="1051560"/>
-          </a:xfrm>
-          <a:prstGeom prst="roundRect">
-            <a:avLst>
-              <a:gd name="adj" fmla="val 12000"/>
-            </a:avLst>
-          </a:prstGeom>
-          <a:solidFill>
-            <a:srgbClr val="F2F2F2"/>
-          </a:solidFill>
-          <a:ln>
-            <a:noFill/>
-          </a:ln>
-        </p:spPr>
-        <p:style>
-          <a:lnRef idx="1">
-            <a:schemeClr val="accent1"/>
-          </a:lnRef>
-          <a:fillRef idx="3">
-            <a:schemeClr val="accent1"/>
-          </a:fillRef>
-          <a:effectRef idx="2">
-            <a:schemeClr val="accent1"/>
-          </a:effectRef>
-          <a:fontRef idx="minor">
-            <a:schemeClr val="lt1"/>
-          </a:fontRef>
-        </p:style>
-        <p:txBody>
-          <a:bodyPr rtlCol="0" anchor="ctr"/>
-          <a:lstStyle/>
-          <a:p>
-            <a:pPr algn="ctr"/>
-          </a:p>
-        </p:txBody>
-      </p:sp>
-      <p:sp>
-        <p:nvSpPr>
-          <p:cNvPr id="15" name="Rounded Rectangle 14"/>
-          <p:cNvSpPr/>
-          <p:nvPr/>
-        </p:nvSpPr>
-        <p:spPr>
-          <a:xfrm>
-            <a:off x="594360" y="4251960"/>
-            <a:ext cx="438912" cy="438912"/>
-          </a:xfrm>
-          <a:prstGeom prst="roundRect">
-            <a:avLst>
-              <a:gd name="adj" fmla="val 12000"/>
-            </a:avLst>
-          </a:prstGeom>
-          <a:solidFill>
-            <a:srgbClr val="095292"/>
-          </a:solidFill>
-          <a:ln>
-            <a:noFill/>
-          </a:ln>
-        </p:spPr>
-        <p:style>
-          <a:lnRef idx="1">
-            <a:schemeClr val="accent1"/>
-          </a:lnRef>
-          <a:fillRef idx="3">
-            <a:schemeClr val="accent1"/>
-          </a:fillRef>
-          <a:effectRef idx="2">
-            <a:schemeClr val="accent1"/>
-          </a:effectRef>
-          <a:fontRef idx="minor">
-            <a:schemeClr val="lt1"/>
-          </a:fontRef>
-        </p:style>
-        <p:txBody>
-          <a:bodyPr rtlCol="0" anchor="ctr"/>
-          <a:lstStyle/>
-          <a:p>
-            <a:pPr algn="ctr"/>
-          </a:p>
-        </p:txBody>
-      </p:sp>
-      <p:sp>
-        <p:nvSpPr>
-          <p:cNvPr id="16" name="TextBox 15"/>
-          <p:cNvSpPr txBox="1"/>
-          <p:nvPr/>
-        </p:nvSpPr>
-        <p:spPr>
-          <a:xfrm>
-            <a:off x="594360" y="4251960"/>
-            <a:ext cx="438912" cy="438912"/>
-          </a:xfrm>
-          <a:prstGeom prst="rect">
-            <a:avLst/>
-          </a:prstGeom>
-          <a:noFill/>
-        </p:spPr>
-        <p:txBody>
-          <a:bodyPr wrap="square" anchor="ctr"/>
-          <a:lstStyle/>
-          <a:p>
-            <a:pPr algn="ctr"/>
+              <a:t>–   </a:t>
+            </a:r>
             <a:r>
               <a:rPr sz="1600" b="1" i="0">
                 <a:solidFill>
-                  <a:srgbClr val="FFFFFF"/>
-                </a:solidFill>
-                <a:latin typeface="Calibri"/>
-              </a:rPr>
-              <a:t>3</a:t>
-            </a:r>
-          </a:p>
-        </p:txBody>
-      </p:sp>
-      <p:sp>
-        <p:nvSpPr>
-          <p:cNvPr id="17" name="TextBox 16"/>
-          <p:cNvSpPr txBox="1"/>
-          <p:nvPr/>
-        </p:nvSpPr>
-        <p:spPr>
-          <a:xfrm>
-            <a:off x="1188720" y="4037076"/>
-            <a:ext cx="10271455" cy="886968"/>
-          </a:xfrm>
-          <a:prstGeom prst="rect">
-            <a:avLst/>
-          </a:prstGeom>
-          <a:noFill/>
-        </p:spPr>
-        <p:txBody>
-          <a:bodyPr wrap="square" anchor="ctr"/>
-          <a:lstStyle/>
-          <a:p>
-            <a:r>
-              <a:rPr sz="1500" b="1" i="0">
-                <a:solidFill>
-                  <a:srgbClr val="095292"/>
-                </a:solidFill>
-                <a:latin typeface="Calibri"/>
-              </a:rPr>
-              <a:t>Pega y renderiza en ExamLab</a:t>
+                  <a:srgbClr val="333333"/>
+                </a:solidFill>
+                <a:latin typeface="Calibri"/>
+              </a:rPr>
+              <a:t>3.</a:t>
+            </a:r>
+            <a:r>
+              <a:rPr sz="1600" b="0" i="0">
+                <a:solidFill>
+                  <a:srgbClr val="333333"/>
+                </a:solidFill>
+                <a:latin typeface="Calibri"/>
+              </a:rPr>
+              <a:t> Paso 3: escriba en la pregunta 3 la politica de secretos respondiendo donde viven, quien los rota, cada cuanto y que esta prohibido, y cierre con el procedimiento ante una filtracion; verifique que su politica no admita secretos en el Dockerfile, el README ni el YAML en claro.</a:t>
             </a:r>
           </a:p>
           <a:p>
             <a:pPr>
-              <a:spcBef>
-                <a:spcPts val="200"/>
-              </a:spcBef>
+              <a:spcAft>
+                <a:spcPts val="800"/>
+              </a:spcAft>
             </a:pPr>
             <a:r>
-              <a:rPr sz="1300" b="0" i="0">
+              <a:rPr sz="1600" b="0" i="0">
                 <a:solidFill>
                   <a:srgbClr val="333333"/>
                 </a:solidFill>
                 <a:latin typeface="Calibri"/>
               </a:rPr>
-              <a:t>Pega ese codigo en la caja de texto de la pregunta y mira como lo dibuja la plataforma. Si no renderiza, corrige ahi mismo: lo que se califica es el diagrama renderizado dentro de ExamLab.</a:t>
-            </a:r>
-          </a:p>
-        </p:txBody>
-      </p:sp>
-      <p:sp>
-        <p:nvSpPr>
-          <p:cNvPr id="18" name="Rounded Rectangle 17"/>
-          <p:cNvSpPr/>
-          <p:nvPr/>
-        </p:nvSpPr>
-        <p:spPr>
-          <a:xfrm>
-            <a:off x="457200" y="5088636"/>
-            <a:ext cx="11277295" cy="1051560"/>
-          </a:xfrm>
-          <a:prstGeom prst="roundRect">
-            <a:avLst>
-              <a:gd name="adj" fmla="val 12000"/>
-            </a:avLst>
-          </a:prstGeom>
-          <a:solidFill>
-            <a:srgbClr val="E8F4FA"/>
-          </a:solidFill>
-          <a:ln>
-            <a:noFill/>
-          </a:ln>
-        </p:spPr>
-        <p:style>
-          <a:lnRef idx="1">
-            <a:schemeClr val="accent1"/>
-          </a:lnRef>
-          <a:fillRef idx="3">
-            <a:schemeClr val="accent1"/>
-          </a:fillRef>
-          <a:effectRef idx="2">
-            <a:schemeClr val="accent1"/>
-          </a:effectRef>
-          <a:fontRef idx="minor">
-            <a:schemeClr val="lt1"/>
-          </a:fontRef>
-        </p:style>
-        <p:txBody>
-          <a:bodyPr rtlCol="0" anchor="ctr"/>
-          <a:lstStyle/>
-          <a:p>
-            <a:pPr algn="ctr"/>
-          </a:p>
-        </p:txBody>
-      </p:sp>
-      <p:sp>
-        <p:nvSpPr>
-          <p:cNvPr id="19" name="Rounded Rectangle 18"/>
-          <p:cNvSpPr/>
-          <p:nvPr/>
-        </p:nvSpPr>
-        <p:spPr>
-          <a:xfrm>
-            <a:off x="594360" y="5394960"/>
-            <a:ext cx="438912" cy="438912"/>
-          </a:xfrm>
-          <a:prstGeom prst="roundRect">
-            <a:avLst>
-              <a:gd name="adj" fmla="val 12000"/>
-            </a:avLst>
-          </a:prstGeom>
-          <a:solidFill>
-            <a:srgbClr val="095292"/>
-          </a:solidFill>
-          <a:ln>
-            <a:noFill/>
-          </a:ln>
-        </p:spPr>
-        <p:style>
-          <a:lnRef idx="1">
-            <a:schemeClr val="accent1"/>
-          </a:lnRef>
-          <a:fillRef idx="3">
-            <a:schemeClr val="accent1"/>
-          </a:fillRef>
-          <a:effectRef idx="2">
-            <a:schemeClr val="accent1"/>
-          </a:effectRef>
-          <a:fontRef idx="minor">
-            <a:schemeClr val="lt1"/>
-          </a:fontRef>
-        </p:style>
-        <p:txBody>
-          <a:bodyPr rtlCol="0" anchor="ctr"/>
-          <a:lstStyle/>
-          <a:p>
-            <a:pPr algn="ctr"/>
-          </a:p>
-        </p:txBody>
-      </p:sp>
-      <p:sp>
-        <p:nvSpPr>
-          <p:cNvPr id="20" name="TextBox 19"/>
-          <p:cNvSpPr txBox="1"/>
-          <p:nvPr/>
-        </p:nvSpPr>
-        <p:spPr>
-          <a:xfrm>
-            <a:off x="594360" y="5394960"/>
-            <a:ext cx="438912" cy="438912"/>
-          </a:xfrm>
-          <a:prstGeom prst="rect">
-            <a:avLst/>
-          </a:prstGeom>
-          <a:noFill/>
-        </p:spPr>
-        <p:txBody>
-          <a:bodyPr wrap="square" anchor="ctr"/>
-          <a:lstStyle/>
-          <a:p>
-            <a:pPr algn="ctr"/>
+              <a:t>–   </a:t>
+            </a:r>
             <a:r>
               <a:rPr sz="1600" b="1" i="0">
                 <a:solidFill>
-                  <a:srgbClr val="FFFFFF"/>
-                </a:solidFill>
-                <a:latin typeface="Calibri"/>
-              </a:rPr>
-              <a:t>4</a:t>
-            </a:r>
-          </a:p>
-        </p:txBody>
-      </p:sp>
-      <p:sp>
-        <p:nvSpPr>
-          <p:cNvPr id="21" name="TextBox 20"/>
-          <p:cNvSpPr txBox="1"/>
-          <p:nvPr/>
-        </p:nvSpPr>
-        <p:spPr>
-          <a:xfrm>
-            <a:off x="1188720" y="5180076"/>
-            <a:ext cx="10271455" cy="886968"/>
-          </a:xfrm>
-          <a:prstGeom prst="rect">
-            <a:avLst/>
-          </a:prstGeom>
-          <a:noFill/>
-        </p:spPr>
-        <p:txBody>
-          <a:bodyPr wrap="square" anchor="ctr"/>
-          <a:lstStyle/>
-          <a:p>
-            <a:r>
-              <a:rPr sz="1500" b="1" i="0">
-                <a:solidFill>
-                  <a:srgbClr val="095292"/>
-                </a:solidFill>
-                <a:latin typeface="Calibri"/>
-              </a:rPr>
-              <a:t>Guarda el PNG para tu PI</a:t>
-            </a:r>
-          </a:p>
-          <a:p>
-            <a:pPr>
-              <a:spcBef>
-                <a:spcPts val="200"/>
-              </a:spcBef>
-            </a:pPr>
-            <a:r>
-              <a:rPr sz="1300" b="0" i="0">
-                <a:solidFill>
                   <a:srgbClr val="333333"/>
                 </a:solidFill>
                 <a:latin typeface="Calibri"/>
               </a:rPr>
-              <a:t>Exporta tambien la imagen a la carpeta de tu Proyecto Integrador. Esa copia es para tu informe; no reemplaza la respuesta en la plataforma.</a:t>
-            </a:r>
-          </a:p>
-        </p:txBody>
-      </p:sp>
-      <p:sp>
-        <p:nvSpPr>
-          <p:cNvPr id="22" name="TextBox 21"/>
+              <a:t>4.</a:t>
+            </a:r>
+            <a:r>
+              <a:rPr sz="1600" b="0" i="0">
+                <a:solidFill>
+                  <a:srgbClr val="333333"/>
+                </a:solidFill>
+                <a:latin typeface="Calibri"/>
+              </a:rPr>
+              <a:t> Paso 4: guarde y continue. Esta actividad es una sola para las Clases 6, 7, 8 y 10 y se entrega completa al cierre del Corte 2: hoy resuelve las preguntas 1 a 3 y las 4 a 12 se resuelven en las clases siguientes.</a:t>
+            </a:r>
+          </a:p>
+        </p:txBody>
+      </p:sp>
+      <p:sp>
+        <p:nvSpPr>
+          <p:cNvPr id="6" name="TextBox 5"/>
           <p:cNvSpPr txBox="1"/>
           <p:nvPr/>
         </p:nvSpPr>
@@ -4475,21 +3906,109 @@
                 </a:solidFill>
                 <a:latin typeface="Calibri"/>
               </a:rPr>
-              <a:t>Taller PI (paso a paso)</a:t>
-            </a:r>
-          </a:p>
-        </p:txBody>
-      </p:sp>
-      <p:sp>
-        <p:nvSpPr>
-          <p:cNvPr id="5" name="TextBox 4"/>
+              <a:t>Para continuar (PI)</a:t>
+            </a:r>
+          </a:p>
+        </p:txBody>
+      </p:sp>
+      <p:sp>
+        <p:nvSpPr>
+          <p:cNvPr id="5" name="Rounded Rectangle 4"/>
+          <p:cNvSpPr/>
+          <p:nvPr/>
+        </p:nvSpPr>
+        <p:spPr>
+          <a:xfrm>
+            <a:off x="457200" y="1261872"/>
+            <a:ext cx="11277295" cy="1051560"/>
+          </a:xfrm>
+          <a:prstGeom prst="roundRect">
+            <a:avLst>
+              <a:gd name="adj" fmla="val 12000"/>
+            </a:avLst>
+          </a:prstGeom>
+          <a:solidFill>
+            <a:srgbClr val="E8F4FA"/>
+          </a:solidFill>
+          <a:ln>
+            <a:noFill/>
+          </a:ln>
+        </p:spPr>
+        <p:style>
+          <a:lnRef idx="1">
+            <a:schemeClr val="accent1"/>
+          </a:lnRef>
+          <a:fillRef idx="3">
+            <a:schemeClr val="accent1"/>
+          </a:fillRef>
+          <a:effectRef idx="2">
+            <a:schemeClr val="accent1"/>
+          </a:effectRef>
+          <a:fontRef idx="minor">
+            <a:schemeClr val="lt1"/>
+          </a:fontRef>
+        </p:style>
+        <p:txBody>
+          <a:bodyPr rtlCol="0" anchor="ctr"/>
+          <a:lstStyle/>
+          <a:p>
+            <a:pPr algn="ctr"/>
+          </a:p>
+        </p:txBody>
+      </p:sp>
+      <p:sp>
+        <p:nvSpPr>
+          <p:cNvPr id="6" name="Rectangle 5"/>
+          <p:cNvSpPr/>
+          <p:nvPr/>
+        </p:nvSpPr>
+        <p:spPr>
+          <a:xfrm>
+            <a:off x="457200" y="1261872"/>
+            <a:ext cx="128016" cy="1051560"/>
+          </a:xfrm>
+          <a:prstGeom prst="rect">
+            <a:avLst/>
+          </a:prstGeom>
+          <a:solidFill>
+            <a:srgbClr val="269CCB"/>
+          </a:solidFill>
+          <a:ln>
+            <a:noFill/>
+          </a:ln>
+        </p:spPr>
+        <p:style>
+          <a:lnRef idx="1">
+            <a:schemeClr val="accent1"/>
+          </a:lnRef>
+          <a:fillRef idx="3">
+            <a:schemeClr val="accent1"/>
+          </a:fillRef>
+          <a:effectRef idx="2">
+            <a:schemeClr val="accent1"/>
+          </a:effectRef>
+          <a:fontRef idx="minor">
+            <a:schemeClr val="lt1"/>
+          </a:fontRef>
+        </p:style>
+        <p:txBody>
+          <a:bodyPr rtlCol="0" anchor="ctr"/>
+          <a:lstStyle/>
+          <a:p>
+            <a:pPr algn="ctr"/>
+          </a:p>
+        </p:txBody>
+      </p:sp>
+      <p:sp>
+        <p:nvSpPr>
+          <p:cNvPr id="7" name="TextBox 6"/>
           <p:cNvSpPr txBox="1"/>
           <p:nvPr/>
         </p:nvSpPr>
         <p:spPr>
           <a:xfrm>
-            <a:off x="457200" y="1170432"/>
-            <a:ext cx="11277295" cy="5230368"/>
+            <a:off x="777240" y="1399031"/>
+            <a:ext cx="10774375" cy="822959"/>
           </a:xfrm>
           <a:prstGeom prst="rect">
             <a:avLst/>
@@ -4502,171 +4021,313 @@
           </a:bodyPr>
           <a:lstStyle/>
           <a:p>
+            <a:r>
+              <a:rPr sz="1200" b="1" i="0">
+                <a:solidFill>
+                  <a:srgbClr val="269CCB"/>
+                </a:solidFill>
+                <a:latin typeface="Calibri"/>
+              </a:rPr>
+              <a:t>Info</a:t>
+            </a:r>
+          </a:p>
+          <a:p>
             <a:pPr>
-              <a:spcAft>
-                <a:spcPts val="800"/>
-              </a:spcAft>
+              <a:spcBef>
+                <a:spcPts val="400"/>
+              </a:spcBef>
             </a:pPr>
             <a:r>
-              <a:rPr sz="1600" b="1" i="0">
+              <a:rPr sz="1400" b="0" i="0">
                 <a:solidFill>
                   <a:srgbClr val="333333"/>
                 </a:solidFill>
                 <a:latin typeface="Calibri"/>
               </a:rPr>
-              <a:t>1.</a:t>
-            </a:r>
-            <a:r>
-              <a:rPr sz="1600" b="0" i="0">
+              <a:t>Entregable: Sección Seguridad PI: 5 amenazas STRIDE-lite + controles + secretos/CI</a:t>
+            </a:r>
+          </a:p>
+        </p:txBody>
+      </p:sp>
+      <p:sp>
+        <p:nvSpPr>
+          <p:cNvPr id="8" name="Rounded Rectangle 7"/>
+          <p:cNvSpPr/>
+          <p:nvPr/>
+        </p:nvSpPr>
+        <p:spPr>
+          <a:xfrm>
+            <a:off x="457200" y="2478024"/>
+            <a:ext cx="11277295" cy="1051560"/>
+          </a:xfrm>
+          <a:prstGeom prst="roundRect">
+            <a:avLst>
+              <a:gd name="adj" fmla="val 12000"/>
+            </a:avLst>
+          </a:prstGeom>
+          <a:solidFill>
+            <a:srgbClr val="FFF8E1"/>
+          </a:solidFill>
+          <a:ln>
+            <a:noFill/>
+          </a:ln>
+        </p:spPr>
+        <p:style>
+          <a:lnRef idx="1">
+            <a:schemeClr val="accent1"/>
+          </a:lnRef>
+          <a:fillRef idx="3">
+            <a:schemeClr val="accent1"/>
+          </a:fillRef>
+          <a:effectRef idx="2">
+            <a:schemeClr val="accent1"/>
+          </a:effectRef>
+          <a:fontRef idx="minor">
+            <a:schemeClr val="lt1"/>
+          </a:fontRef>
+        </p:style>
+        <p:txBody>
+          <a:bodyPr rtlCol="0" anchor="ctr"/>
+          <a:lstStyle/>
+          <a:p>
+            <a:pPr algn="ctr"/>
+          </a:p>
+        </p:txBody>
+      </p:sp>
+      <p:sp>
+        <p:nvSpPr>
+          <p:cNvPr id="9" name="Rectangle 8"/>
+          <p:cNvSpPr/>
+          <p:nvPr/>
+        </p:nvSpPr>
+        <p:spPr>
+          <a:xfrm>
+            <a:off x="457200" y="2478024"/>
+            <a:ext cx="128016" cy="1051560"/>
+          </a:xfrm>
+          <a:prstGeom prst="rect">
+            <a:avLst/>
+          </a:prstGeom>
+          <a:solidFill>
+            <a:srgbClr val="FFD000"/>
+          </a:solidFill>
+          <a:ln>
+            <a:noFill/>
+          </a:ln>
+        </p:spPr>
+        <p:style>
+          <a:lnRef idx="1">
+            <a:schemeClr val="accent1"/>
+          </a:lnRef>
+          <a:fillRef idx="3">
+            <a:schemeClr val="accent1"/>
+          </a:fillRef>
+          <a:effectRef idx="2">
+            <a:schemeClr val="accent1"/>
+          </a:effectRef>
+          <a:fontRef idx="minor">
+            <a:schemeClr val="lt1"/>
+          </a:fontRef>
+        </p:style>
+        <p:txBody>
+          <a:bodyPr rtlCol="0" anchor="ctr"/>
+          <a:lstStyle/>
+          <a:p>
+            <a:pPr algn="ctr"/>
+          </a:p>
+        </p:txBody>
+      </p:sp>
+      <p:sp>
+        <p:nvSpPr>
+          <p:cNvPr id="10" name="TextBox 9"/>
+          <p:cNvSpPr txBox="1"/>
+          <p:nvPr/>
+        </p:nvSpPr>
+        <p:spPr>
+          <a:xfrm>
+            <a:off x="777240" y="2615184"/>
+            <a:ext cx="10774375" cy="822959"/>
+          </a:xfrm>
+          <a:prstGeom prst="rect">
+            <a:avLst/>
+          </a:prstGeom>
+          <a:noFill/>
+        </p:spPr>
+        <p:txBody>
+          <a:bodyPr wrap="square">
+            <a:spAutoFit/>
+          </a:bodyPr>
+          <a:lstStyle/>
+          <a:p>
+            <a:r>
+              <a:rPr sz="1200" b="1" i="0">
+                <a:solidFill>
+                  <a:srgbClr val="FFD000"/>
+                </a:solidFill>
+                <a:latin typeface="Calibri"/>
+              </a:rPr>
+              <a:t>Aclaración</a:t>
+            </a:r>
+          </a:p>
+          <a:p>
+            <a:pPr>
+              <a:spcBef>
+                <a:spcPts val="400"/>
+              </a:spcBef>
+            </a:pPr>
+            <a:r>
+              <a:rPr sz="1400" b="0" i="0">
                 <a:solidFill>
                   <a:srgbClr val="333333"/>
                 </a:solidFill>
                 <a:latin typeface="Calibri"/>
               </a:rPr>
-              <a:t> Paso 1: liste 5 amenazas concretas de su dominio, una por cada categoria de STRIDE-lite (suplantacion, manipulacion, divulgacion de informacion, denegacion de servicio y elevacion de privilegios), verificando que cada amenaza nombre el activo afectado de su propio C4 (por ejemplo la Base de datos Citas o el token del estudiante) y que ninguna sea copiada como frase generica de internet.</a:t>
+              <a:t>Subir evidencias al paquete CloudLite (Drive/repo) y a ExamLab (https://uniaj.examlab.workers.dev/) domingo 23:59.</a:t>
+            </a:r>
+          </a:p>
+        </p:txBody>
+      </p:sp>
+      <p:sp>
+        <p:nvSpPr>
+          <p:cNvPr id="11" name="Rounded Rectangle 10"/>
+          <p:cNvSpPr/>
+          <p:nvPr/>
+        </p:nvSpPr>
+        <p:spPr>
+          <a:xfrm>
+            <a:off x="457200" y="3694176"/>
+            <a:ext cx="11277295" cy="1051560"/>
+          </a:xfrm>
+          <a:prstGeom prst="roundRect">
+            <a:avLst>
+              <a:gd name="adj" fmla="val 12000"/>
+            </a:avLst>
+          </a:prstGeom>
+          <a:solidFill>
+            <a:srgbClr val="FBE4E4"/>
+          </a:solidFill>
+          <a:ln>
+            <a:noFill/>
+          </a:ln>
+        </p:spPr>
+        <p:style>
+          <a:lnRef idx="1">
+            <a:schemeClr val="accent1"/>
+          </a:lnRef>
+          <a:fillRef idx="3">
+            <a:schemeClr val="accent1"/>
+          </a:fillRef>
+          <a:effectRef idx="2">
+            <a:schemeClr val="accent1"/>
+          </a:effectRef>
+          <a:fontRef idx="minor">
+            <a:schemeClr val="lt1"/>
+          </a:fontRef>
+        </p:style>
+        <p:txBody>
+          <a:bodyPr rtlCol="0" anchor="ctr"/>
+          <a:lstStyle/>
+          <a:p>
+            <a:pPr algn="ctr"/>
+          </a:p>
+        </p:txBody>
+      </p:sp>
+      <p:sp>
+        <p:nvSpPr>
+          <p:cNvPr id="12" name="Rectangle 11"/>
+          <p:cNvSpPr/>
+          <p:nvPr/>
+        </p:nvSpPr>
+        <p:spPr>
+          <a:xfrm>
+            <a:off x="457200" y="3694176"/>
+            <a:ext cx="128016" cy="1051560"/>
+          </a:xfrm>
+          <a:prstGeom prst="rect">
+            <a:avLst/>
+          </a:prstGeom>
+          <a:solidFill>
+            <a:srgbClr val="A02030"/>
+          </a:solidFill>
+          <a:ln>
+            <a:noFill/>
+          </a:ln>
+        </p:spPr>
+        <p:style>
+          <a:lnRef idx="1">
+            <a:schemeClr val="accent1"/>
+          </a:lnRef>
+          <a:fillRef idx="3">
+            <a:schemeClr val="accent1"/>
+          </a:fillRef>
+          <a:effectRef idx="2">
+            <a:schemeClr val="accent1"/>
+          </a:effectRef>
+          <a:fontRef idx="minor">
+            <a:schemeClr val="lt1"/>
+          </a:fontRef>
+        </p:style>
+        <p:txBody>
+          <a:bodyPr rtlCol="0" anchor="ctr"/>
+          <a:lstStyle/>
+          <a:p>
+            <a:pPr algn="ctr"/>
+          </a:p>
+        </p:txBody>
+      </p:sp>
+      <p:sp>
+        <p:nvSpPr>
+          <p:cNvPr id="13" name="TextBox 12"/>
+          <p:cNvSpPr txBox="1"/>
+          <p:nvPr/>
+        </p:nvSpPr>
+        <p:spPr>
+          <a:xfrm>
+            <a:off x="777240" y="3831336"/>
+            <a:ext cx="10774375" cy="822959"/>
+          </a:xfrm>
+          <a:prstGeom prst="rect">
+            <a:avLst/>
+          </a:prstGeom>
+          <a:noFill/>
+        </p:spPr>
+        <p:txBody>
+          <a:bodyPr wrap="square">
+            <a:spAutoFit/>
+          </a:bodyPr>
+          <a:lstStyle/>
+          <a:p>
+            <a:r>
+              <a:rPr sz="1200" b="1" i="0">
+                <a:solidFill>
+                  <a:srgbClr val="A02030"/>
+                </a:solidFill>
+                <a:latin typeface="Calibri"/>
+              </a:rPr>
+              <a:t>Atención</a:t>
             </a:r>
           </a:p>
           <a:p>
             <a:pPr>
-              <a:spcAft>
-                <a:spcPts val="800"/>
-              </a:spcAft>
+              <a:spcBef>
+                <a:spcPts val="400"/>
+              </a:spcBef>
             </a:pPr>
             <a:r>
-              <a:rPr sz="1600" b="0" i="0">
+              <a:rPr sz="1400" b="0" i="0">
                 <a:solidFill>
                   <a:srgbClr val="333333"/>
                 </a:solidFill>
                 <a:latin typeface="Calibri"/>
               </a:rPr>
-              <a:t>–   </a:t>
-            </a:r>
-            <a:r>
-              <a:rPr sz="1600" b="1" i="0">
-                <a:solidFill>
-                  <a:srgbClr val="333333"/>
-                </a:solidFill>
-                <a:latin typeface="Calibri"/>
-              </a:rPr>
-              <a:t>2.</a:t>
-            </a:r>
-            <a:r>
-              <a:rPr sz="1600" b="0" i="0">
-                <a:solidFill>
-                  <a:srgbClr val="333333"/>
-                </a:solidFill>
-                <a:latin typeface="Calibri"/>
-              </a:rPr>
-              <a:t> Paso 2: asigne a cada amenaza un control tecnico y la flecha o zona exacta del diagrama donde se ve ese control, verificando que los 5 controles sean distintos entre si y que al menos uno sea preventivo, uno detectivo y uno de contencion; la tabla completa queda en la seccion Seguridad del informe del PI.</a:t>
-            </a:r>
-          </a:p>
-          <a:p>
-            <a:pPr>
-              <a:spcAft>
-                <a:spcPts val="800"/>
-              </a:spcAft>
-            </a:pPr>
-            <a:r>
-              <a:rPr sz="1600" b="0" i="0">
-                <a:solidFill>
-                  <a:srgbClr val="333333"/>
-                </a:solidFill>
-                <a:latin typeface="Calibri"/>
-              </a:rPr>
-              <a:t>–   </a:t>
-            </a:r>
-            <a:r>
-              <a:rPr sz="1600" b="1" i="0">
-                <a:solidFill>
-                  <a:srgbClr val="333333"/>
-                </a:solidFill>
-                <a:latin typeface="Calibri"/>
-              </a:rPr>
-              <a:t>3.</a:t>
-            </a:r>
-            <a:r>
-              <a:rPr sz="1600" b="0" i="0">
-                <a:solidFill>
-                  <a:srgbClr val="333333"/>
-                </a:solidFill>
-                <a:latin typeface="Calibri"/>
-              </a:rPr>
-              <a:t> Paso 3: escriban en ExamLab el diagrama Mermaid de fronteras de confianza con 3 zonas (publica, privada y de datos), los 5 contenedores de la Clase 4 ubicados en su zona, las aristas rotuladas con protocolo y puerto, y una arista punteada de trafico bloqueado, verificando al renderizar que la base de datos y la cola quedan en la zona de datos y que el usuario no tiene ninguna arista solida hacia ellas.</a:t>
-            </a:r>
-          </a:p>
-          <a:p>
-            <a:pPr>
-              <a:spcAft>
-                <a:spcPts val="800"/>
-              </a:spcAft>
-            </a:pPr>
-            <a:r>
-              <a:rPr sz="1600" b="0" i="0">
-                <a:solidFill>
-                  <a:srgbClr val="333333"/>
-                </a:solidFill>
-                <a:latin typeface="Calibri"/>
-              </a:rPr>
-              <a:t>–   </a:t>
-            </a:r>
-            <a:r>
-              <a:rPr sz="1600" b="1" i="0">
-                <a:solidFill>
-                  <a:srgbClr val="333333"/>
-                </a:solidFill>
-                <a:latin typeface="Calibri"/>
-              </a:rPr>
-              <a:t>4.</a:t>
-            </a:r>
-            <a:r>
-              <a:rPr sz="1600" b="0" i="0">
-                <a:solidFill>
-                  <a:srgbClr val="333333"/>
-                </a:solidFill>
-                <a:latin typeface="Calibri"/>
-              </a:rPr>
-              <a:t> Paso 4: redacten la politica de secretos con los 6 puntos obligatorios (inventario de 4 secretos, donde vive cada uno, quien accede, rotacion, plan si se filtra, prohibiciones), verificando que ningun secreto quede en el Dockerfile, en el repositorio ni en el YAML en claro y que el plan de filtracion incluya rotar e invalidar la credencial anterior.</a:t>
-            </a:r>
-          </a:p>
-          <a:p>
-            <a:pPr>
-              <a:spcAft>
-                <a:spcPts val="800"/>
-              </a:spcAft>
-            </a:pPr>
-            <a:r>
-              <a:rPr sz="1600" b="0" i="0">
-                <a:solidFill>
-                  <a:srgbClr val="333333"/>
-                </a:solidFill>
-                <a:latin typeface="Calibri"/>
-              </a:rPr>
-              <a:t>–   </a:t>
-            </a:r>
-            <a:r>
-              <a:rPr sz="1600" b="1" i="0">
-                <a:solidFill>
-                  <a:srgbClr val="333333"/>
-                </a:solidFill>
-                <a:latin typeface="Calibri"/>
-              </a:rPr>
-              <a:t>5.</a:t>
-            </a:r>
-            <a:r>
-              <a:rPr sz="1600" b="0" i="0">
-                <a:solidFill>
-                  <a:srgbClr val="333333"/>
-                </a:solidFill>
-                <a:latin typeface="Calibri"/>
-              </a:rPr>
-              <a:t> Paso 5: integren la tabla STRIDE, el diagrama y la politica de secretos en la seccion Seguridad del informe (1 a 1.5 paginas) y suban las 5 preguntas a ExamLab (modulo Talleres) antes del domingo 23:59, verificando que cada amenaza de la tabla se pueda senalar con el dedo en el diagrama renderizado.</a:t>
-            </a:r>
-          </a:p>
-        </p:txBody>
-      </p:sp>
-      <p:sp>
-        <p:nvSpPr>
-          <p:cNvPr id="6" name="TextBox 5"/>
+              <a:t>Sin cloud de pago ni instalaciones obligatorias de hipervisores/Docker Desktop.</a:t>
+            </a:r>
+          </a:p>
+        </p:txBody>
+      </p:sp>
+      <p:sp>
+        <p:nvSpPr>
+          <p:cNvPr id="14" name="TextBox 13"/>
           <p:cNvSpPr txBox="1"/>
           <p:nvPr/>
         </p:nvSpPr>
@@ -4734,601 +4395,6 @@
         <p:spPr>
           <a:xfrm>
             <a:off x="0" y="0"/>
-            <a:ext cx="12191695" cy="960120"/>
-          </a:xfrm>
-          <a:prstGeom prst="rect">
-            <a:avLst/>
-          </a:prstGeom>
-          <a:solidFill>
-            <a:srgbClr val="095292"/>
-          </a:solidFill>
-          <a:ln>
-            <a:noFill/>
-          </a:ln>
-        </p:spPr>
-        <p:style>
-          <a:lnRef idx="1">
-            <a:schemeClr val="accent1"/>
-          </a:lnRef>
-          <a:fillRef idx="3">
-            <a:schemeClr val="accent1"/>
-          </a:fillRef>
-          <a:effectRef idx="2">
-            <a:schemeClr val="accent1"/>
-          </a:effectRef>
-          <a:fontRef idx="minor">
-            <a:schemeClr val="lt1"/>
-          </a:fontRef>
-        </p:style>
-        <p:txBody>
-          <a:bodyPr rtlCol="0" anchor="ctr"/>
-          <a:lstStyle/>
-          <a:p>
-            <a:pPr algn="ctr"/>
-          </a:p>
-        </p:txBody>
-      </p:sp>
-      <p:sp>
-        <p:nvSpPr>
-          <p:cNvPr id="3" name="Rectangle 2"/>
-          <p:cNvSpPr/>
-          <p:nvPr/>
-        </p:nvSpPr>
-        <p:spPr>
-          <a:xfrm>
-            <a:off x="0" y="960120"/>
-            <a:ext cx="12191695" cy="41148"/>
-          </a:xfrm>
-          <a:prstGeom prst="rect">
-            <a:avLst/>
-          </a:prstGeom>
-          <a:solidFill>
-            <a:srgbClr val="FFD000"/>
-          </a:solidFill>
-          <a:ln>
-            <a:noFill/>
-          </a:ln>
-        </p:spPr>
-        <p:style>
-          <a:lnRef idx="1">
-            <a:schemeClr val="accent1"/>
-          </a:lnRef>
-          <a:fillRef idx="3">
-            <a:schemeClr val="accent1"/>
-          </a:fillRef>
-          <a:effectRef idx="2">
-            <a:schemeClr val="accent1"/>
-          </a:effectRef>
-          <a:fontRef idx="minor">
-            <a:schemeClr val="lt1"/>
-          </a:fontRef>
-        </p:style>
-        <p:txBody>
-          <a:bodyPr rtlCol="0" anchor="ctr"/>
-          <a:lstStyle/>
-          <a:p>
-            <a:pPr algn="ctr"/>
-          </a:p>
-        </p:txBody>
-      </p:sp>
-      <p:sp>
-        <p:nvSpPr>
-          <p:cNvPr id="4" name="TextBox 3"/>
-          <p:cNvSpPr txBox="1"/>
-          <p:nvPr/>
-        </p:nvSpPr>
-        <p:spPr>
-          <a:xfrm>
-            <a:off x="457200" y="164592"/>
-            <a:ext cx="11277295" cy="502920"/>
-          </a:xfrm>
-          <a:prstGeom prst="rect">
-            <a:avLst/>
-          </a:prstGeom>
-          <a:noFill/>
-        </p:spPr>
-        <p:txBody>
-          <a:bodyPr wrap="square">
-            <a:spAutoFit/>
-          </a:bodyPr>
-          <a:lstStyle/>
-          <a:p>
-            <a:r>
-              <a:rPr sz="2600" b="1" i="0">
-                <a:solidFill>
-                  <a:srgbClr val="FFFFFF"/>
-                </a:solidFill>
-                <a:latin typeface="Calibri"/>
-              </a:rPr>
-              <a:t>Para continuar (PI)</a:t>
-            </a:r>
-          </a:p>
-        </p:txBody>
-      </p:sp>
-      <p:sp>
-        <p:nvSpPr>
-          <p:cNvPr id="5" name="Rounded Rectangle 4"/>
-          <p:cNvSpPr/>
-          <p:nvPr/>
-        </p:nvSpPr>
-        <p:spPr>
-          <a:xfrm>
-            <a:off x="457200" y="1261872"/>
-            <a:ext cx="11277295" cy="1051560"/>
-          </a:xfrm>
-          <a:prstGeom prst="roundRect">
-            <a:avLst>
-              <a:gd name="adj" fmla="val 12000"/>
-            </a:avLst>
-          </a:prstGeom>
-          <a:solidFill>
-            <a:srgbClr val="E8F4FA"/>
-          </a:solidFill>
-          <a:ln>
-            <a:noFill/>
-          </a:ln>
-        </p:spPr>
-        <p:style>
-          <a:lnRef idx="1">
-            <a:schemeClr val="accent1"/>
-          </a:lnRef>
-          <a:fillRef idx="3">
-            <a:schemeClr val="accent1"/>
-          </a:fillRef>
-          <a:effectRef idx="2">
-            <a:schemeClr val="accent1"/>
-          </a:effectRef>
-          <a:fontRef idx="minor">
-            <a:schemeClr val="lt1"/>
-          </a:fontRef>
-        </p:style>
-        <p:txBody>
-          <a:bodyPr rtlCol="0" anchor="ctr"/>
-          <a:lstStyle/>
-          <a:p>
-            <a:pPr algn="ctr"/>
-          </a:p>
-        </p:txBody>
-      </p:sp>
-      <p:sp>
-        <p:nvSpPr>
-          <p:cNvPr id="6" name="Rectangle 5"/>
-          <p:cNvSpPr/>
-          <p:nvPr/>
-        </p:nvSpPr>
-        <p:spPr>
-          <a:xfrm>
-            <a:off x="457200" y="1261872"/>
-            <a:ext cx="128016" cy="1051560"/>
-          </a:xfrm>
-          <a:prstGeom prst="rect">
-            <a:avLst/>
-          </a:prstGeom>
-          <a:solidFill>
-            <a:srgbClr val="269CCB"/>
-          </a:solidFill>
-          <a:ln>
-            <a:noFill/>
-          </a:ln>
-        </p:spPr>
-        <p:style>
-          <a:lnRef idx="1">
-            <a:schemeClr val="accent1"/>
-          </a:lnRef>
-          <a:fillRef idx="3">
-            <a:schemeClr val="accent1"/>
-          </a:fillRef>
-          <a:effectRef idx="2">
-            <a:schemeClr val="accent1"/>
-          </a:effectRef>
-          <a:fontRef idx="minor">
-            <a:schemeClr val="lt1"/>
-          </a:fontRef>
-        </p:style>
-        <p:txBody>
-          <a:bodyPr rtlCol="0" anchor="ctr"/>
-          <a:lstStyle/>
-          <a:p>
-            <a:pPr algn="ctr"/>
-          </a:p>
-        </p:txBody>
-      </p:sp>
-      <p:sp>
-        <p:nvSpPr>
-          <p:cNvPr id="7" name="TextBox 6"/>
-          <p:cNvSpPr txBox="1"/>
-          <p:nvPr/>
-        </p:nvSpPr>
-        <p:spPr>
-          <a:xfrm>
-            <a:off x="777240" y="1399031"/>
-            <a:ext cx="10774375" cy="822959"/>
-          </a:xfrm>
-          <a:prstGeom prst="rect">
-            <a:avLst/>
-          </a:prstGeom>
-          <a:noFill/>
-        </p:spPr>
-        <p:txBody>
-          <a:bodyPr wrap="square">
-            <a:spAutoFit/>
-          </a:bodyPr>
-          <a:lstStyle/>
-          <a:p>
-            <a:r>
-              <a:rPr sz="1200" b="1" i="0">
-                <a:solidFill>
-                  <a:srgbClr val="269CCB"/>
-                </a:solidFill>
-                <a:latin typeface="Calibri"/>
-              </a:rPr>
-              <a:t>Info</a:t>
-            </a:r>
-          </a:p>
-          <a:p>
-            <a:pPr>
-              <a:spcBef>
-                <a:spcPts val="400"/>
-              </a:spcBef>
-            </a:pPr>
-            <a:r>
-              <a:rPr sz="1400" b="0" i="0">
-                <a:solidFill>
-                  <a:srgbClr val="333333"/>
-                </a:solidFill>
-                <a:latin typeface="Calibri"/>
-              </a:rPr>
-              <a:t>Entregable: Sección Seguridad PI: 5 amenazas STRIDE-lite + controles + secretos/CI</a:t>
-            </a:r>
-          </a:p>
-        </p:txBody>
-      </p:sp>
-      <p:sp>
-        <p:nvSpPr>
-          <p:cNvPr id="8" name="Rounded Rectangle 7"/>
-          <p:cNvSpPr/>
-          <p:nvPr/>
-        </p:nvSpPr>
-        <p:spPr>
-          <a:xfrm>
-            <a:off x="457200" y="2478024"/>
-            <a:ext cx="11277295" cy="1051560"/>
-          </a:xfrm>
-          <a:prstGeom prst="roundRect">
-            <a:avLst>
-              <a:gd name="adj" fmla="val 12000"/>
-            </a:avLst>
-          </a:prstGeom>
-          <a:solidFill>
-            <a:srgbClr val="FFF8E1"/>
-          </a:solidFill>
-          <a:ln>
-            <a:noFill/>
-          </a:ln>
-        </p:spPr>
-        <p:style>
-          <a:lnRef idx="1">
-            <a:schemeClr val="accent1"/>
-          </a:lnRef>
-          <a:fillRef idx="3">
-            <a:schemeClr val="accent1"/>
-          </a:fillRef>
-          <a:effectRef idx="2">
-            <a:schemeClr val="accent1"/>
-          </a:effectRef>
-          <a:fontRef idx="minor">
-            <a:schemeClr val="lt1"/>
-          </a:fontRef>
-        </p:style>
-        <p:txBody>
-          <a:bodyPr rtlCol="0" anchor="ctr"/>
-          <a:lstStyle/>
-          <a:p>
-            <a:pPr algn="ctr"/>
-          </a:p>
-        </p:txBody>
-      </p:sp>
-      <p:sp>
-        <p:nvSpPr>
-          <p:cNvPr id="9" name="Rectangle 8"/>
-          <p:cNvSpPr/>
-          <p:nvPr/>
-        </p:nvSpPr>
-        <p:spPr>
-          <a:xfrm>
-            <a:off x="457200" y="2478024"/>
-            <a:ext cx="128016" cy="1051560"/>
-          </a:xfrm>
-          <a:prstGeom prst="rect">
-            <a:avLst/>
-          </a:prstGeom>
-          <a:solidFill>
-            <a:srgbClr val="FFD000"/>
-          </a:solidFill>
-          <a:ln>
-            <a:noFill/>
-          </a:ln>
-        </p:spPr>
-        <p:style>
-          <a:lnRef idx="1">
-            <a:schemeClr val="accent1"/>
-          </a:lnRef>
-          <a:fillRef idx="3">
-            <a:schemeClr val="accent1"/>
-          </a:fillRef>
-          <a:effectRef idx="2">
-            <a:schemeClr val="accent1"/>
-          </a:effectRef>
-          <a:fontRef idx="minor">
-            <a:schemeClr val="lt1"/>
-          </a:fontRef>
-        </p:style>
-        <p:txBody>
-          <a:bodyPr rtlCol="0" anchor="ctr"/>
-          <a:lstStyle/>
-          <a:p>
-            <a:pPr algn="ctr"/>
-          </a:p>
-        </p:txBody>
-      </p:sp>
-      <p:sp>
-        <p:nvSpPr>
-          <p:cNvPr id="10" name="TextBox 9"/>
-          <p:cNvSpPr txBox="1"/>
-          <p:nvPr/>
-        </p:nvSpPr>
-        <p:spPr>
-          <a:xfrm>
-            <a:off x="777240" y="2615184"/>
-            <a:ext cx="10774375" cy="822959"/>
-          </a:xfrm>
-          <a:prstGeom prst="rect">
-            <a:avLst/>
-          </a:prstGeom>
-          <a:noFill/>
-        </p:spPr>
-        <p:txBody>
-          <a:bodyPr wrap="square">
-            <a:spAutoFit/>
-          </a:bodyPr>
-          <a:lstStyle/>
-          <a:p>
-            <a:r>
-              <a:rPr sz="1200" b="1" i="0">
-                <a:solidFill>
-                  <a:srgbClr val="FFD000"/>
-                </a:solidFill>
-                <a:latin typeface="Calibri"/>
-              </a:rPr>
-              <a:t>Aclaración</a:t>
-            </a:r>
-          </a:p>
-          <a:p>
-            <a:pPr>
-              <a:spcBef>
-                <a:spcPts val="400"/>
-              </a:spcBef>
-            </a:pPr>
-            <a:r>
-              <a:rPr sz="1400" b="0" i="0">
-                <a:solidFill>
-                  <a:srgbClr val="333333"/>
-                </a:solidFill>
-                <a:latin typeface="Calibri"/>
-              </a:rPr>
-              <a:t>Subir evidencias al paquete CloudLite (Drive/repo) y a ExamLab (https://uniaj.examlab.workers.dev/) domingo 23:59.</a:t>
-            </a:r>
-          </a:p>
-        </p:txBody>
-      </p:sp>
-      <p:sp>
-        <p:nvSpPr>
-          <p:cNvPr id="11" name="Rounded Rectangle 10"/>
-          <p:cNvSpPr/>
-          <p:nvPr/>
-        </p:nvSpPr>
-        <p:spPr>
-          <a:xfrm>
-            <a:off x="457200" y="3694176"/>
-            <a:ext cx="11277295" cy="1051560"/>
-          </a:xfrm>
-          <a:prstGeom prst="roundRect">
-            <a:avLst>
-              <a:gd name="adj" fmla="val 12000"/>
-            </a:avLst>
-          </a:prstGeom>
-          <a:solidFill>
-            <a:srgbClr val="FBE4E4"/>
-          </a:solidFill>
-          <a:ln>
-            <a:noFill/>
-          </a:ln>
-        </p:spPr>
-        <p:style>
-          <a:lnRef idx="1">
-            <a:schemeClr val="accent1"/>
-          </a:lnRef>
-          <a:fillRef idx="3">
-            <a:schemeClr val="accent1"/>
-          </a:fillRef>
-          <a:effectRef idx="2">
-            <a:schemeClr val="accent1"/>
-          </a:effectRef>
-          <a:fontRef idx="minor">
-            <a:schemeClr val="lt1"/>
-          </a:fontRef>
-        </p:style>
-        <p:txBody>
-          <a:bodyPr rtlCol="0" anchor="ctr"/>
-          <a:lstStyle/>
-          <a:p>
-            <a:pPr algn="ctr"/>
-          </a:p>
-        </p:txBody>
-      </p:sp>
-      <p:sp>
-        <p:nvSpPr>
-          <p:cNvPr id="12" name="Rectangle 11"/>
-          <p:cNvSpPr/>
-          <p:nvPr/>
-        </p:nvSpPr>
-        <p:spPr>
-          <a:xfrm>
-            <a:off x="457200" y="3694176"/>
-            <a:ext cx="128016" cy="1051560"/>
-          </a:xfrm>
-          <a:prstGeom prst="rect">
-            <a:avLst/>
-          </a:prstGeom>
-          <a:solidFill>
-            <a:srgbClr val="A02030"/>
-          </a:solidFill>
-          <a:ln>
-            <a:noFill/>
-          </a:ln>
-        </p:spPr>
-        <p:style>
-          <a:lnRef idx="1">
-            <a:schemeClr val="accent1"/>
-          </a:lnRef>
-          <a:fillRef idx="3">
-            <a:schemeClr val="accent1"/>
-          </a:fillRef>
-          <a:effectRef idx="2">
-            <a:schemeClr val="accent1"/>
-          </a:effectRef>
-          <a:fontRef idx="minor">
-            <a:schemeClr val="lt1"/>
-          </a:fontRef>
-        </p:style>
-        <p:txBody>
-          <a:bodyPr rtlCol="0" anchor="ctr"/>
-          <a:lstStyle/>
-          <a:p>
-            <a:pPr algn="ctr"/>
-          </a:p>
-        </p:txBody>
-      </p:sp>
-      <p:sp>
-        <p:nvSpPr>
-          <p:cNvPr id="13" name="TextBox 12"/>
-          <p:cNvSpPr txBox="1"/>
-          <p:nvPr/>
-        </p:nvSpPr>
-        <p:spPr>
-          <a:xfrm>
-            <a:off x="777240" y="3831336"/>
-            <a:ext cx="10774375" cy="822959"/>
-          </a:xfrm>
-          <a:prstGeom prst="rect">
-            <a:avLst/>
-          </a:prstGeom>
-          <a:noFill/>
-        </p:spPr>
-        <p:txBody>
-          <a:bodyPr wrap="square">
-            <a:spAutoFit/>
-          </a:bodyPr>
-          <a:lstStyle/>
-          <a:p>
-            <a:r>
-              <a:rPr sz="1200" b="1" i="0">
-                <a:solidFill>
-                  <a:srgbClr val="A02030"/>
-                </a:solidFill>
-                <a:latin typeface="Calibri"/>
-              </a:rPr>
-              <a:t>Atención</a:t>
-            </a:r>
-          </a:p>
-          <a:p>
-            <a:pPr>
-              <a:spcBef>
-                <a:spcPts val="400"/>
-              </a:spcBef>
-            </a:pPr>
-            <a:r>
-              <a:rPr sz="1400" b="0" i="0">
-                <a:solidFill>
-                  <a:srgbClr val="333333"/>
-                </a:solidFill>
-                <a:latin typeface="Calibri"/>
-              </a:rPr>
-              <a:t>Sin cloud de pago ni instalaciones obligatorias de hipervisores/Docker Desktop.</a:t>
-            </a:r>
-          </a:p>
-        </p:txBody>
-      </p:sp>
-      <p:sp>
-        <p:nvSpPr>
-          <p:cNvPr id="14" name="TextBox 13"/>
-          <p:cNvSpPr txBox="1"/>
-          <p:nvPr/>
-        </p:nvSpPr>
-        <p:spPr>
-          <a:xfrm>
-            <a:off x="11185855" y="6473952"/>
-            <a:ext cx="640080" cy="274320"/>
-          </a:xfrm>
-          <a:prstGeom prst="rect">
-            <a:avLst/>
-          </a:prstGeom>
-          <a:noFill/>
-        </p:spPr>
-        <p:txBody>
-          <a:bodyPr wrap="square">
-            <a:spAutoFit/>
-          </a:bodyPr>
-          <a:lstStyle/>
-          <a:p>
-            <a:pPr algn="r"/>
-            <a:r>
-              <a:rPr sz="1100" b="0" i="0">
-                <a:solidFill>
-                  <a:srgbClr val="666666"/>
-                </a:solidFill>
-                <a:latin typeface="Calibri"/>
-              </a:rPr>
-              <a:t>12</a:t>
-            </a:r>
-          </a:p>
-        </p:txBody>
-      </p:sp>
-    </p:spTree>
-  </p:cSld>
-  <p:clrMapOvr>
-    <a:masterClrMapping/>
-  </p:clrMapOvr>
-</p:sld>
-</file>
-
-<file path=ppt/slides/slide13.xml><?xml version="1.0" encoding="utf-8"?>
-<p:sld xmlns:a="http://schemas.openxmlformats.org/drawingml/2006/main" xmlns:p="http://schemas.openxmlformats.org/presentationml/2006/main" xmlns:r="http://schemas.openxmlformats.org/officeDocument/2006/relationships">
-  <p:cSld>
-    <p:bg>
-      <p:bgPr>
-        <a:solidFill>
-          <a:srgbClr val="FFFFFF"/>
-        </a:solidFill>
-        <a:effectLst/>
-      </p:bgPr>
-    </p:bg>
-    <p:spTree>
-      <p:nvGrpSpPr>
-        <p:cNvPr id="1" name=""/>
-        <p:cNvGrpSpPr/>
-        <p:nvPr/>
-      </p:nvGrpSpPr>
-      <p:grpSpPr/>
-      <p:sp>
-        <p:nvSpPr>
-          <p:cNvPr id="2" name="Rectangle 1"/>
-          <p:cNvSpPr/>
-          <p:nvPr/>
-        </p:nvSpPr>
-        <p:spPr>
-          <a:xfrm>
-            <a:off x="0" y="0"/>
             <a:ext cx="12191695" cy="164592"/>
           </a:xfrm>
           <a:prstGeom prst="rect">
@@ -7840,7 +6906,7 @@
         <p:spPr>
           <a:xfrm>
             <a:off x="457200" y="1591056"/>
-            <a:ext cx="3624986" cy="2299716"/>
+            <a:ext cx="3624986" cy="2331720"/>
           </a:xfrm>
           <a:prstGeom prst="roundRect">
             <a:avLst>
@@ -7978,8 +7044,8 @@
         </p:blipFill>
         <p:spPr>
           <a:xfrm>
-            <a:off x="1659331" y="1847087"/>
-            <a:ext cx="1220724" cy="1220724"/>
+            <a:off x="1643329" y="1847087"/>
+            <a:ext cx="1252728" cy="1252728"/>
           </a:xfrm>
           <a:prstGeom prst="rect">
             <a:avLst/>
@@ -7994,7 +7060,7 @@
         </p:nvSpPr>
         <p:spPr>
           <a:xfrm>
-            <a:off x="530352" y="3159251"/>
+            <a:off x="530352" y="3191256"/>
             <a:ext cx="3478682" cy="621792"/>
           </a:xfrm>
           <a:prstGeom prst="rect">
@@ -8044,7 +7110,7 @@
         <p:spPr>
           <a:xfrm>
             <a:off x="4283354" y="1591056"/>
-            <a:ext cx="3624986" cy="2299716"/>
+            <a:ext cx="3624986" cy="2331720"/>
           </a:xfrm>
           <a:prstGeom prst="roundRect">
             <a:avLst>
@@ -8182,8 +7248,8 @@
         </p:blipFill>
         <p:spPr>
           <a:xfrm>
-            <a:off x="5485485" y="1847087"/>
-            <a:ext cx="1220724" cy="1220724"/>
+            <a:off x="5469483" y="1847087"/>
+            <a:ext cx="1252728" cy="1252728"/>
           </a:xfrm>
           <a:prstGeom prst="rect">
             <a:avLst/>
@@ -8198,7 +7264,7 @@
         </p:nvSpPr>
         <p:spPr>
           <a:xfrm>
-            <a:off x="4356506" y="3159251"/>
+            <a:off x="4356506" y="3191256"/>
             <a:ext cx="3478682" cy="621792"/>
           </a:xfrm>
           <a:prstGeom prst="rect">
@@ -8248,7 +7314,7 @@
         <p:spPr>
           <a:xfrm>
             <a:off x="8109508" y="1591056"/>
-            <a:ext cx="3624986" cy="2299716"/>
+            <a:ext cx="3624986" cy="2331720"/>
           </a:xfrm>
           <a:prstGeom prst="roundRect">
             <a:avLst>
@@ -8372,7 +7438,7 @@
       </p:sp>
       <p:pic>
         <p:nvPicPr>
-          <p:cNvPr id="19" name="Picture 18" descr="mermaid.png"/>
+          <p:cNvPr id="19" name="Picture 18" descr="examlab.png"/>
           <p:cNvPicPr>
             <a:picLocks noChangeAspect="1"/>
           </p:cNvPicPr>
@@ -8386,8 +7452,8 @@
         </p:blipFill>
         <p:spPr>
           <a:xfrm>
-            <a:off x="9311640" y="1847087"/>
-            <a:ext cx="1220724" cy="1220724"/>
+            <a:off x="9295638" y="1847087"/>
+            <a:ext cx="1252728" cy="1252728"/>
           </a:xfrm>
           <a:prstGeom prst="rect">
             <a:avLst/>
@@ -8402,7 +7468,7 @@
         </p:nvSpPr>
         <p:spPr>
           <a:xfrm>
-            <a:off x="8182660" y="3159251"/>
+            <a:off x="8182660" y="3191256"/>
             <a:ext cx="3478682" cy="621792"/>
           </a:xfrm>
           <a:prstGeom prst="rect">
@@ -8422,7 +7488,7 @@
                 </a:solidFill>
                 <a:latin typeface="Calibri"/>
               </a:rPr>
-              <a:t>Mermaid</a:t>
+              <a:t>ExamLab</a:t>
             </a:r>
           </a:p>
           <a:p>
@@ -8438,210 +7504,6 @@
                 </a:solidFill>
                 <a:latin typeface="Calibri"/>
               </a:rPr>
-              <a:t>Codigo del diagrama</a:t>
-            </a:r>
-          </a:p>
-        </p:txBody>
-      </p:sp>
-      <p:sp>
-        <p:nvSpPr>
-          <p:cNvPr id="21" name="Rounded Rectangle 20"/>
-          <p:cNvSpPr/>
-          <p:nvPr/>
-        </p:nvSpPr>
-        <p:spPr>
-          <a:xfrm>
-            <a:off x="4283354" y="4055364"/>
-            <a:ext cx="3624986" cy="2299716"/>
-          </a:xfrm>
-          <a:prstGeom prst="roundRect">
-            <a:avLst>
-              <a:gd name="adj" fmla="val 12000"/>
-            </a:avLst>
-          </a:prstGeom>
-          <a:solidFill>
-            <a:srgbClr val="F2F2F2"/>
-          </a:solidFill>
-          <a:ln>
-            <a:noFill/>
-          </a:ln>
-        </p:spPr>
-        <p:style>
-          <a:lnRef idx="1">
-            <a:schemeClr val="accent1"/>
-          </a:lnRef>
-          <a:fillRef idx="3">
-            <a:schemeClr val="accent1"/>
-          </a:fillRef>
-          <a:effectRef idx="2">
-            <a:schemeClr val="accent1"/>
-          </a:effectRef>
-          <a:fontRef idx="minor">
-            <a:schemeClr val="lt1"/>
-          </a:fontRef>
-        </p:style>
-        <p:txBody>
-          <a:bodyPr rtlCol="0" anchor="ctr"/>
-          <a:lstStyle/>
-          <a:p>
-            <a:pPr algn="ctr"/>
-          </a:p>
-        </p:txBody>
-      </p:sp>
-      <p:sp>
-        <p:nvSpPr>
-          <p:cNvPr id="22" name="Rectangle 21"/>
-          <p:cNvSpPr/>
-          <p:nvPr/>
-        </p:nvSpPr>
-        <p:spPr>
-          <a:xfrm>
-            <a:off x="4283354" y="4055364"/>
-            <a:ext cx="3624986" cy="64008"/>
-          </a:xfrm>
-          <a:prstGeom prst="rect">
-            <a:avLst/>
-          </a:prstGeom>
-          <a:solidFill>
-            <a:srgbClr val="095292"/>
-          </a:solidFill>
-          <a:ln>
-            <a:noFill/>
-          </a:ln>
-        </p:spPr>
-        <p:style>
-          <a:lnRef idx="1">
-            <a:schemeClr val="accent1"/>
-          </a:lnRef>
-          <a:fillRef idx="3">
-            <a:schemeClr val="accent1"/>
-          </a:fillRef>
-          <a:effectRef idx="2">
-            <a:schemeClr val="accent1"/>
-          </a:effectRef>
-          <a:fontRef idx="minor">
-            <a:schemeClr val="lt1"/>
-          </a:fontRef>
-        </p:style>
-        <p:txBody>
-          <a:bodyPr rtlCol="0" anchor="ctr"/>
-          <a:lstStyle/>
-          <a:p>
-            <a:pPr algn="ctr"/>
-          </a:p>
-        </p:txBody>
-      </p:sp>
-      <p:sp>
-        <p:nvSpPr>
-          <p:cNvPr id="23" name="Rectangle 22"/>
-          <p:cNvSpPr/>
-          <p:nvPr/>
-        </p:nvSpPr>
-        <p:spPr>
-          <a:xfrm>
-            <a:off x="4283354" y="4119372"/>
-            <a:ext cx="3624986" cy="27432"/>
-          </a:xfrm>
-          <a:prstGeom prst="rect">
-            <a:avLst/>
-          </a:prstGeom>
-          <a:solidFill>
-            <a:srgbClr val="FFD000"/>
-          </a:solidFill>
-          <a:ln>
-            <a:noFill/>
-          </a:ln>
-        </p:spPr>
-        <p:style>
-          <a:lnRef idx="1">
-            <a:schemeClr val="accent1"/>
-          </a:lnRef>
-          <a:fillRef idx="3">
-            <a:schemeClr val="accent1"/>
-          </a:fillRef>
-          <a:effectRef idx="2">
-            <a:schemeClr val="accent1"/>
-          </a:effectRef>
-          <a:fontRef idx="minor">
-            <a:schemeClr val="lt1"/>
-          </a:fontRef>
-        </p:style>
-        <p:txBody>
-          <a:bodyPr rtlCol="0" anchor="ctr"/>
-          <a:lstStyle/>
-          <a:p>
-            <a:pPr algn="ctr"/>
-          </a:p>
-        </p:txBody>
-      </p:sp>
-      <p:pic>
-        <p:nvPicPr>
-          <p:cNvPr id="24" name="Picture 23" descr="examlab.png"/>
-          <p:cNvPicPr>
-            <a:picLocks noChangeAspect="1"/>
-          </p:cNvPicPr>
-          <p:nvPr/>
-        </p:nvPicPr>
-        <p:blipFill>
-          <a:blip r:embed="rId5"/>
-          <a:stretch>
-            <a:fillRect/>
-          </a:stretch>
-        </p:blipFill>
-        <p:spPr>
-          <a:xfrm>
-            <a:off x="5485485" y="4311396"/>
-            <a:ext cx="1220724" cy="1220724"/>
-          </a:xfrm>
-          <a:prstGeom prst="rect">
-            <a:avLst/>
-          </a:prstGeom>
-        </p:spPr>
-      </p:pic>
-      <p:sp>
-        <p:nvSpPr>
-          <p:cNvPr id="25" name="TextBox 24"/>
-          <p:cNvSpPr txBox="1"/>
-          <p:nvPr/>
-        </p:nvSpPr>
-        <p:spPr>
-          <a:xfrm>
-            <a:off x="4356506" y="5623560"/>
-            <a:ext cx="3478682" cy="621792"/>
-          </a:xfrm>
-          <a:prstGeom prst="rect">
-            <a:avLst/>
-          </a:prstGeom>
-          <a:noFill/>
-        </p:spPr>
-        <p:txBody>
-          <a:bodyPr wrap="square" anchor="t"/>
-          <a:lstStyle/>
-          <a:p>
-            <a:pPr algn="ctr"/>
-            <a:r>
-              <a:rPr sz="1300" b="1" i="0">
-                <a:solidFill>
-                  <a:srgbClr val="095292"/>
-                </a:solidFill>
-                <a:latin typeface="Calibri"/>
-              </a:rPr>
-              <a:t>ExamLab</a:t>
-            </a:r>
-          </a:p>
-          <a:p>
-            <a:pPr algn="ctr">
-              <a:spcBef>
-                <a:spcPts val="200"/>
-              </a:spcBef>
-            </a:pPr>
-            <a:r>
-              <a:rPr sz="1000" b="0" i="0">
-                <a:solidFill>
-                  <a:srgbClr val="666666"/>
-                </a:solidFill>
-                <a:latin typeface="Calibri"/>
-              </a:rPr>
               <a:t>Donde se entrega</a:t>
             </a:r>
           </a:p>
@@ -8649,7 +7511,7 @@
       </p:sp>
       <p:sp>
         <p:nvSpPr>
-          <p:cNvPr id="26" name="TextBox 25"/>
+          <p:cNvPr id="21" name="TextBox 20"/>
           <p:cNvSpPr txBox="1"/>
           <p:nvPr/>
         </p:nvSpPr>

--- a/Arquitectura de Sistemas Computacionales/Clases/Clase 6 - Seguridad en la nube/Presentacion.pptx
+++ b/Arquitectura de Sistemas Computacionales/Clases/Clase 6 - Seguridad en la nube/Presentacion.pptx
@@ -17,6 +17,9 @@
     <p:sldId id="265" r:id="rId16"/>
     <p:sldId id="266" r:id="rId17"/>
     <p:sldId id="267" r:id="rId18"/>
+    <p:sldId id="268" r:id="rId19"/>
+    <p:sldId id="269" r:id="rId20"/>
+    <p:sldId id="270" r:id="rId21"/>
   </p:sldIdLst>
   <p:sldSz cx="12191695" cy="6858000" type="screen4x3"/>
   <p:notesSz cx="6858000" cy="9144000"/>
@@ -3575,21 +3578,514 @@
                 </a:solidFill>
                 <a:latin typeface="Calibri"/>
               </a:rPr>
-              <a:t>Taller PI (paso a paso)</a:t>
-            </a:r>
-          </a:p>
-        </p:txBody>
-      </p:sp>
-      <p:sp>
-        <p:nvSpPr>
-          <p:cNvPr id="5" name="TextBox 4"/>
+              <a:t>La tabla que se califica: una fila por amenaza</a:t>
+            </a:r>
+          </a:p>
+        </p:txBody>
+      </p:sp>
+      <p:graphicFrame>
+        <p:nvGraphicFramePr>
+          <p:cNvPr id="5" name="Table 4"/>
+          <p:cNvGraphicFramePr>
+            <a:graphicFrameLocks noGrp="1"/>
+          </p:cNvGraphicFramePr>
+          <p:nvPr/>
+        </p:nvGraphicFramePr>
+        <p:xfrm>
+          <a:off x="457200" y="1216152"/>
+          <a:ext cx="11277295" cy="1920240"/>
+        </p:xfrm>
+        <a:graphic>
+          <a:graphicData uri="http://schemas.openxmlformats.org/drawingml/2006/table">
+            <a:tbl>
+              <a:tblPr firstRow="1" bandRow="1">
+                <a:tableStyleId>{5C22544A-7EE6-4342-B048-85BDC9FD1C3A}</a:tableStyleId>
+              </a:tblPr>
+              <a:tblGrid>
+                <a:gridCol w="4206240"/>
+                <a:gridCol w="3566160"/>
+                <a:gridCol w="3504895"/>
+              </a:tblGrid>
+              <a:tr h="384048">
+                <a:tc>
+                  <a:txBody>
+                    <a:bodyPr/>
+                    <a:lstStyle/>
+                    <a:p>
+                      <a:r>
+                        <a:rPr sz="1200" b="1" i="0">
+                          <a:solidFill>
+                            <a:srgbClr val="FFFFFF"/>
+                          </a:solidFill>
+                          <a:latin typeface="Calibri"/>
+                        </a:rPr>
+                        <a:t>Amenaza</a:t>
+                      </a:r>
+                    </a:p>
+                  </a:txBody>
+                  <a:tcPr>
+                    <a:solidFill>
+                      <a:srgbClr val="095292"/>
+                    </a:solidFill>
+                  </a:tcPr>
+                </a:tc>
+                <a:tc>
+                  <a:txBody>
+                    <a:bodyPr/>
+                    <a:lstStyle/>
+                    <a:p>
+                      <a:r>
+                        <a:rPr sz="1200" b="1" i="0">
+                          <a:solidFill>
+                            <a:srgbClr val="FFFFFF"/>
+                          </a:solidFill>
+                          <a:latin typeface="Calibri"/>
+                        </a:rPr>
+                        <a:t>Control</a:t>
+                      </a:r>
+                    </a:p>
+                  </a:txBody>
+                  <a:tcPr>
+                    <a:solidFill>
+                      <a:srgbClr val="095292"/>
+                    </a:solidFill>
+                  </a:tcPr>
+                </a:tc>
+                <a:tc>
+                  <a:txBody>
+                    <a:bodyPr/>
+                    <a:lstStyle/>
+                    <a:p>
+                      <a:r>
+                        <a:rPr sz="1200" b="1" i="0">
+                          <a:solidFill>
+                            <a:srgbClr val="FFFFFF"/>
+                          </a:solidFill>
+                          <a:latin typeface="Calibri"/>
+                        </a:rPr>
+                        <a:t>Dónde se ve (caja o flecha)</a:t>
+                      </a:r>
+                    </a:p>
+                  </a:txBody>
+                  <a:tcPr>
+                    <a:solidFill>
+                      <a:srgbClr val="095292"/>
+                    </a:solidFill>
+                  </a:tcPr>
+                </a:tc>
+              </a:tr>
+              <a:tr h="384048">
+                <a:tc>
+                  <a:txBody>
+                    <a:bodyPr/>
+                    <a:lstStyle/>
+                    <a:p>
+                      <a:r>
+                        <a:rPr sz="1000" b="1" i="0">
+                          <a:solidFill>
+                            <a:srgbClr val="333333"/>
+                          </a:solidFill>
+                          <a:latin typeface="Calibri"/>
+                        </a:rPr>
+                        <a:t>S ·</a:t>
+                      </a:r>
+                      <a:r>
+                        <a:rPr sz="1000" b="0" i="0">
+                          <a:solidFill>
+                            <a:srgbClr val="333333"/>
+                          </a:solidFill>
+                          <a:latin typeface="Calibri"/>
+                        </a:rPr>
+                        <a:t> Un cliente reserva </a:t>
+                      </a:r>
+                      <a:r>
+                        <a:rPr sz="1000" b="1" i="0">
+                          <a:solidFill>
+                            <a:srgbClr val="333333"/>
+                          </a:solidFill>
+                          <a:latin typeface="Calibri"/>
+                        </a:rPr>
+                        <a:t>a nombre de otro</a:t>
+                      </a:r>
+                      <a:r>
+                        <a:rPr sz="1000" b="0" i="0">
+                          <a:solidFill>
+                            <a:srgbClr val="333333"/>
+                          </a:solidFill>
+                          <a:latin typeface="Calibri"/>
+                        </a:rPr>
+                        <a:t>: «POST /turnos» toma el id del cuerpo de la petición.</a:t>
+                      </a:r>
+                    </a:p>
+                  </a:txBody>
+                  <a:tcPr>
+                    <a:solidFill>
+                      <a:srgbClr val="FFFFFF"/>
+                    </a:solidFill>
+                  </a:tcPr>
+                </a:tc>
+                <a:tc>
+                  <a:txBody>
+                    <a:bodyPr/>
+                    <a:lstStyle/>
+                    <a:p>
+                      <a:r>
+                        <a:rPr sz="1000" b="0" i="0">
+                          <a:solidFill>
+                            <a:srgbClr val="333333"/>
+                          </a:solidFill>
+                          <a:latin typeface="Calibri"/>
+                        </a:rPr>
+                        <a:t>El id se toma del token verificado, no del cuerpo. Se prueba mandando un id ajeno y esperando 403.</a:t>
+                      </a:r>
+                    </a:p>
+                  </a:txBody>
+                  <a:tcPr>
+                    <a:solidFill>
+                      <a:srgbClr val="FFFFFF"/>
+                    </a:solidFill>
+                  </a:tcPr>
+                </a:tc>
+                <a:tc>
+                  <a:txBody>
+                    <a:bodyPr/>
+                    <a:lstStyle/>
+                    <a:p>
+                      <a:r>
+                        <a:rPr sz="1000" b="1" i="0">
+                          <a:solidFill>
+                            <a:srgbClr val="333333"/>
+                          </a:solidFill>
+                          <a:latin typeface="Calibri"/>
+                        </a:rPr>
+                        <a:t>Flecha</a:t>
+                      </a:r>
+                      <a:r>
+                        <a:rPr sz="1000" b="0" i="0">
+                          <a:solidFill>
+                            <a:srgbClr val="333333"/>
+                          </a:solidFill>
+                          <a:latin typeface="Calibri"/>
+                        </a:rPr>
+                        <a:t> «App web → API de turnos»</a:t>
+                      </a:r>
+                    </a:p>
+                  </a:txBody>
+                  <a:tcPr>
+                    <a:solidFill>
+                      <a:srgbClr val="FFFFFF"/>
+                    </a:solidFill>
+                  </a:tcPr>
+                </a:tc>
+              </a:tr>
+              <a:tr h="384048">
+                <a:tc>
+                  <a:txBody>
+                    <a:bodyPr/>
+                    <a:lstStyle/>
+                    <a:p>
+                      <a:r>
+                        <a:rPr sz="1000" b="1" i="0">
+                          <a:solidFill>
+                            <a:srgbClr val="333333"/>
+                          </a:solidFill>
+                          <a:latin typeface="Calibri"/>
+                        </a:rPr>
+                        <a:t>T ·</a:t>
+                      </a:r>
+                      <a:r>
+                        <a:rPr sz="1000" b="0" i="0">
+                          <a:solidFill>
+                            <a:srgbClr val="333333"/>
+                          </a:solidFill>
+                          <a:latin typeface="Calibri"/>
+                        </a:rPr>
+                        <a:t> Un cliente </a:t>
+                      </a:r>
+                      <a:r>
+                        <a:rPr sz="1000" b="1" i="0">
+                          <a:solidFill>
+                            <a:srgbClr val="333333"/>
+                          </a:solidFill>
+                          <a:latin typeface="Calibri"/>
+                        </a:rPr>
+                        <a:t>mueve la franja</a:t>
+                      </a:r>
+                      <a:r>
+                        <a:rPr sz="1000" b="0" i="0">
+                          <a:solidFill>
+                            <a:srgbClr val="333333"/>
+                          </a:solidFill>
+                          <a:latin typeface="Calibri"/>
+                        </a:rPr>
+                        <a:t> de un turno ajeno porque la API no revisa de quién es.</a:t>
+                      </a:r>
+                    </a:p>
+                  </a:txBody>
+                  <a:tcPr>
+                    <a:solidFill>
+                      <a:srgbClr val="F2F2F2"/>
+                    </a:solidFill>
+                  </a:tcPr>
+                </a:tc>
+                <a:tc>
+                  <a:txBody>
+                    <a:bodyPr/>
+                    <a:lstStyle/>
+                    <a:p>
+                      <a:r>
+                        <a:rPr sz="1000" b="0" i="0">
+                          <a:solidFill>
+                            <a:srgbClr val="333333"/>
+                          </a:solidFill>
+                          <a:latin typeface="Calibri"/>
+                        </a:rPr>
+                        <a:t>Validar el rol y la propiedad del turno antes de aceptar el cambio.</a:t>
+                      </a:r>
+                    </a:p>
+                  </a:txBody>
+                  <a:tcPr>
+                    <a:solidFill>
+                      <a:srgbClr val="F2F2F2"/>
+                    </a:solidFill>
+                  </a:tcPr>
+                </a:tc>
+                <a:tc>
+                  <a:txBody>
+                    <a:bodyPr/>
+                    <a:lstStyle/>
+                    <a:p>
+                      <a:r>
+                        <a:rPr sz="1000" b="1" i="0">
+                          <a:solidFill>
+                            <a:srgbClr val="333333"/>
+                          </a:solidFill>
+                          <a:latin typeface="Calibri"/>
+                        </a:rPr>
+                        <a:t>Caja</a:t>
+                      </a:r>
+                      <a:r>
+                        <a:rPr sz="1000" b="0" i="0">
+                          <a:solidFill>
+                            <a:srgbClr val="333333"/>
+                          </a:solidFill>
+                          <a:latin typeface="Calibri"/>
+                        </a:rPr>
+                        <a:t> «API de turnos»</a:t>
+                      </a:r>
+                    </a:p>
+                  </a:txBody>
+                  <a:tcPr>
+                    <a:solidFill>
+                      <a:srgbClr val="F2F2F2"/>
+                    </a:solidFill>
+                  </a:tcPr>
+                </a:tc>
+              </a:tr>
+              <a:tr h="384048">
+                <a:tc>
+                  <a:txBody>
+                    <a:bodyPr/>
+                    <a:lstStyle/>
+                    <a:p>
+                      <a:r>
+                        <a:rPr sz="1000" b="1" i="0">
+                          <a:solidFill>
+                            <a:srgbClr val="333333"/>
+                          </a:solidFill>
+                          <a:latin typeface="Calibri"/>
+                        </a:rPr>
+                        <a:t>I ·</a:t>
+                      </a:r>
+                      <a:r>
+                        <a:rPr sz="1000" b="0" i="0">
+                          <a:solidFill>
+                            <a:srgbClr val="333333"/>
+                          </a:solidFill>
+                          <a:latin typeface="Calibri"/>
+                        </a:rPr>
+                        <a:t> La </a:t>
+                      </a:r>
+                      <a:r>
+                        <a:rPr sz="1000" b="1" i="0">
+                          <a:solidFill>
+                            <a:srgbClr val="333333"/>
+                          </a:solidFill>
+                          <a:latin typeface="Calibri"/>
+                        </a:rPr>
+                        <a:t>llave del servicio de avisos</a:t>
+                      </a:r>
+                      <a:r>
+                        <a:rPr sz="1000" b="0" i="0">
+                          <a:solidFill>
+                            <a:srgbClr val="333333"/>
+                          </a:solidFill>
+                          <a:latin typeface="Calibri"/>
+                        </a:rPr>
+                        <a:t> queda dentro de la imagen del contenedor.</a:t>
+                      </a:r>
+                    </a:p>
+                  </a:txBody>
+                  <a:tcPr>
+                    <a:solidFill>
+                      <a:srgbClr val="FFFFFF"/>
+                    </a:solidFill>
+                  </a:tcPr>
+                </a:tc>
+                <a:tc>
+                  <a:txBody>
+                    <a:bodyPr/>
+                    <a:lstStyle/>
+                    <a:p>
+                      <a:r>
+                        <a:rPr sz="1000" b="0" i="0">
+                          <a:solidFill>
+                            <a:srgbClr val="333333"/>
+                          </a:solidFill>
+                          <a:latin typeface="Calibri"/>
+                        </a:rPr>
+                        <a:t>La llave vive en los «secrets» y entra como variable de entorno en ejecución.</a:t>
+                      </a:r>
+                    </a:p>
+                  </a:txBody>
+                  <a:tcPr>
+                    <a:solidFill>
+                      <a:srgbClr val="FFFFFF"/>
+                    </a:solidFill>
+                  </a:tcPr>
+                </a:tc>
+                <a:tc>
+                  <a:txBody>
+                    <a:bodyPr/>
+                    <a:lstStyle/>
+                    <a:p>
+                      <a:r>
+                        <a:rPr sz="1000" b="1" i="0">
+                          <a:solidFill>
+                            <a:srgbClr val="333333"/>
+                          </a:solidFill>
+                          <a:latin typeface="Calibri"/>
+                        </a:rPr>
+                        <a:t>Flecha</a:t>
+                      </a:r>
+                      <a:r>
+                        <a:rPr sz="1000" b="0" i="0">
+                          <a:solidFill>
+                            <a:srgbClr val="333333"/>
+                          </a:solidFill>
+                          <a:latin typeface="Calibri"/>
+                        </a:rPr>
+                        <a:t> «API de turnos → Worker de avisos»</a:t>
+                      </a:r>
+                    </a:p>
+                  </a:txBody>
+                  <a:tcPr>
+                    <a:solidFill>
+                      <a:srgbClr val="FFFFFF"/>
+                    </a:solidFill>
+                  </a:tcPr>
+                </a:tc>
+              </a:tr>
+              <a:tr h="384048">
+                <a:tc>
+                  <a:txBody>
+                    <a:bodyPr/>
+                    <a:lstStyle/>
+                    <a:p>
+                      <a:r>
+                        <a:rPr sz="1000" b="1" i="0">
+                          <a:solidFill>
+                            <a:srgbClr val="333333"/>
+                          </a:solidFill>
+                          <a:latin typeface="Calibri"/>
+                        </a:rPr>
+                        <a:t>D ·</a:t>
+                      </a:r>
+                      <a:r>
+                        <a:rPr sz="1000" b="0" i="0">
+                          <a:solidFill>
+                            <a:srgbClr val="333333"/>
+                          </a:solidFill>
+                          <a:latin typeface="Calibri"/>
+                        </a:rPr>
+                        <a:t> Un script sin autenticar golpea «GET /turnos» mil veces por minuto y agota las conexiones.</a:t>
+                      </a:r>
+                    </a:p>
+                  </a:txBody>
+                  <a:tcPr>
+                    <a:solidFill>
+                      <a:srgbClr val="F2F2F2"/>
+                    </a:solidFill>
+                  </a:tcPr>
+                </a:tc>
+                <a:tc>
+                  <a:txBody>
+                    <a:bodyPr/>
+                    <a:lstStyle/>
+                    <a:p>
+                      <a:r>
+                        <a:rPr sz="1000" b="0" i="0">
+                          <a:solidFill>
+                            <a:srgbClr val="333333"/>
+                          </a:solidFill>
+                          <a:latin typeface="Calibri"/>
+                        </a:rPr>
+                        <a:t>Límite de tasa por identidad o por IP en el punto de entrada.</a:t>
+                      </a:r>
+                    </a:p>
+                  </a:txBody>
+                  <a:tcPr>
+                    <a:solidFill>
+                      <a:srgbClr val="F2F2F2"/>
+                    </a:solidFill>
+                  </a:tcPr>
+                </a:tc>
+                <a:tc>
+                  <a:txBody>
+                    <a:bodyPr/>
+                    <a:lstStyle/>
+                    <a:p>
+                      <a:r>
+                        <a:rPr sz="1000" b="1" i="0">
+                          <a:solidFill>
+                            <a:srgbClr val="333333"/>
+                          </a:solidFill>
+                          <a:latin typeface="Calibri"/>
+                        </a:rPr>
+                        <a:t>Caja</a:t>
+                      </a:r>
+                      <a:r>
+                        <a:rPr sz="1000" b="0" i="0">
+                          <a:solidFill>
+                            <a:srgbClr val="333333"/>
+                          </a:solidFill>
+                          <a:latin typeface="Calibri"/>
+                        </a:rPr>
+                        <a:t> «App web» (punto de entrada)</a:t>
+                      </a:r>
+                    </a:p>
+                  </a:txBody>
+                  <a:tcPr>
+                    <a:solidFill>
+                      <a:srgbClr val="F2F2F2"/>
+                    </a:solidFill>
+                  </a:tcPr>
+                </a:tc>
+              </a:tr>
+            </a:tbl>
+          </a:graphicData>
+        </a:graphic>
+      </p:graphicFrame>
+      <p:sp>
+        <p:nvSpPr>
+          <p:cNvPr id="6" name="TextBox 5"/>
           <p:cNvSpPr txBox="1"/>
           <p:nvPr/>
         </p:nvSpPr>
         <p:spPr>
           <a:xfrm>
-            <a:off x="457200" y="1170432"/>
-            <a:ext cx="11277295" cy="5230368"/>
+            <a:off x="457200" y="3794760"/>
+            <a:ext cx="11277295" cy="457200"/>
           </a:xfrm>
           <a:prstGeom prst="rect">
             <a:avLst/>
@@ -3602,137 +4098,21 @@
           </a:bodyPr>
           <a:lstStyle/>
           <a:p>
-            <a:pPr>
-              <a:spcAft>
-                <a:spcPts val="800"/>
-              </a:spcAft>
-            </a:pPr>
-            <a:r>
-              <a:rPr sz="1600" b="1" i="0">
-                <a:solidFill>
-                  <a:srgbClr val="333333"/>
-                </a:solidFill>
-                <a:latin typeface="Calibri"/>
-              </a:rPr>
-              <a:t>1.</a:t>
-            </a:r>
-            <a:r>
-              <a:rPr sz="1600" b="0" i="0">
-                <a:solidFill>
-                  <a:srgbClr val="333333"/>
-                </a:solidFill>
-                <a:latin typeface="Calibri"/>
-              </a:rPr>
-              <a:t> Paso 1: liste en la pregunta 1 cinco amenazas de SU dominio, cada una nombrando el actor o el dato concreto que pone en riesgo y el camino por el que ocurre; use STRIDE como guia de categorias y verifique que ninguna sea una frase de manual que sirva igual para cualquier sistema.</a:t>
-            </a:r>
-          </a:p>
-          <a:p>
-            <a:pPr>
-              <a:spcAft>
-                <a:spcPts val="800"/>
-              </a:spcAft>
-            </a:pPr>
-            <a:r>
-              <a:rPr sz="1600" b="0" i="0">
-                <a:solidFill>
-                  <a:srgbClr val="333333"/>
-                </a:solidFill>
-                <a:latin typeface="Calibri"/>
-              </a:rPr>
-              <a:t>–   </a:t>
-            </a:r>
-            <a:r>
-              <a:rPr sz="1600" b="1" i="0">
-                <a:solidFill>
-                  <a:srgbClr val="333333"/>
-                </a:solidFill>
-                <a:latin typeface="Calibri"/>
-              </a:rPr>
-              <a:t>2.</a:t>
-            </a:r>
-            <a:r>
-              <a:rPr sz="1600" b="0" i="0">
-                <a:solidFill>
-                  <a:srgbClr val="333333"/>
-                </a:solidFill>
-                <a:latin typeface="Calibri"/>
-              </a:rPr>
-              <a:t> Paso 2: complete en la pregunta 2 la tabla amenaza-control-donde, senalando para cada control la caja o la flecha concreta del C4 Containers o del Despliegue donde se ve; incluya el principio de menor privilegio aplicado a un componente, diciendo que deja de poder hacer.</a:t>
-            </a:r>
-          </a:p>
-          <a:p>
-            <a:pPr>
-              <a:spcAft>
-                <a:spcPts val="800"/>
-              </a:spcAft>
-            </a:pPr>
-            <a:r>
-              <a:rPr sz="1600" b="0" i="0">
-                <a:solidFill>
-                  <a:srgbClr val="333333"/>
-                </a:solidFill>
-                <a:latin typeface="Calibri"/>
-              </a:rPr>
-              <a:t>–   </a:t>
-            </a:r>
-            <a:r>
-              <a:rPr sz="1600" b="1" i="0">
-                <a:solidFill>
-                  <a:srgbClr val="333333"/>
-                </a:solidFill>
-                <a:latin typeface="Calibri"/>
-              </a:rPr>
-              <a:t>3.</a:t>
-            </a:r>
-            <a:r>
-              <a:rPr sz="1600" b="0" i="0">
-                <a:solidFill>
-                  <a:srgbClr val="333333"/>
-                </a:solidFill>
-                <a:latin typeface="Calibri"/>
-              </a:rPr>
-              <a:t> Paso 3: escriba en la pregunta 3 la politica de secretos respondiendo donde viven, quien los rota, cada cuanto y que esta prohibido, y cierre con el procedimiento ante una filtracion; verifique que su politica no admita secretos en el Dockerfile, el README ni el YAML en claro.</a:t>
-            </a:r>
-          </a:p>
-          <a:p>
-            <a:pPr>
-              <a:spcAft>
-                <a:spcPts val="800"/>
-              </a:spcAft>
-            </a:pPr>
-            <a:r>
-              <a:rPr sz="1600" b="0" i="0">
-                <a:solidFill>
-                  <a:srgbClr val="333333"/>
-                </a:solidFill>
-                <a:latin typeface="Calibri"/>
-              </a:rPr>
-              <a:t>–   </a:t>
-            </a:r>
-            <a:r>
-              <a:rPr sz="1600" b="1" i="0">
-                <a:solidFill>
-                  <a:srgbClr val="333333"/>
-                </a:solidFill>
-                <a:latin typeface="Calibri"/>
-              </a:rPr>
-              <a:t>4.</a:t>
-            </a:r>
-            <a:r>
-              <a:rPr sz="1600" b="0" i="0">
-                <a:solidFill>
-                  <a:srgbClr val="333333"/>
-                </a:solidFill>
-                <a:latin typeface="Calibri"/>
-              </a:rPr>
-              <a:t> Paso 4: guarde y continue. Esta actividad es una sola para las Clases 6, 7, 8 y 10 y se entrega completa al cierre del Corte 2: hoy resuelve las preguntas 1 a 3 y las 4 a 12 se resuelven en las clases siguientes.</a:t>
-            </a:r>
-          </a:p>
-        </p:txBody>
-      </p:sp>
-      <p:sp>
-        <p:nvSpPr>
-          <p:cNvPr id="6" name="TextBox 5"/>
+            <a:r>
+              <a:rPr sz="1100" b="0" i="1">
+                <a:solidFill>
+                  <a:srgbClr val="666666"/>
+                </a:solidFill>
+                <a:latin typeface="Calibri"/>
+              </a:rPr>
+              <a:t>Cuatro filas de ejemplo; el entregable pide cinco, sobre SU dominio. Una lista genérica de buenas prácticas no es un modelo de amenazas, y dos filas que dicen lo mismo con otras palabras cuentan como una.</a:t>
+            </a:r>
+          </a:p>
+        </p:txBody>
+      </p:sp>
+      <p:sp>
+        <p:nvSpPr>
+          <p:cNvPr id="7" name="TextBox 6"/>
           <p:cNvSpPr txBox="1"/>
           <p:nvPr/>
         </p:nvSpPr>
@@ -3906,7 +4286,7 @@
                 </a:solidFill>
                 <a:latin typeface="Calibri"/>
               </a:rPr>
-              <a:t>Para continuar (PI)</a:t>
+              <a:t>El secreto en la imagen: por qué borrarlo no sirve</a:t>
             </a:r>
           </a:p>
         </p:txBody>
@@ -3920,7 +4300,7 @@
         <p:spPr>
           <a:xfrm>
             <a:off x="457200" y="1261872"/>
-            <a:ext cx="11277295" cy="1051560"/>
+            <a:ext cx="11277295" cy="4773168"/>
           </a:xfrm>
           <a:prstGeom prst="roundRect">
             <a:avLst>
@@ -3928,7 +4308,7 @@
             </a:avLst>
           </a:prstGeom>
           <a:solidFill>
-            <a:srgbClr val="E8F4FA"/>
+            <a:srgbClr val="1E2A38"/>
           </a:solidFill>
           <a:ln>
             <a:noFill/>
@@ -3965,13 +4345,13 @@
         <p:spPr>
           <a:xfrm>
             <a:off x="457200" y="1261872"/>
-            <a:ext cx="128016" cy="1051560"/>
+            <a:ext cx="11277295" cy="320040"/>
           </a:xfrm>
           <a:prstGeom prst="rect">
             <a:avLst/>
           </a:prstGeom>
           <a:solidFill>
-            <a:srgbClr val="269CCB"/>
+            <a:srgbClr val="095292"/>
           </a:solidFill>
           <a:ln>
             <a:noFill/>
@@ -4007,8 +4387,40 @@
         </p:nvSpPr>
         <p:spPr>
           <a:xfrm>
-            <a:off x="777240" y="1399031"/>
-            <a:ext cx="10774375" cy="822959"/>
+            <a:off x="685800" y="1307592"/>
+            <a:ext cx="10820095" cy="256032"/>
+          </a:xfrm>
+          <a:prstGeom prst="rect">
+            <a:avLst/>
+          </a:prstGeom>
+          <a:noFill/>
+        </p:spPr>
+        <p:txBody>
+          <a:bodyPr wrap="square" anchor="ctr"/>
+          <a:lstStyle/>
+          <a:p>
+            <a:r>
+              <a:rPr sz="1000" b="1" i="0">
+                <a:solidFill>
+                  <a:srgbClr val="269CCB"/>
+                </a:solidFill>
+                <a:latin typeface="Calibri"/>
+              </a:rPr>
+              <a:t>● ● ●</a:t>
+            </a:r>
+          </a:p>
+        </p:txBody>
+      </p:sp>
+      <p:sp>
+        <p:nvSpPr>
+          <p:cNvPr id="8" name="TextBox 7"/>
+          <p:cNvSpPr txBox="1"/>
+          <p:nvPr/>
+        </p:nvSpPr>
+        <p:spPr>
+          <a:xfrm>
+            <a:off x="777240" y="1719072"/>
+            <a:ext cx="10637215" cy="4133087"/>
           </a:xfrm>
           <a:prstGeom prst="rect">
             <a:avLst/>
@@ -4021,132 +4433,193 @@
           </a:bodyPr>
           <a:lstStyle/>
           <a:p>
-            <a:r>
-              <a:rPr sz="1200" b="1" i="0">
-                <a:solidFill>
-                  <a:srgbClr val="269CCB"/>
-                </a:solidFill>
-                <a:latin typeface="Calibri"/>
-              </a:rPr>
-              <a:t>Info</a:t>
-            </a:r>
-          </a:p>
-          <a:p>
             <a:pPr>
-              <a:spcBef>
+              <a:spcAft>
                 <a:spcPts val="400"/>
-              </a:spcBef>
+              </a:spcAft>
             </a:pPr>
             <a:r>
               <a:rPr sz="1400" b="0" i="0">
                 <a:solidFill>
-                  <a:srgbClr val="333333"/>
-                </a:solidFill>
-                <a:latin typeface="Calibri"/>
-              </a:rPr>
-              <a:t>Entregable: Sección Seguridad PI: 5 amenazas STRIDE-lite + controles + secretos/CI</a:t>
-            </a:r>
-          </a:p>
-        </p:txBody>
-      </p:sp>
-      <p:sp>
-        <p:nvSpPr>
-          <p:cNvPr id="8" name="Rounded Rectangle 7"/>
-          <p:cNvSpPr/>
-          <p:nvPr/>
-        </p:nvSpPr>
-        <p:spPr>
-          <a:xfrm>
-            <a:off x="457200" y="2478024"/>
-            <a:ext cx="11277295" cy="1051560"/>
-          </a:xfrm>
-          <a:prstGeom prst="roundRect">
-            <a:avLst>
-              <a:gd name="adj" fmla="val 12000"/>
-            </a:avLst>
-          </a:prstGeom>
-          <a:solidFill>
-            <a:srgbClr val="FFF8E1"/>
-          </a:solidFill>
-          <a:ln>
-            <a:noFill/>
-          </a:ln>
-        </p:spPr>
-        <p:style>
-          <a:lnRef idx="1">
-            <a:schemeClr val="accent1"/>
-          </a:lnRef>
-          <a:fillRef idx="3">
-            <a:schemeClr val="accent1"/>
-          </a:fillRef>
-          <a:effectRef idx="2">
-            <a:schemeClr val="accent1"/>
-          </a:effectRef>
-          <a:fontRef idx="minor">
-            <a:schemeClr val="lt1"/>
-          </a:fontRef>
-        </p:style>
-        <p:txBody>
-          <a:bodyPr rtlCol="0" anchor="ctr"/>
-          <a:lstStyle/>
-          <a:p>
-            <a:pPr algn="ctr"/>
-          </a:p>
-        </p:txBody>
-      </p:sp>
-      <p:sp>
-        <p:nvSpPr>
-          <p:cNvPr id="9" name="Rectangle 8"/>
-          <p:cNvSpPr/>
-          <p:nvPr/>
-        </p:nvSpPr>
-        <p:spPr>
-          <a:xfrm>
-            <a:off x="457200" y="2478024"/>
-            <a:ext cx="128016" cy="1051560"/>
-          </a:xfrm>
-          <a:prstGeom prst="rect">
-            <a:avLst/>
-          </a:prstGeom>
-          <a:solidFill>
-            <a:srgbClr val="FFD000"/>
-          </a:solidFill>
-          <a:ln>
-            <a:noFill/>
-          </a:ln>
-        </p:spPr>
-        <p:style>
-          <a:lnRef idx="1">
-            <a:schemeClr val="accent1"/>
-          </a:lnRef>
-          <a:fillRef idx="3">
-            <a:schemeClr val="accent1"/>
-          </a:fillRef>
-          <a:effectRef idx="2">
-            <a:schemeClr val="accent1"/>
-          </a:effectRef>
-          <a:fontRef idx="minor">
-            <a:schemeClr val="lt1"/>
-          </a:fontRef>
-        </p:style>
-        <p:txBody>
-          <a:bodyPr rtlCol="0" anchor="ctr"/>
-          <a:lstStyle/>
-          <a:p>
-            <a:pPr algn="ctr"/>
-          </a:p>
-        </p:txBody>
-      </p:sp>
-      <p:sp>
-        <p:nvSpPr>
-          <p:cNvPr id="10" name="TextBox 9"/>
+                  <a:srgbClr val="FFFFFF"/>
+                </a:solidFill>
+                <a:latin typeface="Calibri"/>
+              </a:rPr>
+              <a:t># Dockerfile — el anti-patron</a:t>
+            </a:r>
+          </a:p>
+          <a:p>
+            <a:pPr>
+              <a:spcAft>
+                <a:spcPts val="400"/>
+              </a:spcAft>
+            </a:pPr>
+            <a:r>
+              <a:rPr sz="1400" b="0" i="0">
+                <a:solidFill>
+                  <a:srgbClr val="FFFFFF"/>
+                </a:solidFill>
+                <a:latin typeface="Calibri"/>
+              </a:rPr>
+              <a:t>ENV CORREO_API_KEY="sk_live_9f3a...c21"   # &lt;- queda en la capa</a:t>
+            </a:r>
+          </a:p>
+          <a:p>
+            <a:pPr>
+              <a:spcAft>
+                <a:spcPts val="400"/>
+              </a:spcAft>
+            </a:pPr>
+            <a:r>
+              <a:rPr sz="1400" b="0" i="0">
+                <a:solidFill>
+                  <a:srgbClr val="FFFFFF"/>
+                </a:solidFill>
+                <a:latin typeface="Calibri"/>
+              </a:rPr>
+              <a:t>RUN rm -f /app/.env                       # &lt;- NO la borra: la tapa</a:t>
+            </a:r>
+          </a:p>
+          <a:p>
+            <a:pPr>
+              <a:spcAft>
+                <a:spcPts val="400"/>
+              </a:spcAft>
+            </a:pPr>
+            <a:r>
+              <a:rPr sz="1400" b="0" i="0">
+                <a:solidFill>
+                  <a:srgbClr val="FFFFFF"/>
+                </a:solidFill>
+                <a:latin typeface="Calibri"/>
+              </a:rPr>
+              <a:t/>
+            </a:r>
+          </a:p>
+          <a:p>
+            <a:pPr>
+              <a:spcAft>
+                <a:spcPts val="400"/>
+              </a:spcAft>
+            </a:pPr>
+            <a:r>
+              <a:rPr sz="1400" b="0" i="0">
+                <a:solidFill>
+                  <a:srgbClr val="FFFFFF"/>
+                </a:solidFill>
+                <a:latin typeface="Calibri"/>
+              </a:rPr>
+              <a:t>$ docker history --format '{{.ID}} · {{.CreatedBy}} · {{.Size}}' cloudlite-api:0.1.0</a:t>
+            </a:r>
+          </a:p>
+          <a:p>
+            <a:pPr>
+              <a:spcAft>
+                <a:spcPts val="400"/>
+              </a:spcAft>
+            </a:pPr>
+            <a:r>
+              <a:rPr sz="1400" b="0" i="0">
+                <a:solidFill>
+                  <a:srgbClr val="FFFFFF"/>
+                </a:solidFill>
+                <a:latin typeface="Calibri"/>
+              </a:rPr>
+              <a:t>a91d0c33 · RUN rm -f /app/.env · 12kB</a:t>
+            </a:r>
+          </a:p>
+          <a:p>
+            <a:pPr>
+              <a:spcAft>
+                <a:spcPts val="400"/>
+              </a:spcAft>
+            </a:pPr>
+            <a:r>
+              <a:rPr sz="1400" b="0" i="0">
+                <a:solidFill>
+                  <a:srgbClr val="FFFFFF"/>
+                </a:solidFill>
+                <a:latin typeface="Calibri"/>
+              </a:rPr>
+              <a:t>b7c1e2f4 · ENV CORREO_API_KEY=sk_live_9f3a...c21 · 0B</a:t>
+            </a:r>
+          </a:p>
+          <a:p>
+            <a:pPr>
+              <a:spcAft>
+                <a:spcPts val="400"/>
+              </a:spcAft>
+            </a:pPr>
+            <a:r>
+              <a:rPr sz="1400" b="0" i="0">
+                <a:solidFill>
+                  <a:srgbClr val="FFFFFF"/>
+                </a:solidFill>
+                <a:latin typeface="Calibri"/>
+              </a:rPr>
+              <a:t/>
+            </a:r>
+          </a:p>
+          <a:p>
+            <a:pPr>
+              <a:spcAft>
+                <a:spcPts val="400"/>
+              </a:spcAft>
+            </a:pPr>
+            <a:r>
+              <a:rPr sz="1400" b="0" i="0">
+                <a:solidFill>
+                  <a:srgbClr val="FFFFFF"/>
+                </a:solidFill>
+                <a:latin typeface="Calibri"/>
+              </a:rPr>
+              <a:t>La capa de abajo sigue ahí: el «rm» de la de arriba no la elimina.</a:t>
+            </a:r>
+          </a:p>
+          <a:p>
+            <a:pPr>
+              <a:spcAft>
+                <a:spcPts val="400"/>
+              </a:spcAft>
+            </a:pPr>
+            <a:r>
+              <a:rPr sz="1400" b="0" i="0">
+                <a:solidFill>
+                  <a:srgbClr val="FFFFFF"/>
+                </a:solidFill>
+                <a:latin typeface="Calibri"/>
+              </a:rPr>
+              <a:t>Cualquiera que tenga la imagen lee la llave con este mismo comando.</a:t>
+            </a:r>
+          </a:p>
+          <a:p>
+            <a:pPr>
+              <a:spcAft>
+                <a:spcPts val="400"/>
+              </a:spcAft>
+            </a:pPr>
+            <a:r>
+              <a:rPr sz="1400" b="0" i="0">
+                <a:solidFill>
+                  <a:srgbClr val="FFFFFF"/>
+                </a:solidFill>
+                <a:latin typeface="Calibri"/>
+              </a:rPr>
+              <a:t>Lo mismo con Git: el commit borrado sigue en el historial y en cada clon.</a:t>
+            </a:r>
+          </a:p>
+        </p:txBody>
+      </p:sp>
+      <p:sp>
+        <p:nvSpPr>
+          <p:cNvPr id="9" name="TextBox 8"/>
           <p:cNvSpPr txBox="1"/>
           <p:nvPr/>
         </p:nvSpPr>
         <p:spPr>
           <a:xfrm>
-            <a:off x="777240" y="2615184"/>
-            <a:ext cx="10774375" cy="822959"/>
+            <a:off x="457200" y="6080760"/>
+            <a:ext cx="11277295" cy="320040"/>
           </a:xfrm>
           <a:prstGeom prst="rect">
             <a:avLst/>
@@ -4159,175 +4632,40 @@
           </a:bodyPr>
           <a:lstStyle/>
           <a:p>
-            <a:r>
-              <a:rPr sz="1200" b="1" i="0">
-                <a:solidFill>
-                  <a:srgbClr val="FFD000"/>
-                </a:solidFill>
-                <a:latin typeface="Calibri"/>
-              </a:rPr>
-              <a:t>Aclaración</a:t>
-            </a:r>
-          </a:p>
-          <a:p>
-            <a:pPr>
-              <a:spcBef>
-                <a:spcPts val="400"/>
-              </a:spcBef>
-            </a:pPr>
-            <a:r>
-              <a:rPr sz="1400" b="0" i="0">
-                <a:solidFill>
-                  <a:srgbClr val="333333"/>
-                </a:solidFill>
-                <a:latin typeface="Calibri"/>
-              </a:rPr>
-              <a:t>Subir evidencias al paquete CloudLite (Drive/repo) y a ExamLab (https://uniaj.examlab.workers.dev/) domingo 23:59.</a:t>
-            </a:r>
-          </a:p>
-        </p:txBody>
-      </p:sp>
-      <p:sp>
-        <p:nvSpPr>
-          <p:cNvPr id="11" name="Rounded Rectangle 10"/>
-          <p:cNvSpPr/>
-          <p:nvPr/>
-        </p:nvSpPr>
-        <p:spPr>
-          <a:xfrm>
-            <a:off x="457200" y="3694176"/>
-            <a:ext cx="11277295" cy="1051560"/>
-          </a:xfrm>
-          <a:prstGeom prst="roundRect">
-            <a:avLst>
-              <a:gd name="adj" fmla="val 12000"/>
-            </a:avLst>
-          </a:prstGeom>
-          <a:solidFill>
-            <a:srgbClr val="FBE4E4"/>
-          </a:solidFill>
-          <a:ln>
-            <a:noFill/>
-          </a:ln>
-        </p:spPr>
-        <p:style>
-          <a:lnRef idx="1">
-            <a:schemeClr val="accent1"/>
-          </a:lnRef>
-          <a:fillRef idx="3">
-            <a:schemeClr val="accent1"/>
-          </a:fillRef>
-          <a:effectRef idx="2">
-            <a:schemeClr val="accent1"/>
-          </a:effectRef>
-          <a:fontRef idx="minor">
-            <a:schemeClr val="lt1"/>
-          </a:fontRef>
-        </p:style>
-        <p:txBody>
-          <a:bodyPr rtlCol="0" anchor="ctr"/>
-          <a:lstStyle/>
-          <a:p>
             <a:pPr algn="ctr"/>
-          </a:p>
-        </p:txBody>
-      </p:sp>
-      <p:sp>
-        <p:nvSpPr>
-          <p:cNvPr id="12" name="Rectangle 11"/>
-          <p:cNvSpPr/>
-          <p:nvPr/>
-        </p:nvSpPr>
-        <p:spPr>
-          <a:xfrm>
-            <a:off x="457200" y="3694176"/>
-            <a:ext cx="128016" cy="1051560"/>
-          </a:xfrm>
-          <a:prstGeom prst="rect">
-            <a:avLst/>
-          </a:prstGeom>
-          <a:solidFill>
-            <a:srgbClr val="A02030"/>
-          </a:solidFill>
-          <a:ln>
-            <a:noFill/>
-          </a:ln>
-        </p:spPr>
-        <p:style>
-          <a:lnRef idx="1">
-            <a:schemeClr val="accent1"/>
-          </a:lnRef>
-          <a:fillRef idx="3">
-            <a:schemeClr val="accent1"/>
-          </a:fillRef>
-          <a:effectRef idx="2">
-            <a:schemeClr val="accent1"/>
-          </a:effectRef>
-          <a:fontRef idx="minor">
-            <a:schemeClr val="lt1"/>
-          </a:fontRef>
-        </p:style>
-        <p:txBody>
-          <a:bodyPr rtlCol="0" anchor="ctr"/>
-          <a:lstStyle/>
-          <a:p>
-            <a:pPr algn="ctr"/>
-          </a:p>
-        </p:txBody>
-      </p:sp>
-      <p:sp>
-        <p:nvSpPr>
-          <p:cNvPr id="13" name="TextBox 12"/>
-          <p:cNvSpPr txBox="1"/>
-          <p:nvPr/>
-        </p:nvSpPr>
-        <p:spPr>
-          <a:xfrm>
-            <a:off x="777240" y="3831336"/>
-            <a:ext cx="10774375" cy="822959"/>
-          </a:xfrm>
-          <a:prstGeom prst="rect">
-            <a:avLst/>
-          </a:prstGeom>
-          <a:noFill/>
-        </p:spPr>
-        <p:txBody>
-          <a:bodyPr wrap="square">
-            <a:spAutoFit/>
-          </a:bodyPr>
-          <a:lstStyle/>
-          <a:p>
-            <a:r>
-              <a:rPr sz="1200" b="1" i="0">
-                <a:solidFill>
-                  <a:srgbClr val="A02030"/>
-                </a:solidFill>
-                <a:latin typeface="Calibri"/>
-              </a:rPr>
-              <a:t>Atención</a:t>
-            </a:r>
-          </a:p>
-          <a:p>
-            <a:pPr>
-              <a:spcBef>
-                <a:spcPts val="400"/>
-              </a:spcBef>
-            </a:pPr>
-            <a:r>
-              <a:rPr sz="1400" b="0" i="0">
-                <a:solidFill>
-                  <a:srgbClr val="333333"/>
-                </a:solidFill>
-                <a:latin typeface="Calibri"/>
-              </a:rPr>
-              <a:t>Sin cloud de pago ni instalaciones obligatorias de hipervisores/Docker Desktop.</a:t>
-            </a:r>
-          </a:p>
-        </p:txBody>
-      </p:sp>
-      <p:sp>
-        <p:nvSpPr>
-          <p:cNvPr id="14" name="TextBox 13"/>
+            <a:r>
+              <a:rPr sz="1200" b="0" i="1">
+                <a:solidFill>
+                  <a:srgbClr val="666666"/>
+                </a:solidFill>
+                <a:latin typeface="Calibri"/>
+              </a:rPr>
+              <a:t>Por eso el primer paso ante una filtración es </a:t>
+            </a:r>
+            <a:r>
+              <a:rPr sz="1200" b="1" i="1">
+                <a:solidFill>
+                  <a:srgbClr val="666666"/>
+                </a:solidFill>
+                <a:latin typeface="Calibri"/>
+              </a:rPr>
+              <a:t>rotar</a:t>
+            </a:r>
+            <a:r>
+              <a:rPr sz="1200" b="0" i="1">
+                <a:solidFill>
+                  <a:srgbClr val="666666"/>
+                </a:solidFill>
+                <a:latin typeface="Calibri"/>
+              </a:rPr>
+              <a:t> la credencial, no borrar el commit.</a:t>
+            </a:r>
+          </a:p>
+        </p:txBody>
+      </p:sp>
+      <p:sp>
+        <p:nvSpPr>
+          <p:cNvPr id="10" name="TextBox 9"/>
           <p:cNvSpPr txBox="1"/>
           <p:nvPr/>
         </p:nvSpPr>
@@ -4395,6 +4733,1759 @@
         <p:spPr>
           <a:xfrm>
             <a:off x="0" y="0"/>
+            <a:ext cx="12191695" cy="1170432"/>
+          </a:xfrm>
+          <a:prstGeom prst="rect">
+            <a:avLst/>
+          </a:prstGeom>
+          <a:solidFill>
+            <a:srgbClr val="095292"/>
+          </a:solidFill>
+          <a:ln>
+            <a:noFill/>
+          </a:ln>
+        </p:spPr>
+        <p:style>
+          <a:lnRef idx="1">
+            <a:schemeClr val="accent1"/>
+          </a:lnRef>
+          <a:fillRef idx="3">
+            <a:schemeClr val="accent1"/>
+          </a:fillRef>
+          <a:effectRef idx="2">
+            <a:schemeClr val="accent1"/>
+          </a:effectRef>
+          <a:fontRef idx="minor">
+            <a:schemeClr val="lt1"/>
+          </a:fontRef>
+        </p:style>
+        <p:txBody>
+          <a:bodyPr rtlCol="0" anchor="ctr"/>
+          <a:lstStyle/>
+          <a:p>
+            <a:pPr algn="ctr"/>
+          </a:p>
+        </p:txBody>
+      </p:sp>
+      <p:sp>
+        <p:nvSpPr>
+          <p:cNvPr id="3" name="Rectangle 2"/>
+          <p:cNvSpPr/>
+          <p:nvPr/>
+        </p:nvSpPr>
+        <p:spPr>
+          <a:xfrm>
+            <a:off x="0" y="1170432"/>
+            <a:ext cx="12191695" cy="41148"/>
+          </a:xfrm>
+          <a:prstGeom prst="rect">
+            <a:avLst/>
+          </a:prstGeom>
+          <a:solidFill>
+            <a:srgbClr val="FFD000"/>
+          </a:solidFill>
+          <a:ln>
+            <a:noFill/>
+          </a:ln>
+        </p:spPr>
+        <p:style>
+          <a:lnRef idx="1">
+            <a:schemeClr val="accent1"/>
+          </a:lnRef>
+          <a:fillRef idx="3">
+            <a:schemeClr val="accent1"/>
+          </a:fillRef>
+          <a:effectRef idx="2">
+            <a:schemeClr val="accent1"/>
+          </a:effectRef>
+          <a:fontRef idx="minor">
+            <a:schemeClr val="lt1"/>
+          </a:fontRef>
+        </p:style>
+        <p:txBody>
+          <a:bodyPr rtlCol="0" anchor="ctr"/>
+          <a:lstStyle/>
+          <a:p>
+            <a:pPr algn="ctr"/>
+          </a:p>
+        </p:txBody>
+      </p:sp>
+      <p:sp>
+        <p:nvSpPr>
+          <p:cNvPr id="4" name="TextBox 3"/>
+          <p:cNvSpPr txBox="1"/>
+          <p:nvPr/>
+        </p:nvSpPr>
+        <p:spPr>
+          <a:xfrm>
+            <a:off x="457200" y="164592"/>
+            <a:ext cx="11277295" cy="384048"/>
+          </a:xfrm>
+          <a:prstGeom prst="rect">
+            <a:avLst/>
+          </a:prstGeom>
+          <a:noFill/>
+        </p:spPr>
+        <p:txBody>
+          <a:bodyPr wrap="square">
+            <a:spAutoFit/>
+          </a:bodyPr>
+          <a:lstStyle/>
+          <a:p>
+            <a:r>
+              <a:rPr sz="2600" b="1" i="0">
+                <a:solidFill>
+                  <a:srgbClr val="FFFFFF"/>
+                </a:solidFill>
+                <a:latin typeface="Calibri"/>
+              </a:rPr>
+              <a:t>Herramientas de hoy</a:t>
+            </a:r>
+          </a:p>
+        </p:txBody>
+      </p:sp>
+      <p:sp>
+        <p:nvSpPr>
+          <p:cNvPr id="5" name="TextBox 4"/>
+          <p:cNvSpPr txBox="1"/>
+          <p:nvPr/>
+        </p:nvSpPr>
+        <p:spPr>
+          <a:xfrm>
+            <a:off x="457200" y="566928"/>
+            <a:ext cx="11277295" cy="411480"/>
+          </a:xfrm>
+          <a:prstGeom prst="rect">
+            <a:avLst/>
+          </a:prstGeom>
+          <a:noFill/>
+        </p:spPr>
+        <p:txBody>
+          <a:bodyPr wrap="square">
+            <a:spAutoFit/>
+          </a:bodyPr>
+          <a:lstStyle/>
+          <a:p>
+            <a:r>
+              <a:rPr sz="1400" b="0" i="0">
+                <a:solidFill>
+                  <a:srgbClr val="B8D8EE"/>
+                </a:solidFill>
+                <a:latin typeface="Calibri"/>
+              </a:rPr>
+              <a:t>Gratis · navegador o free tier · sin cuenta de pago</a:t>
+            </a:r>
+          </a:p>
+        </p:txBody>
+      </p:sp>
+      <p:sp>
+        <p:nvSpPr>
+          <p:cNvPr id="6" name="Rounded Rectangle 5"/>
+          <p:cNvSpPr/>
+          <p:nvPr/>
+        </p:nvSpPr>
+        <p:spPr>
+          <a:xfrm>
+            <a:off x="457200" y="1591056"/>
+            <a:ext cx="3624986" cy="2331720"/>
+          </a:xfrm>
+          <a:prstGeom prst="roundRect">
+            <a:avLst>
+              <a:gd name="adj" fmla="val 12000"/>
+            </a:avLst>
+          </a:prstGeom>
+          <a:solidFill>
+            <a:srgbClr val="F2F2F2"/>
+          </a:solidFill>
+          <a:ln>
+            <a:noFill/>
+          </a:ln>
+        </p:spPr>
+        <p:style>
+          <a:lnRef idx="1">
+            <a:schemeClr val="accent1"/>
+          </a:lnRef>
+          <a:fillRef idx="3">
+            <a:schemeClr val="accent1"/>
+          </a:fillRef>
+          <a:effectRef idx="2">
+            <a:schemeClr val="accent1"/>
+          </a:effectRef>
+          <a:fontRef idx="minor">
+            <a:schemeClr val="lt1"/>
+          </a:fontRef>
+        </p:style>
+        <p:txBody>
+          <a:bodyPr rtlCol="0" anchor="ctr"/>
+          <a:lstStyle/>
+          <a:p>
+            <a:pPr algn="ctr"/>
+          </a:p>
+        </p:txBody>
+      </p:sp>
+      <p:sp>
+        <p:nvSpPr>
+          <p:cNvPr id="7" name="Rectangle 6"/>
+          <p:cNvSpPr/>
+          <p:nvPr/>
+        </p:nvSpPr>
+        <p:spPr>
+          <a:xfrm>
+            <a:off x="457200" y="1591056"/>
+            <a:ext cx="3624986" cy="64008"/>
+          </a:xfrm>
+          <a:prstGeom prst="rect">
+            <a:avLst/>
+          </a:prstGeom>
+          <a:solidFill>
+            <a:srgbClr val="095292"/>
+          </a:solidFill>
+          <a:ln>
+            <a:noFill/>
+          </a:ln>
+        </p:spPr>
+        <p:style>
+          <a:lnRef idx="1">
+            <a:schemeClr val="accent1"/>
+          </a:lnRef>
+          <a:fillRef idx="3">
+            <a:schemeClr val="accent1"/>
+          </a:fillRef>
+          <a:effectRef idx="2">
+            <a:schemeClr val="accent1"/>
+          </a:effectRef>
+          <a:fontRef idx="minor">
+            <a:schemeClr val="lt1"/>
+          </a:fontRef>
+        </p:style>
+        <p:txBody>
+          <a:bodyPr rtlCol="0" anchor="ctr"/>
+          <a:lstStyle/>
+          <a:p>
+            <a:pPr algn="ctr"/>
+          </a:p>
+        </p:txBody>
+      </p:sp>
+      <p:sp>
+        <p:nvSpPr>
+          <p:cNvPr id="8" name="Rectangle 7"/>
+          <p:cNvSpPr/>
+          <p:nvPr/>
+        </p:nvSpPr>
+        <p:spPr>
+          <a:xfrm>
+            <a:off x="457200" y="1655064"/>
+            <a:ext cx="3624986" cy="27432"/>
+          </a:xfrm>
+          <a:prstGeom prst="rect">
+            <a:avLst/>
+          </a:prstGeom>
+          <a:solidFill>
+            <a:srgbClr val="FFD000"/>
+          </a:solidFill>
+          <a:ln>
+            <a:noFill/>
+          </a:ln>
+        </p:spPr>
+        <p:style>
+          <a:lnRef idx="1">
+            <a:schemeClr val="accent1"/>
+          </a:lnRef>
+          <a:fillRef idx="3">
+            <a:schemeClr val="accent1"/>
+          </a:fillRef>
+          <a:effectRef idx="2">
+            <a:schemeClr val="accent1"/>
+          </a:effectRef>
+          <a:fontRef idx="minor">
+            <a:schemeClr val="lt1"/>
+          </a:fontRef>
+        </p:style>
+        <p:txBody>
+          <a:bodyPr rtlCol="0" anchor="ctr"/>
+          <a:lstStyle/>
+          <a:p>
+            <a:pPr algn="ctr"/>
+          </a:p>
+        </p:txBody>
+      </p:sp>
+      <p:pic>
+        <p:nvPicPr>
+          <p:cNvPr id="9" name="Picture 8" descr="google_docs.png"/>
+          <p:cNvPicPr>
+            <a:picLocks noChangeAspect="1"/>
+          </p:cNvPicPr>
+          <p:nvPr/>
+        </p:nvPicPr>
+        <p:blipFill>
+          <a:blip r:embed="rId2"/>
+          <a:stretch>
+            <a:fillRect/>
+          </a:stretch>
+        </p:blipFill>
+        <p:spPr>
+          <a:xfrm>
+            <a:off x="1643329" y="1847087"/>
+            <a:ext cx="1252728" cy="1252728"/>
+          </a:xfrm>
+          <a:prstGeom prst="rect">
+            <a:avLst/>
+          </a:prstGeom>
+        </p:spPr>
+      </p:pic>
+      <p:sp>
+        <p:nvSpPr>
+          <p:cNvPr id="10" name="TextBox 9"/>
+          <p:cNvSpPr txBox="1"/>
+          <p:nvPr/>
+        </p:nvSpPr>
+        <p:spPr>
+          <a:xfrm>
+            <a:off x="530352" y="3191256"/>
+            <a:ext cx="3478682" cy="621792"/>
+          </a:xfrm>
+          <a:prstGeom prst="rect">
+            <a:avLst/>
+          </a:prstGeom>
+          <a:noFill/>
+        </p:spPr>
+        <p:txBody>
+          <a:bodyPr wrap="square" anchor="t"/>
+          <a:lstStyle/>
+          <a:p>
+            <a:pPr algn="ctr"/>
+            <a:r>
+              <a:rPr sz="1300" b="1" i="0">
+                <a:solidFill>
+                  <a:srgbClr val="095292"/>
+                </a:solidFill>
+                <a:latin typeface="Calibri"/>
+              </a:rPr>
+              <a:t>Google Docs</a:t>
+            </a:r>
+          </a:p>
+          <a:p>
+            <a:pPr algn="ctr">
+              <a:spcBef>
+                <a:spcPts val="200"/>
+              </a:spcBef>
+            </a:pPr>
+            <a:r>
+              <a:rPr sz="1000" b="0" i="0">
+                <a:solidFill>
+                  <a:srgbClr val="666666"/>
+                </a:solidFill>
+                <a:latin typeface="Calibri"/>
+              </a:rPr>
+              <a:t>Tabla STRIDE y politica</a:t>
+            </a:r>
+          </a:p>
+        </p:txBody>
+      </p:sp>
+      <p:sp>
+        <p:nvSpPr>
+          <p:cNvPr id="11" name="Rounded Rectangle 10"/>
+          <p:cNvSpPr/>
+          <p:nvPr/>
+        </p:nvSpPr>
+        <p:spPr>
+          <a:xfrm>
+            <a:off x="4283354" y="1591056"/>
+            <a:ext cx="3624986" cy="2331720"/>
+          </a:xfrm>
+          <a:prstGeom prst="roundRect">
+            <a:avLst>
+              <a:gd name="adj" fmla="val 12000"/>
+            </a:avLst>
+          </a:prstGeom>
+          <a:solidFill>
+            <a:srgbClr val="F2F2F2"/>
+          </a:solidFill>
+          <a:ln>
+            <a:noFill/>
+          </a:ln>
+        </p:spPr>
+        <p:style>
+          <a:lnRef idx="1">
+            <a:schemeClr val="accent1"/>
+          </a:lnRef>
+          <a:fillRef idx="3">
+            <a:schemeClr val="accent1"/>
+          </a:fillRef>
+          <a:effectRef idx="2">
+            <a:schemeClr val="accent1"/>
+          </a:effectRef>
+          <a:fontRef idx="minor">
+            <a:schemeClr val="lt1"/>
+          </a:fontRef>
+        </p:style>
+        <p:txBody>
+          <a:bodyPr rtlCol="0" anchor="ctr"/>
+          <a:lstStyle/>
+          <a:p>
+            <a:pPr algn="ctr"/>
+          </a:p>
+        </p:txBody>
+      </p:sp>
+      <p:sp>
+        <p:nvSpPr>
+          <p:cNvPr id="12" name="Rectangle 11"/>
+          <p:cNvSpPr/>
+          <p:nvPr/>
+        </p:nvSpPr>
+        <p:spPr>
+          <a:xfrm>
+            <a:off x="4283354" y="1591056"/>
+            <a:ext cx="3624986" cy="64008"/>
+          </a:xfrm>
+          <a:prstGeom prst="rect">
+            <a:avLst/>
+          </a:prstGeom>
+          <a:solidFill>
+            <a:srgbClr val="095292"/>
+          </a:solidFill>
+          <a:ln>
+            <a:noFill/>
+          </a:ln>
+        </p:spPr>
+        <p:style>
+          <a:lnRef idx="1">
+            <a:schemeClr val="accent1"/>
+          </a:lnRef>
+          <a:fillRef idx="3">
+            <a:schemeClr val="accent1"/>
+          </a:fillRef>
+          <a:effectRef idx="2">
+            <a:schemeClr val="accent1"/>
+          </a:effectRef>
+          <a:fontRef idx="minor">
+            <a:schemeClr val="lt1"/>
+          </a:fontRef>
+        </p:style>
+        <p:txBody>
+          <a:bodyPr rtlCol="0" anchor="ctr"/>
+          <a:lstStyle/>
+          <a:p>
+            <a:pPr algn="ctr"/>
+          </a:p>
+        </p:txBody>
+      </p:sp>
+      <p:sp>
+        <p:nvSpPr>
+          <p:cNvPr id="13" name="Rectangle 12"/>
+          <p:cNvSpPr/>
+          <p:nvPr/>
+        </p:nvSpPr>
+        <p:spPr>
+          <a:xfrm>
+            <a:off x="4283354" y="1655064"/>
+            <a:ext cx="3624986" cy="27432"/>
+          </a:xfrm>
+          <a:prstGeom prst="rect">
+            <a:avLst/>
+          </a:prstGeom>
+          <a:solidFill>
+            <a:srgbClr val="FFD000"/>
+          </a:solidFill>
+          <a:ln>
+            <a:noFill/>
+          </a:ln>
+        </p:spPr>
+        <p:style>
+          <a:lnRef idx="1">
+            <a:schemeClr val="accent1"/>
+          </a:lnRef>
+          <a:fillRef idx="3">
+            <a:schemeClr val="accent1"/>
+          </a:fillRef>
+          <a:effectRef idx="2">
+            <a:schemeClr val="accent1"/>
+          </a:effectRef>
+          <a:fontRef idx="minor">
+            <a:schemeClr val="lt1"/>
+          </a:fontRef>
+        </p:style>
+        <p:txBody>
+          <a:bodyPr rtlCol="0" anchor="ctr"/>
+          <a:lstStyle/>
+          <a:p>
+            <a:pPr algn="ctr"/>
+          </a:p>
+        </p:txBody>
+      </p:sp>
+      <p:pic>
+        <p:nvPicPr>
+          <p:cNvPr id="14" name="Picture 13" descr="excalidraw.png"/>
+          <p:cNvPicPr>
+            <a:picLocks noChangeAspect="1"/>
+          </p:cNvPicPr>
+          <p:nvPr/>
+        </p:nvPicPr>
+        <p:blipFill>
+          <a:blip r:embed="rId3"/>
+          <a:stretch>
+            <a:fillRect/>
+          </a:stretch>
+        </p:blipFill>
+        <p:spPr>
+          <a:xfrm>
+            <a:off x="5469483" y="1847087"/>
+            <a:ext cx="1252728" cy="1252728"/>
+          </a:xfrm>
+          <a:prstGeom prst="rect">
+            <a:avLst/>
+          </a:prstGeom>
+        </p:spPr>
+      </p:pic>
+      <p:sp>
+        <p:nvSpPr>
+          <p:cNvPr id="15" name="TextBox 14"/>
+          <p:cNvSpPr txBox="1"/>
+          <p:nvPr/>
+        </p:nvSpPr>
+        <p:spPr>
+          <a:xfrm>
+            <a:off x="4356506" y="3191256"/>
+            <a:ext cx="3478682" cy="621792"/>
+          </a:xfrm>
+          <a:prstGeom prst="rect">
+            <a:avLst/>
+          </a:prstGeom>
+          <a:noFill/>
+        </p:spPr>
+        <p:txBody>
+          <a:bodyPr wrap="square" anchor="t"/>
+          <a:lstStyle/>
+          <a:p>
+            <a:pPr algn="ctr"/>
+            <a:r>
+              <a:rPr sz="1300" b="1" i="0">
+                <a:solidFill>
+                  <a:srgbClr val="095292"/>
+                </a:solidFill>
+                <a:latin typeface="Calibri"/>
+              </a:rPr>
+              <a:t>Excalidraw</a:t>
+            </a:r>
+          </a:p>
+          <a:p>
+            <a:pPr algn="ctr">
+              <a:spcBef>
+                <a:spcPts val="200"/>
+              </a:spcBef>
+            </a:pPr>
+            <a:r>
+              <a:rPr sz="1000" b="0" i="0">
+                <a:solidFill>
+                  <a:srgbClr val="666666"/>
+                </a:solidFill>
+                <a:latin typeface="Calibri"/>
+              </a:rPr>
+              <a:t>Marcar controles en el C4 · opcional</a:t>
+            </a:r>
+          </a:p>
+        </p:txBody>
+      </p:sp>
+      <p:sp>
+        <p:nvSpPr>
+          <p:cNvPr id="16" name="Rounded Rectangle 15"/>
+          <p:cNvSpPr/>
+          <p:nvPr/>
+        </p:nvSpPr>
+        <p:spPr>
+          <a:xfrm>
+            <a:off x="8109508" y="1591056"/>
+            <a:ext cx="3624986" cy="2331720"/>
+          </a:xfrm>
+          <a:prstGeom prst="roundRect">
+            <a:avLst>
+              <a:gd name="adj" fmla="val 12000"/>
+            </a:avLst>
+          </a:prstGeom>
+          <a:solidFill>
+            <a:srgbClr val="F2F2F2"/>
+          </a:solidFill>
+          <a:ln>
+            <a:noFill/>
+          </a:ln>
+        </p:spPr>
+        <p:style>
+          <a:lnRef idx="1">
+            <a:schemeClr val="accent1"/>
+          </a:lnRef>
+          <a:fillRef idx="3">
+            <a:schemeClr val="accent1"/>
+          </a:fillRef>
+          <a:effectRef idx="2">
+            <a:schemeClr val="accent1"/>
+          </a:effectRef>
+          <a:fontRef idx="minor">
+            <a:schemeClr val="lt1"/>
+          </a:fontRef>
+        </p:style>
+        <p:txBody>
+          <a:bodyPr rtlCol="0" anchor="ctr"/>
+          <a:lstStyle/>
+          <a:p>
+            <a:pPr algn="ctr"/>
+          </a:p>
+        </p:txBody>
+      </p:sp>
+      <p:sp>
+        <p:nvSpPr>
+          <p:cNvPr id="17" name="Rectangle 16"/>
+          <p:cNvSpPr/>
+          <p:nvPr/>
+        </p:nvSpPr>
+        <p:spPr>
+          <a:xfrm>
+            <a:off x="8109508" y="1591056"/>
+            <a:ext cx="3624986" cy="64008"/>
+          </a:xfrm>
+          <a:prstGeom prst="rect">
+            <a:avLst/>
+          </a:prstGeom>
+          <a:solidFill>
+            <a:srgbClr val="095292"/>
+          </a:solidFill>
+          <a:ln>
+            <a:noFill/>
+          </a:ln>
+        </p:spPr>
+        <p:style>
+          <a:lnRef idx="1">
+            <a:schemeClr val="accent1"/>
+          </a:lnRef>
+          <a:fillRef idx="3">
+            <a:schemeClr val="accent1"/>
+          </a:fillRef>
+          <a:effectRef idx="2">
+            <a:schemeClr val="accent1"/>
+          </a:effectRef>
+          <a:fontRef idx="minor">
+            <a:schemeClr val="lt1"/>
+          </a:fontRef>
+        </p:style>
+        <p:txBody>
+          <a:bodyPr rtlCol="0" anchor="ctr"/>
+          <a:lstStyle/>
+          <a:p>
+            <a:pPr algn="ctr"/>
+          </a:p>
+        </p:txBody>
+      </p:sp>
+      <p:sp>
+        <p:nvSpPr>
+          <p:cNvPr id="18" name="Rectangle 17"/>
+          <p:cNvSpPr/>
+          <p:nvPr/>
+        </p:nvSpPr>
+        <p:spPr>
+          <a:xfrm>
+            <a:off x="8109508" y="1655064"/>
+            <a:ext cx="3624986" cy="27432"/>
+          </a:xfrm>
+          <a:prstGeom prst="rect">
+            <a:avLst/>
+          </a:prstGeom>
+          <a:solidFill>
+            <a:srgbClr val="FFD000"/>
+          </a:solidFill>
+          <a:ln>
+            <a:noFill/>
+          </a:ln>
+        </p:spPr>
+        <p:style>
+          <a:lnRef idx="1">
+            <a:schemeClr val="accent1"/>
+          </a:lnRef>
+          <a:fillRef idx="3">
+            <a:schemeClr val="accent1"/>
+          </a:fillRef>
+          <a:effectRef idx="2">
+            <a:schemeClr val="accent1"/>
+          </a:effectRef>
+          <a:fontRef idx="minor">
+            <a:schemeClr val="lt1"/>
+          </a:fontRef>
+        </p:style>
+        <p:txBody>
+          <a:bodyPr rtlCol="0" anchor="ctr"/>
+          <a:lstStyle/>
+          <a:p>
+            <a:pPr algn="ctr"/>
+          </a:p>
+        </p:txBody>
+      </p:sp>
+      <p:pic>
+        <p:nvPicPr>
+          <p:cNvPr id="19" name="Picture 18" descr="examlab.png"/>
+          <p:cNvPicPr>
+            <a:picLocks noChangeAspect="1"/>
+          </p:cNvPicPr>
+          <p:nvPr/>
+        </p:nvPicPr>
+        <p:blipFill>
+          <a:blip r:embed="rId4"/>
+          <a:stretch>
+            <a:fillRect/>
+          </a:stretch>
+        </p:blipFill>
+        <p:spPr>
+          <a:xfrm>
+            <a:off x="9295638" y="1847087"/>
+            <a:ext cx="1252728" cy="1252728"/>
+          </a:xfrm>
+          <a:prstGeom prst="rect">
+            <a:avLst/>
+          </a:prstGeom>
+        </p:spPr>
+      </p:pic>
+      <p:sp>
+        <p:nvSpPr>
+          <p:cNvPr id="20" name="TextBox 19"/>
+          <p:cNvSpPr txBox="1"/>
+          <p:nvPr/>
+        </p:nvSpPr>
+        <p:spPr>
+          <a:xfrm>
+            <a:off x="8182660" y="3191256"/>
+            <a:ext cx="3478682" cy="621792"/>
+          </a:xfrm>
+          <a:prstGeom prst="rect">
+            <a:avLst/>
+          </a:prstGeom>
+          <a:noFill/>
+        </p:spPr>
+        <p:txBody>
+          <a:bodyPr wrap="square" anchor="t"/>
+          <a:lstStyle/>
+          <a:p>
+            <a:pPr algn="ctr"/>
+            <a:r>
+              <a:rPr sz="1300" b="1" i="0">
+                <a:solidFill>
+                  <a:srgbClr val="095292"/>
+                </a:solidFill>
+                <a:latin typeface="Calibri"/>
+              </a:rPr>
+              <a:t>ExamLab</a:t>
+            </a:r>
+          </a:p>
+          <a:p>
+            <a:pPr algn="ctr">
+              <a:spcBef>
+                <a:spcPts val="200"/>
+              </a:spcBef>
+            </a:pPr>
+            <a:r>
+              <a:rPr sz="1000" b="0" i="0">
+                <a:solidFill>
+                  <a:srgbClr val="666666"/>
+                </a:solidFill>
+                <a:latin typeface="Calibri"/>
+              </a:rPr>
+              <a:t>Donde se entrega</a:t>
+            </a:r>
+          </a:p>
+        </p:txBody>
+      </p:sp>
+      <p:sp>
+        <p:nvSpPr>
+          <p:cNvPr id="21" name="TextBox 20"/>
+          <p:cNvSpPr txBox="1"/>
+          <p:nvPr/>
+        </p:nvSpPr>
+        <p:spPr>
+          <a:xfrm>
+            <a:off x="11185855" y="6473952"/>
+            <a:ext cx="640080" cy="274320"/>
+          </a:xfrm>
+          <a:prstGeom prst="rect">
+            <a:avLst/>
+          </a:prstGeom>
+          <a:noFill/>
+        </p:spPr>
+        <p:txBody>
+          <a:bodyPr wrap="square">
+            <a:spAutoFit/>
+          </a:bodyPr>
+          <a:lstStyle/>
+          <a:p>
+            <a:pPr algn="r"/>
+            <a:r>
+              <a:rPr sz="1100" b="0" i="0">
+                <a:solidFill>
+                  <a:srgbClr val="666666"/>
+                </a:solidFill>
+                <a:latin typeface="Calibri"/>
+              </a:rPr>
+              <a:t>12</a:t>
+            </a:r>
+          </a:p>
+        </p:txBody>
+      </p:sp>
+    </p:spTree>
+  </p:cSld>
+  <p:clrMapOvr>
+    <a:masterClrMapping/>
+  </p:clrMapOvr>
+</p:sld>
+</file>
+
+<file path=ppt/slides/slide13.xml><?xml version="1.0" encoding="utf-8"?>
+<p:sld xmlns:a="http://schemas.openxmlformats.org/drawingml/2006/main" xmlns:p="http://schemas.openxmlformats.org/presentationml/2006/main" xmlns:r="http://schemas.openxmlformats.org/officeDocument/2006/relationships">
+  <p:cSld>
+    <p:bg>
+      <p:bgPr>
+        <a:solidFill>
+          <a:srgbClr val="FFFFFF"/>
+        </a:solidFill>
+        <a:effectLst/>
+      </p:bgPr>
+    </p:bg>
+    <p:spTree>
+      <p:nvGrpSpPr>
+        <p:cNvPr id="1" name=""/>
+        <p:cNvGrpSpPr/>
+        <p:nvPr/>
+      </p:nvGrpSpPr>
+      <p:grpSpPr/>
+      <p:sp>
+        <p:nvSpPr>
+          <p:cNvPr id="2" name="Rectangle 1"/>
+          <p:cNvSpPr/>
+          <p:nvPr/>
+        </p:nvSpPr>
+        <p:spPr>
+          <a:xfrm>
+            <a:off x="0" y="0"/>
+            <a:ext cx="12191695" cy="960120"/>
+          </a:xfrm>
+          <a:prstGeom prst="rect">
+            <a:avLst/>
+          </a:prstGeom>
+          <a:solidFill>
+            <a:srgbClr val="095292"/>
+          </a:solidFill>
+          <a:ln>
+            <a:noFill/>
+          </a:ln>
+        </p:spPr>
+        <p:style>
+          <a:lnRef idx="1">
+            <a:schemeClr val="accent1"/>
+          </a:lnRef>
+          <a:fillRef idx="3">
+            <a:schemeClr val="accent1"/>
+          </a:fillRef>
+          <a:effectRef idx="2">
+            <a:schemeClr val="accent1"/>
+          </a:effectRef>
+          <a:fontRef idx="minor">
+            <a:schemeClr val="lt1"/>
+          </a:fontRef>
+        </p:style>
+        <p:txBody>
+          <a:bodyPr rtlCol="0" anchor="ctr"/>
+          <a:lstStyle/>
+          <a:p>
+            <a:pPr algn="ctr"/>
+          </a:p>
+        </p:txBody>
+      </p:sp>
+      <p:sp>
+        <p:nvSpPr>
+          <p:cNvPr id="3" name="Rectangle 2"/>
+          <p:cNvSpPr/>
+          <p:nvPr/>
+        </p:nvSpPr>
+        <p:spPr>
+          <a:xfrm>
+            <a:off x="0" y="960120"/>
+            <a:ext cx="12191695" cy="41148"/>
+          </a:xfrm>
+          <a:prstGeom prst="rect">
+            <a:avLst/>
+          </a:prstGeom>
+          <a:solidFill>
+            <a:srgbClr val="FFD000"/>
+          </a:solidFill>
+          <a:ln>
+            <a:noFill/>
+          </a:ln>
+        </p:spPr>
+        <p:style>
+          <a:lnRef idx="1">
+            <a:schemeClr val="accent1"/>
+          </a:lnRef>
+          <a:fillRef idx="3">
+            <a:schemeClr val="accent1"/>
+          </a:fillRef>
+          <a:effectRef idx="2">
+            <a:schemeClr val="accent1"/>
+          </a:effectRef>
+          <a:fontRef idx="minor">
+            <a:schemeClr val="lt1"/>
+          </a:fontRef>
+        </p:style>
+        <p:txBody>
+          <a:bodyPr rtlCol="0" anchor="ctr"/>
+          <a:lstStyle/>
+          <a:p>
+            <a:pPr algn="ctr"/>
+          </a:p>
+        </p:txBody>
+      </p:sp>
+      <p:sp>
+        <p:nvSpPr>
+          <p:cNvPr id="4" name="TextBox 3"/>
+          <p:cNvSpPr txBox="1"/>
+          <p:nvPr/>
+        </p:nvSpPr>
+        <p:spPr>
+          <a:xfrm>
+            <a:off x="457200" y="164592"/>
+            <a:ext cx="11277295" cy="502920"/>
+          </a:xfrm>
+          <a:prstGeom prst="rect">
+            <a:avLst/>
+          </a:prstGeom>
+          <a:noFill/>
+        </p:spPr>
+        <p:txBody>
+          <a:bodyPr wrap="square">
+            <a:spAutoFit/>
+          </a:bodyPr>
+          <a:lstStyle/>
+          <a:p>
+            <a:r>
+              <a:rPr sz="2600" b="1" i="0">
+                <a:solidFill>
+                  <a:srgbClr val="FFFFFF"/>
+                </a:solidFill>
+                <a:latin typeface="Calibri"/>
+              </a:rPr>
+              <a:t>Taller PI (paso a paso)</a:t>
+            </a:r>
+          </a:p>
+        </p:txBody>
+      </p:sp>
+      <p:sp>
+        <p:nvSpPr>
+          <p:cNvPr id="5" name="TextBox 4"/>
+          <p:cNvSpPr txBox="1"/>
+          <p:nvPr/>
+        </p:nvSpPr>
+        <p:spPr>
+          <a:xfrm>
+            <a:off x="457200" y="1170432"/>
+            <a:ext cx="11277295" cy="5230368"/>
+          </a:xfrm>
+          <a:prstGeom prst="rect">
+            <a:avLst/>
+          </a:prstGeom>
+          <a:noFill/>
+        </p:spPr>
+        <p:txBody>
+          <a:bodyPr wrap="square">
+            <a:spAutoFit/>
+          </a:bodyPr>
+          <a:lstStyle/>
+          <a:p>
+            <a:pPr>
+              <a:spcAft>
+                <a:spcPts val="800"/>
+              </a:spcAft>
+            </a:pPr>
+            <a:r>
+              <a:rPr sz="1600" b="1" i="0">
+                <a:solidFill>
+                  <a:srgbClr val="333333"/>
+                </a:solidFill>
+                <a:latin typeface="Calibri"/>
+              </a:rPr>
+              <a:t>1.</a:t>
+            </a:r>
+            <a:r>
+              <a:rPr sz="1600" b="0" i="0">
+                <a:solidFill>
+                  <a:srgbClr val="333333"/>
+                </a:solidFill>
+                <a:latin typeface="Calibri"/>
+              </a:rPr>
+              <a:t> Paso 1: liste en la pregunta 1 cinco amenazas de SU dominio, cada una nombrando el actor o el dato concreto que pone en riesgo y el camino por el que ocurre; use STRIDE como guia de categorias y verifique que ninguna sea una frase de manual que sirva igual para cualquier sistema.</a:t>
+            </a:r>
+          </a:p>
+          <a:p>
+            <a:pPr>
+              <a:spcAft>
+                <a:spcPts val="800"/>
+              </a:spcAft>
+            </a:pPr>
+            <a:r>
+              <a:rPr sz="1600" b="0" i="0">
+                <a:solidFill>
+                  <a:srgbClr val="333333"/>
+                </a:solidFill>
+                <a:latin typeface="Calibri"/>
+              </a:rPr>
+              <a:t>–   </a:t>
+            </a:r>
+            <a:r>
+              <a:rPr sz="1600" b="1" i="0">
+                <a:solidFill>
+                  <a:srgbClr val="333333"/>
+                </a:solidFill>
+                <a:latin typeface="Calibri"/>
+              </a:rPr>
+              <a:t>2.</a:t>
+            </a:r>
+            <a:r>
+              <a:rPr sz="1600" b="0" i="0">
+                <a:solidFill>
+                  <a:srgbClr val="333333"/>
+                </a:solidFill>
+                <a:latin typeface="Calibri"/>
+              </a:rPr>
+              <a:t> Paso 2: complete en la pregunta 2 la tabla amenaza-control-donde, senalando para cada control la caja o la flecha concreta del C4 Containers o del Despliegue donde se ve; incluya el principio de menor privilegio aplicado a un componente, diciendo que deja de poder hacer.</a:t>
+            </a:r>
+          </a:p>
+          <a:p>
+            <a:pPr>
+              <a:spcAft>
+                <a:spcPts val="800"/>
+              </a:spcAft>
+            </a:pPr>
+            <a:r>
+              <a:rPr sz="1600" b="0" i="0">
+                <a:solidFill>
+                  <a:srgbClr val="333333"/>
+                </a:solidFill>
+                <a:latin typeface="Calibri"/>
+              </a:rPr>
+              <a:t>–   </a:t>
+            </a:r>
+            <a:r>
+              <a:rPr sz="1600" b="1" i="0">
+                <a:solidFill>
+                  <a:srgbClr val="333333"/>
+                </a:solidFill>
+                <a:latin typeface="Calibri"/>
+              </a:rPr>
+              <a:t>3.</a:t>
+            </a:r>
+            <a:r>
+              <a:rPr sz="1600" b="0" i="0">
+                <a:solidFill>
+                  <a:srgbClr val="333333"/>
+                </a:solidFill>
+                <a:latin typeface="Calibri"/>
+              </a:rPr>
+              <a:t> Paso 3: escriba en la pregunta 3 la politica de secretos respondiendo donde viven, quien los rota, cada cuanto y que esta prohibido, y cierre con el procedimiento ante una filtracion; verifique que su politica no admita secretos en el Dockerfile, el README ni el YAML en claro.</a:t>
+            </a:r>
+          </a:p>
+          <a:p>
+            <a:pPr>
+              <a:spcAft>
+                <a:spcPts val="800"/>
+              </a:spcAft>
+            </a:pPr>
+            <a:r>
+              <a:rPr sz="1600" b="0" i="0">
+                <a:solidFill>
+                  <a:srgbClr val="333333"/>
+                </a:solidFill>
+                <a:latin typeface="Calibri"/>
+              </a:rPr>
+              <a:t>–   </a:t>
+            </a:r>
+            <a:r>
+              <a:rPr sz="1600" b="1" i="0">
+                <a:solidFill>
+                  <a:srgbClr val="333333"/>
+                </a:solidFill>
+                <a:latin typeface="Calibri"/>
+              </a:rPr>
+              <a:t>4.</a:t>
+            </a:r>
+            <a:r>
+              <a:rPr sz="1600" b="0" i="0">
+                <a:solidFill>
+                  <a:srgbClr val="333333"/>
+                </a:solidFill>
+                <a:latin typeface="Calibri"/>
+              </a:rPr>
+              <a:t> Paso 4: guarde y continue. Esta actividad es una sola para las Clases 6, 7, 8 y 10 y se entrega completa al cierre del Corte 2: hoy resuelve las preguntas 1 a 3 y las 4 a 12 se resuelven en las clases siguientes.</a:t>
+            </a:r>
+          </a:p>
+        </p:txBody>
+      </p:sp>
+      <p:sp>
+        <p:nvSpPr>
+          <p:cNvPr id="6" name="TextBox 5"/>
+          <p:cNvSpPr txBox="1"/>
+          <p:nvPr/>
+        </p:nvSpPr>
+        <p:spPr>
+          <a:xfrm>
+            <a:off x="11185855" y="6473952"/>
+            <a:ext cx="640080" cy="274320"/>
+          </a:xfrm>
+          <a:prstGeom prst="rect">
+            <a:avLst/>
+          </a:prstGeom>
+          <a:noFill/>
+        </p:spPr>
+        <p:txBody>
+          <a:bodyPr wrap="square">
+            <a:spAutoFit/>
+          </a:bodyPr>
+          <a:lstStyle/>
+          <a:p>
+            <a:pPr algn="r"/>
+            <a:r>
+              <a:rPr sz="1100" b="0" i="0">
+                <a:solidFill>
+                  <a:srgbClr val="666666"/>
+                </a:solidFill>
+                <a:latin typeface="Calibri"/>
+              </a:rPr>
+              <a:t>13</a:t>
+            </a:r>
+          </a:p>
+        </p:txBody>
+      </p:sp>
+    </p:spTree>
+  </p:cSld>
+  <p:clrMapOvr>
+    <a:masterClrMapping/>
+  </p:clrMapOvr>
+</p:sld>
+</file>
+
+<file path=ppt/slides/slide14.xml><?xml version="1.0" encoding="utf-8"?>
+<p:sld xmlns:a="http://schemas.openxmlformats.org/drawingml/2006/main" xmlns:p="http://schemas.openxmlformats.org/presentationml/2006/main" xmlns:r="http://schemas.openxmlformats.org/officeDocument/2006/relationships">
+  <p:cSld>
+    <p:bg>
+      <p:bgPr>
+        <a:solidFill>
+          <a:srgbClr val="FFFFFF"/>
+        </a:solidFill>
+        <a:effectLst/>
+      </p:bgPr>
+    </p:bg>
+    <p:spTree>
+      <p:nvGrpSpPr>
+        <p:cNvPr id="1" name=""/>
+        <p:cNvGrpSpPr/>
+        <p:nvPr/>
+      </p:nvGrpSpPr>
+      <p:grpSpPr/>
+      <p:sp>
+        <p:nvSpPr>
+          <p:cNvPr id="2" name="Rectangle 1"/>
+          <p:cNvSpPr/>
+          <p:nvPr/>
+        </p:nvSpPr>
+        <p:spPr>
+          <a:xfrm>
+            <a:off x="0" y="0"/>
+            <a:ext cx="12191695" cy="960120"/>
+          </a:xfrm>
+          <a:prstGeom prst="rect">
+            <a:avLst/>
+          </a:prstGeom>
+          <a:solidFill>
+            <a:srgbClr val="095292"/>
+          </a:solidFill>
+          <a:ln>
+            <a:noFill/>
+          </a:ln>
+        </p:spPr>
+        <p:style>
+          <a:lnRef idx="1">
+            <a:schemeClr val="accent1"/>
+          </a:lnRef>
+          <a:fillRef idx="3">
+            <a:schemeClr val="accent1"/>
+          </a:fillRef>
+          <a:effectRef idx="2">
+            <a:schemeClr val="accent1"/>
+          </a:effectRef>
+          <a:fontRef idx="minor">
+            <a:schemeClr val="lt1"/>
+          </a:fontRef>
+        </p:style>
+        <p:txBody>
+          <a:bodyPr rtlCol="0" anchor="ctr"/>
+          <a:lstStyle/>
+          <a:p>
+            <a:pPr algn="ctr"/>
+          </a:p>
+        </p:txBody>
+      </p:sp>
+      <p:sp>
+        <p:nvSpPr>
+          <p:cNvPr id="3" name="Rectangle 2"/>
+          <p:cNvSpPr/>
+          <p:nvPr/>
+        </p:nvSpPr>
+        <p:spPr>
+          <a:xfrm>
+            <a:off x="0" y="960120"/>
+            <a:ext cx="12191695" cy="41148"/>
+          </a:xfrm>
+          <a:prstGeom prst="rect">
+            <a:avLst/>
+          </a:prstGeom>
+          <a:solidFill>
+            <a:srgbClr val="FFD000"/>
+          </a:solidFill>
+          <a:ln>
+            <a:noFill/>
+          </a:ln>
+        </p:spPr>
+        <p:style>
+          <a:lnRef idx="1">
+            <a:schemeClr val="accent1"/>
+          </a:lnRef>
+          <a:fillRef idx="3">
+            <a:schemeClr val="accent1"/>
+          </a:fillRef>
+          <a:effectRef idx="2">
+            <a:schemeClr val="accent1"/>
+          </a:effectRef>
+          <a:fontRef idx="minor">
+            <a:schemeClr val="lt1"/>
+          </a:fontRef>
+        </p:style>
+        <p:txBody>
+          <a:bodyPr rtlCol="0" anchor="ctr"/>
+          <a:lstStyle/>
+          <a:p>
+            <a:pPr algn="ctr"/>
+          </a:p>
+        </p:txBody>
+      </p:sp>
+      <p:sp>
+        <p:nvSpPr>
+          <p:cNvPr id="4" name="TextBox 3"/>
+          <p:cNvSpPr txBox="1"/>
+          <p:nvPr/>
+        </p:nvSpPr>
+        <p:spPr>
+          <a:xfrm>
+            <a:off x="457200" y="164592"/>
+            <a:ext cx="11277295" cy="502920"/>
+          </a:xfrm>
+          <a:prstGeom prst="rect">
+            <a:avLst/>
+          </a:prstGeom>
+          <a:noFill/>
+        </p:spPr>
+        <p:txBody>
+          <a:bodyPr wrap="square">
+            <a:spAutoFit/>
+          </a:bodyPr>
+          <a:lstStyle/>
+          <a:p>
+            <a:r>
+              <a:rPr sz="2600" b="1" i="0">
+                <a:solidFill>
+                  <a:srgbClr val="FFFFFF"/>
+                </a:solidFill>
+                <a:latin typeface="Calibri"/>
+              </a:rPr>
+              <a:t>Para continuar (PI)</a:t>
+            </a:r>
+          </a:p>
+        </p:txBody>
+      </p:sp>
+      <p:sp>
+        <p:nvSpPr>
+          <p:cNvPr id="5" name="Rounded Rectangle 4"/>
+          <p:cNvSpPr/>
+          <p:nvPr/>
+        </p:nvSpPr>
+        <p:spPr>
+          <a:xfrm>
+            <a:off x="457200" y="1261872"/>
+            <a:ext cx="11277295" cy="1051560"/>
+          </a:xfrm>
+          <a:prstGeom prst="roundRect">
+            <a:avLst>
+              <a:gd name="adj" fmla="val 12000"/>
+            </a:avLst>
+          </a:prstGeom>
+          <a:solidFill>
+            <a:srgbClr val="E8F4FA"/>
+          </a:solidFill>
+          <a:ln>
+            <a:noFill/>
+          </a:ln>
+        </p:spPr>
+        <p:style>
+          <a:lnRef idx="1">
+            <a:schemeClr val="accent1"/>
+          </a:lnRef>
+          <a:fillRef idx="3">
+            <a:schemeClr val="accent1"/>
+          </a:fillRef>
+          <a:effectRef idx="2">
+            <a:schemeClr val="accent1"/>
+          </a:effectRef>
+          <a:fontRef idx="minor">
+            <a:schemeClr val="lt1"/>
+          </a:fontRef>
+        </p:style>
+        <p:txBody>
+          <a:bodyPr rtlCol="0" anchor="ctr"/>
+          <a:lstStyle/>
+          <a:p>
+            <a:pPr algn="ctr"/>
+          </a:p>
+        </p:txBody>
+      </p:sp>
+      <p:sp>
+        <p:nvSpPr>
+          <p:cNvPr id="6" name="Rectangle 5"/>
+          <p:cNvSpPr/>
+          <p:nvPr/>
+        </p:nvSpPr>
+        <p:spPr>
+          <a:xfrm>
+            <a:off x="457200" y="1261872"/>
+            <a:ext cx="128016" cy="1051560"/>
+          </a:xfrm>
+          <a:prstGeom prst="rect">
+            <a:avLst/>
+          </a:prstGeom>
+          <a:solidFill>
+            <a:srgbClr val="269CCB"/>
+          </a:solidFill>
+          <a:ln>
+            <a:noFill/>
+          </a:ln>
+        </p:spPr>
+        <p:style>
+          <a:lnRef idx="1">
+            <a:schemeClr val="accent1"/>
+          </a:lnRef>
+          <a:fillRef idx="3">
+            <a:schemeClr val="accent1"/>
+          </a:fillRef>
+          <a:effectRef idx="2">
+            <a:schemeClr val="accent1"/>
+          </a:effectRef>
+          <a:fontRef idx="minor">
+            <a:schemeClr val="lt1"/>
+          </a:fontRef>
+        </p:style>
+        <p:txBody>
+          <a:bodyPr rtlCol="0" anchor="ctr"/>
+          <a:lstStyle/>
+          <a:p>
+            <a:pPr algn="ctr"/>
+          </a:p>
+        </p:txBody>
+      </p:sp>
+      <p:sp>
+        <p:nvSpPr>
+          <p:cNvPr id="7" name="TextBox 6"/>
+          <p:cNvSpPr txBox="1"/>
+          <p:nvPr/>
+        </p:nvSpPr>
+        <p:spPr>
+          <a:xfrm>
+            <a:off x="777240" y="1399031"/>
+            <a:ext cx="10774375" cy="822959"/>
+          </a:xfrm>
+          <a:prstGeom prst="rect">
+            <a:avLst/>
+          </a:prstGeom>
+          <a:noFill/>
+        </p:spPr>
+        <p:txBody>
+          <a:bodyPr wrap="square">
+            <a:spAutoFit/>
+          </a:bodyPr>
+          <a:lstStyle/>
+          <a:p>
+            <a:r>
+              <a:rPr sz="1200" b="1" i="0">
+                <a:solidFill>
+                  <a:srgbClr val="269CCB"/>
+                </a:solidFill>
+                <a:latin typeface="Calibri"/>
+              </a:rPr>
+              <a:t>Info</a:t>
+            </a:r>
+          </a:p>
+          <a:p>
+            <a:pPr>
+              <a:spcBef>
+                <a:spcPts val="400"/>
+              </a:spcBef>
+            </a:pPr>
+            <a:r>
+              <a:rPr sz="1400" b="0" i="0">
+                <a:solidFill>
+                  <a:srgbClr val="333333"/>
+                </a:solidFill>
+                <a:latin typeface="Calibri"/>
+              </a:rPr>
+              <a:t>Entregable: Sección Seguridad PI: 5 amenazas STRIDE-lite + controles + secretos/CI</a:t>
+            </a:r>
+          </a:p>
+        </p:txBody>
+      </p:sp>
+      <p:sp>
+        <p:nvSpPr>
+          <p:cNvPr id="8" name="Rounded Rectangle 7"/>
+          <p:cNvSpPr/>
+          <p:nvPr/>
+        </p:nvSpPr>
+        <p:spPr>
+          <a:xfrm>
+            <a:off x="457200" y="2478024"/>
+            <a:ext cx="11277295" cy="1051560"/>
+          </a:xfrm>
+          <a:prstGeom prst="roundRect">
+            <a:avLst>
+              <a:gd name="adj" fmla="val 12000"/>
+            </a:avLst>
+          </a:prstGeom>
+          <a:solidFill>
+            <a:srgbClr val="FFF8E1"/>
+          </a:solidFill>
+          <a:ln>
+            <a:noFill/>
+          </a:ln>
+        </p:spPr>
+        <p:style>
+          <a:lnRef idx="1">
+            <a:schemeClr val="accent1"/>
+          </a:lnRef>
+          <a:fillRef idx="3">
+            <a:schemeClr val="accent1"/>
+          </a:fillRef>
+          <a:effectRef idx="2">
+            <a:schemeClr val="accent1"/>
+          </a:effectRef>
+          <a:fontRef idx="minor">
+            <a:schemeClr val="lt1"/>
+          </a:fontRef>
+        </p:style>
+        <p:txBody>
+          <a:bodyPr rtlCol="0" anchor="ctr"/>
+          <a:lstStyle/>
+          <a:p>
+            <a:pPr algn="ctr"/>
+          </a:p>
+        </p:txBody>
+      </p:sp>
+      <p:sp>
+        <p:nvSpPr>
+          <p:cNvPr id="9" name="Rectangle 8"/>
+          <p:cNvSpPr/>
+          <p:nvPr/>
+        </p:nvSpPr>
+        <p:spPr>
+          <a:xfrm>
+            <a:off x="457200" y="2478024"/>
+            <a:ext cx="128016" cy="1051560"/>
+          </a:xfrm>
+          <a:prstGeom prst="rect">
+            <a:avLst/>
+          </a:prstGeom>
+          <a:solidFill>
+            <a:srgbClr val="FFD000"/>
+          </a:solidFill>
+          <a:ln>
+            <a:noFill/>
+          </a:ln>
+        </p:spPr>
+        <p:style>
+          <a:lnRef idx="1">
+            <a:schemeClr val="accent1"/>
+          </a:lnRef>
+          <a:fillRef idx="3">
+            <a:schemeClr val="accent1"/>
+          </a:fillRef>
+          <a:effectRef idx="2">
+            <a:schemeClr val="accent1"/>
+          </a:effectRef>
+          <a:fontRef idx="minor">
+            <a:schemeClr val="lt1"/>
+          </a:fontRef>
+        </p:style>
+        <p:txBody>
+          <a:bodyPr rtlCol="0" anchor="ctr"/>
+          <a:lstStyle/>
+          <a:p>
+            <a:pPr algn="ctr"/>
+          </a:p>
+        </p:txBody>
+      </p:sp>
+      <p:sp>
+        <p:nvSpPr>
+          <p:cNvPr id="10" name="TextBox 9"/>
+          <p:cNvSpPr txBox="1"/>
+          <p:nvPr/>
+        </p:nvSpPr>
+        <p:spPr>
+          <a:xfrm>
+            <a:off x="777240" y="2615184"/>
+            <a:ext cx="10774375" cy="822959"/>
+          </a:xfrm>
+          <a:prstGeom prst="rect">
+            <a:avLst/>
+          </a:prstGeom>
+          <a:noFill/>
+        </p:spPr>
+        <p:txBody>
+          <a:bodyPr wrap="square">
+            <a:spAutoFit/>
+          </a:bodyPr>
+          <a:lstStyle/>
+          <a:p>
+            <a:r>
+              <a:rPr sz="1200" b="1" i="0">
+                <a:solidFill>
+                  <a:srgbClr val="FFD000"/>
+                </a:solidFill>
+                <a:latin typeface="Calibri"/>
+              </a:rPr>
+              <a:t>Aclaración</a:t>
+            </a:r>
+          </a:p>
+          <a:p>
+            <a:pPr>
+              <a:spcBef>
+                <a:spcPts val="400"/>
+              </a:spcBef>
+            </a:pPr>
+            <a:r>
+              <a:rPr sz="1400" b="0" i="0">
+                <a:solidFill>
+                  <a:srgbClr val="333333"/>
+                </a:solidFill>
+                <a:latin typeface="Calibri"/>
+              </a:rPr>
+              <a:t>Subir evidencias al paquete CloudLite (Drive/repo) y a ExamLab (https://uniaj.examlab.workers.dev/) domingo 23:59.</a:t>
+            </a:r>
+          </a:p>
+        </p:txBody>
+      </p:sp>
+      <p:sp>
+        <p:nvSpPr>
+          <p:cNvPr id="11" name="Rounded Rectangle 10"/>
+          <p:cNvSpPr/>
+          <p:nvPr/>
+        </p:nvSpPr>
+        <p:spPr>
+          <a:xfrm>
+            <a:off x="457200" y="3694176"/>
+            <a:ext cx="11277295" cy="1051560"/>
+          </a:xfrm>
+          <a:prstGeom prst="roundRect">
+            <a:avLst>
+              <a:gd name="adj" fmla="val 12000"/>
+            </a:avLst>
+          </a:prstGeom>
+          <a:solidFill>
+            <a:srgbClr val="FBE4E4"/>
+          </a:solidFill>
+          <a:ln>
+            <a:noFill/>
+          </a:ln>
+        </p:spPr>
+        <p:style>
+          <a:lnRef idx="1">
+            <a:schemeClr val="accent1"/>
+          </a:lnRef>
+          <a:fillRef idx="3">
+            <a:schemeClr val="accent1"/>
+          </a:fillRef>
+          <a:effectRef idx="2">
+            <a:schemeClr val="accent1"/>
+          </a:effectRef>
+          <a:fontRef idx="minor">
+            <a:schemeClr val="lt1"/>
+          </a:fontRef>
+        </p:style>
+        <p:txBody>
+          <a:bodyPr rtlCol="0" anchor="ctr"/>
+          <a:lstStyle/>
+          <a:p>
+            <a:pPr algn="ctr"/>
+          </a:p>
+        </p:txBody>
+      </p:sp>
+      <p:sp>
+        <p:nvSpPr>
+          <p:cNvPr id="12" name="Rectangle 11"/>
+          <p:cNvSpPr/>
+          <p:nvPr/>
+        </p:nvSpPr>
+        <p:spPr>
+          <a:xfrm>
+            <a:off x="457200" y="3694176"/>
+            <a:ext cx="128016" cy="1051560"/>
+          </a:xfrm>
+          <a:prstGeom prst="rect">
+            <a:avLst/>
+          </a:prstGeom>
+          <a:solidFill>
+            <a:srgbClr val="A02030"/>
+          </a:solidFill>
+          <a:ln>
+            <a:noFill/>
+          </a:ln>
+        </p:spPr>
+        <p:style>
+          <a:lnRef idx="1">
+            <a:schemeClr val="accent1"/>
+          </a:lnRef>
+          <a:fillRef idx="3">
+            <a:schemeClr val="accent1"/>
+          </a:fillRef>
+          <a:effectRef idx="2">
+            <a:schemeClr val="accent1"/>
+          </a:effectRef>
+          <a:fontRef idx="minor">
+            <a:schemeClr val="lt1"/>
+          </a:fontRef>
+        </p:style>
+        <p:txBody>
+          <a:bodyPr rtlCol="0" anchor="ctr"/>
+          <a:lstStyle/>
+          <a:p>
+            <a:pPr algn="ctr"/>
+          </a:p>
+        </p:txBody>
+      </p:sp>
+      <p:sp>
+        <p:nvSpPr>
+          <p:cNvPr id="13" name="TextBox 12"/>
+          <p:cNvSpPr txBox="1"/>
+          <p:nvPr/>
+        </p:nvSpPr>
+        <p:spPr>
+          <a:xfrm>
+            <a:off x="777240" y="3831336"/>
+            <a:ext cx="10774375" cy="822959"/>
+          </a:xfrm>
+          <a:prstGeom prst="rect">
+            <a:avLst/>
+          </a:prstGeom>
+          <a:noFill/>
+        </p:spPr>
+        <p:txBody>
+          <a:bodyPr wrap="square">
+            <a:spAutoFit/>
+          </a:bodyPr>
+          <a:lstStyle/>
+          <a:p>
+            <a:r>
+              <a:rPr sz="1200" b="1" i="0">
+                <a:solidFill>
+                  <a:srgbClr val="A02030"/>
+                </a:solidFill>
+                <a:latin typeface="Calibri"/>
+              </a:rPr>
+              <a:t>Atención</a:t>
+            </a:r>
+          </a:p>
+          <a:p>
+            <a:pPr>
+              <a:spcBef>
+                <a:spcPts val="400"/>
+              </a:spcBef>
+            </a:pPr>
+            <a:r>
+              <a:rPr sz="1400" b="0" i="0">
+                <a:solidFill>
+                  <a:srgbClr val="333333"/>
+                </a:solidFill>
+                <a:latin typeface="Calibri"/>
+              </a:rPr>
+              <a:t>Sin cloud de pago ni instalaciones obligatorias de hipervisores/Docker Desktop.</a:t>
+            </a:r>
+          </a:p>
+        </p:txBody>
+      </p:sp>
+      <p:sp>
+        <p:nvSpPr>
+          <p:cNvPr id="14" name="TextBox 13"/>
+          <p:cNvSpPr txBox="1"/>
+          <p:nvPr/>
+        </p:nvSpPr>
+        <p:spPr>
+          <a:xfrm>
+            <a:off x="11185855" y="6473952"/>
+            <a:ext cx="640080" cy="274320"/>
+          </a:xfrm>
+          <a:prstGeom prst="rect">
+            <a:avLst/>
+          </a:prstGeom>
+          <a:noFill/>
+        </p:spPr>
+        <p:txBody>
+          <a:bodyPr wrap="square">
+            <a:spAutoFit/>
+          </a:bodyPr>
+          <a:lstStyle/>
+          <a:p>
+            <a:pPr algn="r"/>
+            <a:r>
+              <a:rPr sz="1100" b="0" i="0">
+                <a:solidFill>
+                  <a:srgbClr val="666666"/>
+                </a:solidFill>
+                <a:latin typeface="Calibri"/>
+              </a:rPr>
+              <a:t>14</a:t>
+            </a:r>
+          </a:p>
+        </p:txBody>
+      </p:sp>
+    </p:spTree>
+  </p:cSld>
+  <p:clrMapOvr>
+    <a:masterClrMapping/>
+  </p:clrMapOvr>
+</p:sld>
+</file>
+
+<file path=ppt/slides/slide15.xml><?xml version="1.0" encoding="utf-8"?>
+<p:sld xmlns:a="http://schemas.openxmlformats.org/drawingml/2006/main" xmlns:p="http://schemas.openxmlformats.org/presentationml/2006/main" xmlns:r="http://schemas.openxmlformats.org/officeDocument/2006/relationships">
+  <p:cSld>
+    <p:bg>
+      <p:bgPr>
+        <a:solidFill>
+          <a:srgbClr val="FFFFFF"/>
+        </a:solidFill>
+        <a:effectLst/>
+      </p:bgPr>
+    </p:bg>
+    <p:spTree>
+      <p:nvGrpSpPr>
+        <p:cNvPr id="1" name=""/>
+        <p:cNvGrpSpPr/>
+        <p:nvPr/>
+      </p:nvGrpSpPr>
+      <p:grpSpPr/>
+      <p:sp>
+        <p:nvSpPr>
+          <p:cNvPr id="2" name="Rectangle 1"/>
+          <p:cNvSpPr/>
+          <p:nvPr/>
+        </p:nvSpPr>
+        <p:spPr>
+          <a:xfrm>
+            <a:off x="0" y="0"/>
             <a:ext cx="12191695" cy="164592"/>
           </a:xfrm>
           <a:prstGeom prst="rect">
@@ -5414,7 +7505,7 @@
                 </a:solidFill>
                 <a:latin typeface="Calibri"/>
               </a:rPr>
-              <a:t>Excalidraw · Google Docs</a:t>
+              <a:t>Google Docs para la tabla y la política · ExamLab para entregar</a:t>
             </a:r>
           </a:p>
           <a:p>
@@ -5737,6 +7828,92 @@
               <a:t>, no genéricas de Internet.</a:t>
             </a:r>
           </a:p>
+          <a:p>
+            <a:pPr>
+              <a:spcAft>
+                <a:spcPts val="800"/>
+              </a:spcAft>
+            </a:pPr>
+            <a:r>
+              <a:rPr sz="1600" b="0" i="0">
+                <a:solidFill>
+                  <a:srgbClr val="333333"/>
+                </a:solidFill>
+                <a:latin typeface="Calibri"/>
+              </a:rPr>
+              <a:t>–   La forma que se califica: </a:t>
+            </a:r>
+            <a:r>
+              <a:rPr sz="1600" b="1" i="0">
+                <a:solidFill>
+                  <a:srgbClr val="333333"/>
+                </a:solidFill>
+                <a:latin typeface="Calibri"/>
+              </a:rPr>
+              <a:t>actor o dato concreto</a:t>
+            </a:r>
+            <a:r>
+              <a:rPr sz="1600" b="0" i="0">
+                <a:solidFill>
+                  <a:srgbClr val="333333"/>
+                </a:solidFill>
+                <a:latin typeface="Calibri"/>
+              </a:rPr>
+              <a:t> + </a:t>
+            </a:r>
+            <a:r>
+              <a:rPr sz="1600" b="1" i="0">
+                <a:solidFill>
+                  <a:srgbClr val="333333"/>
+                </a:solidFill>
+                <a:latin typeface="Calibri"/>
+              </a:rPr>
+              <a:t>el camino</a:t>
+            </a:r>
+            <a:r>
+              <a:rPr sz="1600" b="0" i="0">
+                <a:solidFill>
+                  <a:srgbClr val="333333"/>
+                </a:solidFill>
+                <a:latin typeface="Calibri"/>
+              </a:rPr>
+              <a:t> por el que ocurre. Sin esas dos partes, la amenaza vale la mitad.</a:t>
+            </a:r>
+          </a:p>
+          <a:p>
+            <a:pPr>
+              <a:spcAft>
+                <a:spcPts val="800"/>
+              </a:spcAft>
+            </a:pPr>
+            <a:r>
+              <a:rPr sz="1600" b="0" i="0">
+                <a:solidFill>
+                  <a:srgbClr val="333333"/>
+                </a:solidFill>
+                <a:latin typeface="Calibri"/>
+              </a:rPr>
+              <a:t>–   «Fuga de información» es una categoría. «Un cliente lee el turno de otro porque «GET /turnos/17» no valida a quién pertenece» </a:t>
+            </a:r>
+            <a:r>
+              <a:rPr sz="1600" b="1" i="0">
+                <a:solidFill>
+                  <a:srgbClr val="333333"/>
+                </a:solidFill>
+                <a:latin typeface="Calibri"/>
+              </a:rPr>
+              <a:t>sí</a:t>
+            </a:r>
+            <a:r>
+              <a:rPr sz="1600" b="0" i="0">
+                <a:solidFill>
+                  <a:srgbClr val="333333"/>
+                </a:solidFill>
+                <a:latin typeface="Calibri"/>
+              </a:rPr>
+              <a:t> es una amenaza.</a:t>
+            </a:r>
+          </a:p>
         </p:txBody>
       </p:sp>
       <p:sp>
@@ -5954,7 +8131,25 @@
                 </a:solidFill>
                 <a:latin typeface="Calibri"/>
               </a:rPr>
-              <a:t>–   HTTPS en diagrama · tokens/JWT conceptual · least privilege en roles.</a:t>
+              <a:t>–   Identidad: autenticación con token · autorización por rol · </a:t>
+            </a:r>
+            <a:r>
+              <a:rPr sz="1600" b="1" i="0">
+                <a:solidFill>
+                  <a:srgbClr val="333333"/>
+                </a:solidFill>
+                <a:latin typeface="Calibri"/>
+              </a:rPr>
+              <a:t>menor privilegio</a:t>
+            </a:r>
+            <a:r>
+              <a:rPr sz="1600" b="0" i="0">
+                <a:solidFill>
+                  <a:srgbClr val="333333"/>
+                </a:solidFill>
+                <a:latin typeface="Calibri"/>
+              </a:rPr>
+              <a:t>.</a:t>
             </a:r>
           </a:p>
           <a:p>
@@ -5970,7 +8165,7 @@
                 </a:solidFill>
                 <a:latin typeface="Calibri"/>
               </a:rPr>
-              <a:t>–   Secretos: variables de entorno / GitHub Actions secrets (no en Dockerfile).</a:t>
+              <a:t>–   Red: publicar solo el punto de entrada; la base de datos sin acceso desde internet.</a:t>
             </a:r>
           </a:p>
           <a:p>
@@ -5986,7 +8181,57 @@
                 </a:solidFill>
                 <a:latin typeface="Calibri"/>
               </a:rPr>
-              <a:t>–   Superficie: qué puertos expone el contenedor del lab.</a:t>
+              <a:t>–   Aplicación: validar en el </a:t>
+            </a:r>
+            <a:r>
+              <a:rPr sz="1600" b="1" i="0">
+                <a:solidFill>
+                  <a:srgbClr val="333333"/>
+                </a:solidFill>
+                <a:latin typeface="Calibri"/>
+              </a:rPr>
+              <a:t>servidor</a:t>
+            </a:r>
+            <a:r>
+              <a:rPr sz="1600" b="0" i="0">
+                <a:solidFill>
+                  <a:srgbClr val="333333"/>
+                </a:solidFill>
+                <a:latin typeface="Calibri"/>
+              </a:rPr>
+              <a:t> (el formulario no cuenta) y limitar la tasa.</a:t>
+            </a:r>
+          </a:p>
+          <a:p>
+            <a:pPr>
+              <a:spcAft>
+                <a:spcPts val="800"/>
+              </a:spcAft>
+            </a:pPr>
+            <a:r>
+              <a:rPr sz="1600" b="0" i="0">
+                <a:solidFill>
+                  <a:srgbClr val="333333"/>
+                </a:solidFill>
+                <a:latin typeface="Calibri"/>
+              </a:rPr>
+              <a:t>–   Secretos: en los «secrets» del repositorio, inyectados como variable de entorno.</a:t>
+            </a:r>
+          </a:p>
+          <a:p>
+            <a:pPr>
+              <a:spcAft>
+                <a:spcPts val="800"/>
+              </a:spcAft>
+            </a:pPr>
+            <a:r>
+              <a:rPr sz="1600" b="0" i="0">
+                <a:solidFill>
+                  <a:srgbClr val="333333"/>
+                </a:solidFill>
+                <a:latin typeface="Calibri"/>
+              </a:rPr>
+              <a:t>–   Los dos que más puntos valen se abren en las siguientes dos diapositivas.</a:t>
             </a:r>
           </a:p>
         </p:txBody>
@@ -6167,7 +8412,7 @@
                 </a:solidFill>
                 <a:latin typeface="Calibri"/>
               </a:rPr>
-              <a:t>Ejercicio guiado</a:t>
+              <a:t>Menor privilegio: qué deja de poder hacer</a:t>
             </a:r>
           </a:p>
         </p:txBody>
@@ -6206,7 +8451,43 @@
                 </a:solidFill>
                 <a:latin typeface="Calibri"/>
               </a:rPr>
-              <a:t>–   Amenaza → activo → control → evidencia en diagrama/informe.</a:t>
+              <a:t>–   No es una definición, es una </a:t>
+            </a:r>
+            <a:r>
+              <a:rPr sz="1600" b="1" i="0">
+                <a:solidFill>
+                  <a:srgbClr val="333333"/>
+                </a:solidFill>
+                <a:latin typeface="Calibri"/>
+              </a:rPr>
+              <a:t>resta</a:t>
+            </a:r>
+            <a:r>
+              <a:rPr sz="1600" b="0" i="0">
+                <a:solidFill>
+                  <a:srgbClr val="333333"/>
+                </a:solidFill>
+                <a:latin typeface="Calibri"/>
+              </a:rPr>
+              <a:t>: se nombra el componente y lo que </a:t>
+            </a:r>
+            <a:r>
+              <a:rPr sz="1600" b="1" i="0">
+                <a:solidFill>
+                  <a:srgbClr val="333333"/>
+                </a:solidFill>
+                <a:latin typeface="Calibri"/>
+              </a:rPr>
+              <a:t>deja de poder hacer</a:t>
+            </a:r>
+            <a:r>
+              <a:rPr sz="1600" b="0" i="0">
+                <a:solidFill>
+                  <a:srgbClr val="333333"/>
+                </a:solidFill>
+                <a:latin typeface="Calibri"/>
+              </a:rPr>
+              <a:t> al aplicarlo. La pregunta 2 pide las dos mitades.</a:t>
             </a:r>
           </a:p>
           <a:p>
@@ -6222,7 +8503,109 @@
                 </a:solidFill>
                 <a:latin typeface="Calibri"/>
               </a:rPr>
-              <a:t>–   Ej.: Spoofing de API → tokens → caja Auth en C4.</a:t>
+              <a:t>–   Ejemplo sobre el C4 de la Clase 4: la «API de turnos» no entra a la «Base de turnos» como dueña de la base, sino con un rol propio.</a:t>
+            </a:r>
+          </a:p>
+          <a:p>
+            <a:pPr>
+              <a:spcAft>
+                <a:spcPts val="800"/>
+              </a:spcAft>
+            </a:pPr>
+            <a:r>
+              <a:rPr sz="1600" b="0" i="0">
+                <a:solidFill>
+                  <a:srgbClr val="333333"/>
+                </a:solidFill>
+                <a:latin typeface="Calibri"/>
+              </a:rPr>
+              <a:t>–   </a:t>
+            </a:r>
+            <a:r>
+              <a:rPr sz="1600" b="1" i="0">
+                <a:solidFill>
+                  <a:srgbClr val="333333"/>
+                </a:solidFill>
+                <a:latin typeface="Calibri"/>
+              </a:rPr>
+              <a:t>Puede</a:t>
+            </a:r>
+            <a:r>
+              <a:rPr sz="1600" b="0" i="0">
+                <a:solidFill>
+                  <a:srgbClr val="333333"/>
+                </a:solidFill>
+                <a:latin typeface="Calibri"/>
+              </a:rPr>
+              <a:t>: leer, insertar y actualizar sus tablas de turnos.</a:t>
+            </a:r>
+          </a:p>
+          <a:p>
+            <a:pPr>
+              <a:spcAft>
+                <a:spcPts val="800"/>
+              </a:spcAft>
+            </a:pPr>
+            <a:r>
+              <a:rPr sz="1600" b="0" i="0">
+                <a:solidFill>
+                  <a:srgbClr val="333333"/>
+                </a:solidFill>
+                <a:latin typeface="Calibri"/>
+              </a:rPr>
+              <a:t>–   </a:t>
+            </a:r>
+            <a:r>
+              <a:rPr sz="1600" b="1" i="0">
+                <a:solidFill>
+                  <a:srgbClr val="333333"/>
+                </a:solidFill>
+                <a:latin typeface="Calibri"/>
+              </a:rPr>
+              <a:t>No puede</a:t>
+            </a:r>
+            <a:r>
+              <a:rPr sz="1600" b="0" i="0">
+                <a:solidFill>
+                  <a:srgbClr val="333333"/>
+                </a:solidFill>
+                <a:latin typeface="Calibri"/>
+              </a:rPr>
+              <a:t>: borrar filas, cambiar la estructura, ni leer otro esquema.</a:t>
+            </a:r>
+          </a:p>
+          <a:p>
+            <a:pPr>
+              <a:spcAft>
+                <a:spcPts val="800"/>
+              </a:spcAft>
+            </a:pPr>
+            <a:r>
+              <a:rPr sz="1600" b="0" i="0">
+                <a:solidFill>
+                  <a:srgbClr val="333333"/>
+                </a:solidFill>
+                <a:latin typeface="Calibri"/>
+              </a:rPr>
+              <a:t>–   Por qué importa: si mañana hay una inyección de SQL, el atacante hereda </a:t>
+            </a:r>
+            <a:r>
+              <a:rPr sz="1600" b="1" i="0">
+                <a:solidFill>
+                  <a:srgbClr val="333333"/>
+                </a:solidFill>
+                <a:latin typeface="Calibri"/>
+              </a:rPr>
+              <a:t>esos</a:t>
+            </a:r>
+            <a:r>
+              <a:rPr sz="1600" b="0" i="0">
+                <a:solidFill>
+                  <a:srgbClr val="333333"/>
+                </a:solidFill>
+                <a:latin typeface="Calibri"/>
+              </a:rPr>
+              <a:t> permisos y no los del dueño. Hace daño, pero no borra la evidencia.</a:t>
             </a:r>
           </a:p>
         </p:txBody>
@@ -6403,141 +8786,404 @@
                 </a:solidFill>
                 <a:latin typeface="Calibri"/>
               </a:rPr>
-              <a:t>Amenaza -&gt; control -&gt; evidencia (una fila por amenaza)</a:t>
-            </a:r>
-          </a:p>
-        </p:txBody>
-      </p:sp>
-      <p:sp>
-        <p:nvSpPr>
-          <p:cNvPr id="5" name="Rounded Rectangle 4"/>
-          <p:cNvSpPr/>
-          <p:nvPr/>
-        </p:nvSpPr>
-        <p:spPr>
-          <a:xfrm>
-            <a:off x="457200" y="1261872"/>
-            <a:ext cx="11277295" cy="4773168"/>
-          </a:xfrm>
-          <a:prstGeom prst="roundRect">
-            <a:avLst>
-              <a:gd name="adj" fmla="val 12000"/>
-            </a:avLst>
-          </a:prstGeom>
-          <a:solidFill>
-            <a:srgbClr val="1E2A38"/>
-          </a:solidFill>
-          <a:ln>
-            <a:noFill/>
-          </a:ln>
-        </p:spPr>
-        <p:style>
-          <a:lnRef idx="1">
-            <a:schemeClr val="accent1"/>
-          </a:lnRef>
-          <a:fillRef idx="3">
-            <a:schemeClr val="accent1"/>
-          </a:fillRef>
-          <a:effectRef idx="2">
-            <a:schemeClr val="accent1"/>
-          </a:effectRef>
-          <a:fontRef idx="minor">
-            <a:schemeClr val="lt1"/>
-          </a:fontRef>
-        </p:style>
-        <p:txBody>
-          <a:bodyPr rtlCol="0" anchor="ctr"/>
-          <a:lstStyle/>
-          <a:p>
-            <a:pPr algn="ctr"/>
-          </a:p>
-        </p:txBody>
-      </p:sp>
-      <p:sp>
-        <p:nvSpPr>
-          <p:cNvPr id="6" name="Rectangle 5"/>
-          <p:cNvSpPr/>
-          <p:nvPr/>
-        </p:nvSpPr>
-        <p:spPr>
-          <a:xfrm>
-            <a:off x="457200" y="1261872"/>
-            <a:ext cx="11277295" cy="320040"/>
-          </a:xfrm>
-          <a:prstGeom prst="rect">
-            <a:avLst/>
-          </a:prstGeom>
-          <a:solidFill>
-            <a:srgbClr val="095292"/>
-          </a:solidFill>
-          <a:ln>
-            <a:noFill/>
-          </a:ln>
-        </p:spPr>
-        <p:style>
-          <a:lnRef idx="1">
-            <a:schemeClr val="accent1"/>
-          </a:lnRef>
-          <a:fillRef idx="3">
-            <a:schemeClr val="accent1"/>
-          </a:fillRef>
-          <a:effectRef idx="2">
-            <a:schemeClr val="accent1"/>
-          </a:effectRef>
-          <a:fontRef idx="minor">
-            <a:schemeClr val="lt1"/>
-          </a:fontRef>
-        </p:style>
-        <p:txBody>
-          <a:bodyPr rtlCol="0" anchor="ctr"/>
-          <a:lstStyle/>
-          <a:p>
-            <a:pPr algn="ctr"/>
-          </a:p>
-        </p:txBody>
-      </p:sp>
-      <p:sp>
-        <p:nvSpPr>
-          <p:cNvPr id="7" name="TextBox 6"/>
+              <a:t>Política de secretos: las cuatro preguntas</a:t>
+            </a:r>
+          </a:p>
+        </p:txBody>
+      </p:sp>
+      <p:graphicFrame>
+        <p:nvGraphicFramePr>
+          <p:cNvPr id="5" name="Table 4"/>
+          <p:cNvGraphicFramePr>
+            <a:graphicFrameLocks noGrp="1"/>
+          </p:cNvGraphicFramePr>
+          <p:nvPr/>
+        </p:nvGraphicFramePr>
+        <p:xfrm>
+          <a:off x="457200" y="1216152"/>
+          <a:ext cx="11277295" cy="2304288"/>
+        </p:xfrm>
+        <a:graphic>
+          <a:graphicData uri="http://schemas.openxmlformats.org/drawingml/2006/table">
+            <a:tbl>
+              <a:tblPr firstRow="1" bandRow="1">
+                <a:tableStyleId>{5C22544A-7EE6-4342-B048-85BDC9FD1C3A}</a:tableStyleId>
+              </a:tblPr>
+              <a:tblGrid>
+                <a:gridCol w="2286000"/>
+                <a:gridCol w="8991295"/>
+              </a:tblGrid>
+              <a:tr h="384048">
+                <a:tc>
+                  <a:txBody>
+                    <a:bodyPr/>
+                    <a:lstStyle/>
+                    <a:p>
+                      <a:r>
+                        <a:rPr sz="1200" b="1" i="0">
+                          <a:solidFill>
+                            <a:srgbClr val="FFFFFF"/>
+                          </a:solidFill>
+                          <a:latin typeface="Calibri"/>
+                        </a:rPr>
+                        <a:t>Lo que se pregunta</a:t>
+                      </a:r>
+                    </a:p>
+                  </a:txBody>
+                  <a:tcPr>
+                    <a:solidFill>
+                      <a:srgbClr val="095292"/>
+                    </a:solidFill>
+                  </a:tcPr>
+                </a:tc>
+                <a:tc>
+                  <a:txBody>
+                    <a:bodyPr/>
+                    <a:lstStyle/>
+                    <a:p>
+                      <a:r>
+                        <a:rPr sz="1200" b="1" i="0">
+                          <a:solidFill>
+                            <a:srgbClr val="FFFFFF"/>
+                          </a:solidFill>
+                          <a:latin typeface="Calibri"/>
+                        </a:rPr>
+                        <a:t>Respuesta concreta (así se califica)</a:t>
+                      </a:r>
+                    </a:p>
+                  </a:txBody>
+                  <a:tcPr>
+                    <a:solidFill>
+                      <a:srgbClr val="095292"/>
+                    </a:solidFill>
+                  </a:tcPr>
+                </a:tc>
+              </a:tr>
+              <a:tr h="384048">
+                <a:tc>
+                  <a:txBody>
+                    <a:bodyPr/>
+                    <a:lstStyle/>
+                    <a:p>
+                      <a:r>
+                        <a:rPr sz="1100" b="1" i="0">
+                          <a:solidFill>
+                            <a:srgbClr val="333333"/>
+                          </a:solidFill>
+                          <a:latin typeface="Calibri"/>
+                        </a:rPr>
+                        <a:t>1. Dónde viven</a:t>
+                      </a:r>
+                    </a:p>
+                  </a:txBody>
+                  <a:tcPr>
+                    <a:solidFill>
+                      <a:srgbClr val="FFFFFF"/>
+                    </a:solidFill>
+                  </a:tcPr>
+                </a:tc>
+                <a:tc>
+                  <a:txBody>
+                    <a:bodyPr/>
+                    <a:lstStyle/>
+                    <a:p>
+                      <a:r>
+                        <a:rPr sz="1100" b="0" i="0">
+                          <a:solidFill>
+                            <a:srgbClr val="333333"/>
+                          </a:solidFill>
+                          <a:latin typeface="Calibri"/>
+                        </a:rPr>
+                        <a:t>En los «secrets» del repositorio y en las variables de entorno del servicio. En local, un «.env» que está en «.gitignore» </a:t>
+                      </a:r>
+                      <a:r>
+                        <a:rPr sz="1100" b="1" i="0">
+                          <a:solidFill>
+                            <a:srgbClr val="333333"/>
+                          </a:solidFill>
+                          <a:latin typeface="Calibri"/>
+                        </a:rPr>
+                        <a:t>y</a:t>
+                      </a:r>
+                      <a:r>
+                        <a:rPr sz="1100" b="0" i="0">
+                          <a:solidFill>
+                            <a:srgbClr val="333333"/>
+                          </a:solidFill>
+                          <a:latin typeface="Calibri"/>
+                        </a:rPr>
+                        <a:t> en «.dockerignore»; se versiona «.env.example», con los nombres y </a:t>
+                      </a:r>
+                      <a:r>
+                        <a:rPr sz="1100" b="1" i="0">
+                          <a:solidFill>
+                            <a:srgbClr val="333333"/>
+                          </a:solidFill>
+                          <a:latin typeface="Calibri"/>
+                        </a:rPr>
+                        <a:t>ningún</a:t>
+                      </a:r>
+                      <a:r>
+                        <a:rPr sz="1100" b="0" i="0">
+                          <a:solidFill>
+                            <a:srgbClr val="333333"/>
+                          </a:solidFill>
+                          <a:latin typeface="Calibri"/>
+                        </a:rPr>
+                        <a:t> valor.</a:t>
+                      </a:r>
+                    </a:p>
+                  </a:txBody>
+                  <a:tcPr>
+                    <a:solidFill>
+                      <a:srgbClr val="FFFFFF"/>
+                    </a:solidFill>
+                  </a:tcPr>
+                </a:tc>
+              </a:tr>
+              <a:tr h="384048">
+                <a:tc>
+                  <a:txBody>
+                    <a:bodyPr/>
+                    <a:lstStyle/>
+                    <a:p>
+                      <a:r>
+                        <a:rPr sz="1100" b="1" i="0">
+                          <a:solidFill>
+                            <a:srgbClr val="333333"/>
+                          </a:solidFill>
+                          <a:latin typeface="Calibri"/>
+                        </a:rPr>
+                        <a:t>2. Quién los rota</a:t>
+                      </a:r>
+                    </a:p>
+                  </a:txBody>
+                  <a:tcPr>
+                    <a:solidFill>
+                      <a:srgbClr val="F2F2F2"/>
+                    </a:solidFill>
+                  </a:tcPr>
+                </a:tc>
+                <a:tc>
+                  <a:txBody>
+                    <a:bodyPr/>
+                    <a:lstStyle/>
+                    <a:p>
+                      <a:r>
+                        <a:rPr sz="1100" b="0" i="0">
+                          <a:solidFill>
+                            <a:srgbClr val="333333"/>
+                          </a:solidFill>
+                          <a:latin typeface="Calibri"/>
+                        </a:rPr>
+                        <a:t>Un </a:t>
+                      </a:r>
+                      <a:r>
+                        <a:rPr sz="1100" b="1" i="0">
+                          <a:solidFill>
+                            <a:srgbClr val="333333"/>
+                          </a:solidFill>
+                          <a:latin typeface="Calibri"/>
+                        </a:rPr>
+                        <a:t>responsable con rol</a:t>
+                      </a:r>
+                      <a:r>
+                        <a:rPr sz="1100" b="0" i="0">
+                          <a:solidFill>
+                            <a:srgbClr val="333333"/>
+                          </a:solidFill>
+                          <a:latin typeface="Calibri"/>
+                        </a:rPr>
+                        <a:t>, escrito en el README: el dueño del repositorio. «Se rotan automáticamente» no responde quién; alguien responde por que ocurra.</a:t>
+                      </a:r>
+                    </a:p>
+                  </a:txBody>
+                  <a:tcPr>
+                    <a:solidFill>
+                      <a:srgbClr val="F2F2F2"/>
+                    </a:solidFill>
+                  </a:tcPr>
+                </a:tc>
+              </a:tr>
+              <a:tr h="384048">
+                <a:tc>
+                  <a:txBody>
+                    <a:bodyPr/>
+                    <a:lstStyle/>
+                    <a:p>
+                      <a:r>
+                        <a:rPr sz="1100" b="1" i="0">
+                          <a:solidFill>
+                            <a:srgbClr val="333333"/>
+                          </a:solidFill>
+                          <a:latin typeface="Calibri"/>
+                        </a:rPr>
+                        <a:t>3. Cada cuánto</a:t>
+                      </a:r>
+                    </a:p>
+                  </a:txBody>
+                  <a:tcPr>
+                    <a:solidFill>
+                      <a:srgbClr val="FFFFFF"/>
+                    </a:solidFill>
+                  </a:tcPr>
+                </a:tc>
+                <a:tc>
+                  <a:txBody>
+                    <a:bodyPr/>
+                    <a:lstStyle/>
+                    <a:p>
+                      <a:r>
+                        <a:rPr sz="1100" b="0" i="0">
+                          <a:solidFill>
+                            <a:srgbClr val="333333"/>
+                          </a:solidFill>
+                          <a:latin typeface="Calibri"/>
+                        </a:rPr>
+                        <a:t>Un número o un evento del calendario: </a:t>
+                      </a:r>
+                      <a:r>
+                        <a:rPr sz="1100" b="1" i="0">
+                          <a:solidFill>
+                            <a:srgbClr val="333333"/>
+                          </a:solidFill>
+                          <a:latin typeface="Calibri"/>
+                        </a:rPr>
+                        <a:t>al cierre de cada corte</a:t>
+                      </a:r>
+                      <a:r>
+                        <a:rPr sz="1100" b="0" i="0">
+                          <a:solidFill>
+                            <a:srgbClr val="333333"/>
+                          </a:solidFill>
+                          <a:latin typeface="Calibri"/>
+                        </a:rPr>
+                        <a:t>, y en la entrega final. «Periódicamente» no es una frecuencia.</a:t>
+                      </a:r>
+                    </a:p>
+                  </a:txBody>
+                  <a:tcPr>
+                    <a:solidFill>
+                      <a:srgbClr val="FFFFFF"/>
+                    </a:solidFill>
+                  </a:tcPr>
+                </a:tc>
+              </a:tr>
+              <a:tr h="384048">
+                <a:tc>
+                  <a:txBody>
+                    <a:bodyPr/>
+                    <a:lstStyle/>
+                    <a:p>
+                      <a:r>
+                        <a:rPr sz="1100" b="1" i="0">
+                          <a:solidFill>
+                            <a:srgbClr val="333333"/>
+                          </a:solidFill>
+                          <a:latin typeface="Calibri"/>
+                        </a:rPr>
+                        <a:t>4. Qué está prohibido</a:t>
+                      </a:r>
+                    </a:p>
+                  </a:txBody>
+                  <a:tcPr>
+                    <a:solidFill>
+                      <a:srgbClr val="F2F2F2"/>
+                    </a:solidFill>
+                  </a:tcPr>
+                </a:tc>
+                <a:tc>
+                  <a:txBody>
+                    <a:bodyPr/>
+                    <a:lstStyle/>
+                    <a:p>
+                      <a:r>
+                        <a:rPr sz="1100" b="0" i="0">
+                          <a:solidFill>
+                            <a:srgbClr val="333333"/>
+                          </a:solidFill>
+                          <a:latin typeface="Calibri"/>
+                        </a:rPr>
+                        <a:t>El «Dockerfile», el «README», el YAML en claro — y también imprimir el secreto en el log del pipeline «para verificar que llegó».</a:t>
+                      </a:r>
+                    </a:p>
+                  </a:txBody>
+                  <a:tcPr>
+                    <a:solidFill>
+                      <a:srgbClr val="F2F2F2"/>
+                    </a:solidFill>
+                  </a:tcPr>
+                </a:tc>
+              </a:tr>
+              <a:tr h="384048">
+                <a:tc>
+                  <a:txBody>
+                    <a:bodyPr/>
+                    <a:lstStyle/>
+                    <a:p>
+                      <a:r>
+                        <a:rPr sz="1100" b="1" i="0">
+                          <a:solidFill>
+                            <a:srgbClr val="333333"/>
+                          </a:solidFill>
+                          <a:latin typeface="Calibri"/>
+                        </a:rPr>
+                        <a:t>Si se filtra</a:t>
+                      </a:r>
+                    </a:p>
+                  </a:txBody>
+                  <a:tcPr>
+                    <a:solidFill>
+                      <a:srgbClr val="FFFFFF"/>
+                    </a:solidFill>
+                  </a:tcPr>
+                </a:tc>
+                <a:tc>
+                  <a:txBody>
+                    <a:bodyPr/>
+                    <a:lstStyle/>
+                    <a:p>
+                      <a:r>
+                        <a:rPr sz="1100" b="1" i="0">
+                          <a:solidFill>
+                            <a:srgbClr val="333333"/>
+                          </a:solidFill>
+                          <a:latin typeface="Calibri"/>
+                        </a:rPr>
+                        <a:t>Primero rotar</a:t>
+                      </a:r>
+                      <a:r>
+                        <a:rPr sz="1100" b="0" i="0">
+                          <a:solidFill>
+                            <a:srgbClr val="333333"/>
+                          </a:solidFill>
+                          <a:latin typeface="Calibri"/>
+                        </a:rPr>
+                        <a:t>, después limpiar. Borrar el commit no arregla nada: el historial ya salió del equipo y sigue en cada clon.</a:t>
+                      </a:r>
+                    </a:p>
+                  </a:txBody>
+                  <a:tcPr>
+                    <a:solidFill>
+                      <a:srgbClr val="FFFFFF"/>
+                    </a:solidFill>
+                  </a:tcPr>
+                </a:tc>
+              </a:tr>
+            </a:tbl>
+          </a:graphicData>
+        </a:graphic>
+      </p:graphicFrame>
+      <p:sp>
+        <p:nvSpPr>
+          <p:cNvPr id="6" name="TextBox 5"/>
           <p:cNvSpPr txBox="1"/>
           <p:nvPr/>
         </p:nvSpPr>
         <p:spPr>
           <a:xfrm>
-            <a:off x="685800" y="1307592"/>
-            <a:ext cx="10820095" cy="256032"/>
-          </a:xfrm>
-          <a:prstGeom prst="rect">
-            <a:avLst/>
-          </a:prstGeom>
-          <a:noFill/>
-        </p:spPr>
-        <p:txBody>
-          <a:bodyPr wrap="square" anchor="ctr"/>
-          <a:lstStyle/>
-          <a:p>
-            <a:r>
-              <a:rPr sz="1000" b="1" i="0">
-                <a:solidFill>
-                  <a:srgbClr val="269CCB"/>
-                </a:solidFill>
-                <a:latin typeface="Calibri"/>
-              </a:rPr>
-              <a:t>● ● ●</a:t>
-            </a:r>
-          </a:p>
-        </p:txBody>
-      </p:sp>
-      <p:sp>
-        <p:nvSpPr>
-          <p:cNvPr id="8" name="TextBox 7"/>
-          <p:cNvSpPr txBox="1"/>
-          <p:nvPr/>
-        </p:nvSpPr>
-        <p:spPr>
-          <a:xfrm>
-            <a:off x="777240" y="1719072"/>
-            <a:ext cx="10637215" cy="4133087"/>
+            <a:off x="457200" y="4297680"/>
+            <a:ext cx="11277295" cy="457200"/>
           </a:xfrm>
           <a:prstGeom prst="rect">
             <a:avLst/>
@@ -6550,141 +9196,21 @@
           </a:bodyPr>
           <a:lstStyle/>
           <a:p>
-            <a:pPr>
-              <a:spcAft>
-                <a:spcPts val="400"/>
-              </a:spcAft>
-            </a:pPr>
-            <a:r>
-              <a:rPr sz="1400" b="0" i="0">
-                <a:solidFill>
-                  <a:srgbClr val="FFFFFF"/>
-                </a:solidFill>
-                <a:latin typeface="Calibri"/>
-              </a:rPr>
-              <a:t>STRIDE  | Amenaza concreta del dominio      | Control            | Evidencia</a:t>
-            </a:r>
-          </a:p>
-          <a:p>
-            <a:pPr>
-              <a:spcAft>
-                <a:spcPts val="400"/>
-              </a:spcAft>
-            </a:pPr>
-            <a:r>
-              <a:rPr sz="1400" b="0" i="0">
-                <a:solidFill>
-                  <a:srgbClr val="FFFFFF"/>
-                </a:solidFill>
-                <a:latin typeface="Calibri"/>
-              </a:rPr>
-              <a:t>--------|-----------------------------------|--------------------|-------------</a:t>
-            </a:r>
-          </a:p>
-          <a:p>
-            <a:pPr>
-              <a:spcAft>
-                <a:spcPts val="400"/>
-              </a:spcAft>
-            </a:pPr>
-            <a:r>
-              <a:rPr sz="1400" b="0" i="0">
-                <a:solidFill>
-                  <a:srgbClr val="FFFFFF"/>
-                </a:solidFill>
-                <a:latin typeface="Calibri"/>
-              </a:rPr>
-              <a:t>Spoof   | Cualquiera llama la API sin auth   | Token/JWT          | C4: flecha 'auth'</a:t>
-            </a:r>
-          </a:p>
-          <a:p>
-            <a:pPr>
-              <a:spcAft>
-                <a:spcPts val="400"/>
-              </a:spcAft>
-            </a:pPr>
-            <a:r>
-              <a:rPr sz="1400" b="0" i="0">
-                <a:solidFill>
-                  <a:srgbClr val="FFFFFF"/>
-                </a:solidFill>
-                <a:latin typeface="Calibri"/>
-              </a:rPr>
-              <a:t>Tamper  | Cambian el precio via API          | Rol + validacion   | Contrato del endpoint</a:t>
-            </a:r>
-          </a:p>
-          <a:p>
-            <a:pPr>
-              <a:spcAft>
-                <a:spcPts val="400"/>
-              </a:spcAft>
-            </a:pPr>
-            <a:r>
-              <a:rPr sz="1400" b="0" i="0">
-                <a:solidFill>
-                  <a:srgbClr val="FFFFFF"/>
-                </a:solidFill>
-                <a:latin typeface="Calibri"/>
-              </a:rPr>
-              <a:t>Info    | API key dentro de la imagen        | Actions Secrets    | .dockerignore</a:t>
-            </a:r>
-          </a:p>
-          <a:p>
-            <a:pPr>
-              <a:spcAft>
-                <a:spcPts val="400"/>
-              </a:spcAft>
-            </a:pPr>
-            <a:r>
-              <a:rPr sz="1400" b="0" i="0">
-                <a:solidFill>
-                  <a:srgbClr val="FFFFFF"/>
-                </a:solidFill>
-                <a:latin typeface="Calibri"/>
-              </a:rPr>
-              <a:t>DoS     | Pico de trafico tumba el API       | Rate limit         | Deployment: edge</a:t>
-            </a:r>
-          </a:p>
-        </p:txBody>
-      </p:sp>
-      <p:sp>
-        <p:nvSpPr>
-          <p:cNvPr id="9" name="TextBox 8"/>
-          <p:cNvSpPr txBox="1"/>
-          <p:nvPr/>
-        </p:nvSpPr>
-        <p:spPr>
-          <a:xfrm>
-            <a:off x="457200" y="6080760"/>
-            <a:ext cx="11277295" cy="320040"/>
-          </a:xfrm>
-          <a:prstGeom prst="rect">
-            <a:avLst/>
-          </a:prstGeom>
-          <a:noFill/>
-        </p:spPr>
-        <p:txBody>
-          <a:bodyPr wrap="square">
-            <a:spAutoFit/>
-          </a:bodyPr>
-          <a:lstStyle/>
-          <a:p>
-            <a:pPr algn="ctr"/>
-            <a:r>
-              <a:rPr sz="1200" b="0" i="1">
+            <a:r>
+              <a:rPr sz="1100" b="0" i="1">
                 <a:solidFill>
                   <a:srgbClr val="666666"/>
                 </a:solidFill>
                 <a:latin typeface="Calibri"/>
               </a:rPr>
-              <a:t>Una lista generica de buenas practicas no es un modelo de amenazas: falta el dominio.</a:t>
-            </a:r>
-          </a:p>
-        </p:txBody>
-      </p:sp>
-      <p:sp>
-        <p:nvSpPr>
-          <p:cNvPr id="10" name="TextBox 9"/>
+              <a:t>Un secreto en el Dockerfile queda en el historial de capas de la imagen: «docker history» lo lee aunque una capa posterior borre el archivo.</a:t>
+            </a:r>
+          </a:p>
+        </p:txBody>
+      </p:sp>
+      <p:sp>
+        <p:nvSpPr>
+          <p:cNvPr id="7" name="TextBox 6"/>
           <p:cNvSpPr txBox="1"/>
           <p:nvPr/>
         </p:nvSpPr>
@@ -6752,7 +9278,7 @@
         <p:spPr>
           <a:xfrm>
             <a:off x="0" y="0"/>
-            <a:ext cx="12191695" cy="1170432"/>
+            <a:ext cx="12191695" cy="960120"/>
           </a:xfrm>
           <a:prstGeom prst="rect">
             <a:avLst/>
@@ -6794,7 +9320,7 @@
         </p:nvSpPr>
         <p:spPr>
           <a:xfrm>
-            <a:off x="0" y="1170432"/>
+            <a:off x="0" y="960120"/>
             <a:ext cx="12191695" cy="41148"/>
           </a:xfrm>
           <a:prstGeom prst="rect">
@@ -6838,7 +9364,7 @@
         <p:spPr>
           <a:xfrm>
             <a:off x="457200" y="164592"/>
-            <a:ext cx="11277295" cy="384048"/>
+            <a:ext cx="11277295" cy="502920"/>
           </a:xfrm>
           <a:prstGeom prst="rect">
             <a:avLst/>
@@ -6858,7 +9384,7 @@
                 </a:solidFill>
                 <a:latin typeface="Calibri"/>
               </a:rPr>
-              <a:t>Herramientas de hoy</a:t>
+              <a:t>Ejercicio guiado</a:t>
             </a:r>
           </a:p>
         </p:txBody>
@@ -6871,8 +9397,8 @@
         </p:nvSpPr>
         <p:spPr>
           <a:xfrm>
-            <a:off x="457200" y="566928"/>
-            <a:ext cx="11277295" cy="411480"/>
+            <a:off x="457200" y="1170432"/>
+            <a:ext cx="11277295" cy="5230368"/>
           </a:xfrm>
           <a:prstGeom prst="rect">
             <a:avLst/>
@@ -6885,633 +9411,60 @@
           </a:bodyPr>
           <a:lstStyle/>
           <a:p>
-            <a:r>
-              <a:rPr sz="1400" b="0" i="0">
-                <a:solidFill>
-                  <a:srgbClr val="B8D8EE"/>
-                </a:solidFill>
-                <a:latin typeface="Calibri"/>
-              </a:rPr>
-              <a:t>Gratis · navegador o free tier · sin cuenta de pago</a:t>
-            </a:r>
-          </a:p>
-        </p:txBody>
-      </p:sp>
-      <p:sp>
-        <p:nvSpPr>
-          <p:cNvPr id="6" name="Rounded Rectangle 5"/>
-          <p:cNvSpPr/>
-          <p:nvPr/>
-        </p:nvSpPr>
-        <p:spPr>
-          <a:xfrm>
-            <a:off x="457200" y="1591056"/>
-            <a:ext cx="3624986" cy="2331720"/>
-          </a:xfrm>
-          <a:prstGeom prst="roundRect">
-            <a:avLst>
-              <a:gd name="adj" fmla="val 12000"/>
-            </a:avLst>
-          </a:prstGeom>
-          <a:solidFill>
-            <a:srgbClr val="F2F2F2"/>
-          </a:solidFill>
-          <a:ln>
-            <a:noFill/>
-          </a:ln>
-        </p:spPr>
-        <p:style>
-          <a:lnRef idx="1">
-            <a:schemeClr val="accent1"/>
-          </a:lnRef>
-          <a:fillRef idx="3">
-            <a:schemeClr val="accent1"/>
-          </a:fillRef>
-          <a:effectRef idx="2">
-            <a:schemeClr val="accent1"/>
-          </a:effectRef>
-          <a:fontRef idx="minor">
-            <a:schemeClr val="lt1"/>
-          </a:fontRef>
-        </p:style>
-        <p:txBody>
-          <a:bodyPr rtlCol="0" anchor="ctr"/>
-          <a:lstStyle/>
-          <a:p>
-            <a:pPr algn="ctr"/>
-          </a:p>
-        </p:txBody>
-      </p:sp>
-      <p:sp>
-        <p:nvSpPr>
-          <p:cNvPr id="7" name="Rectangle 6"/>
-          <p:cNvSpPr/>
-          <p:nvPr/>
-        </p:nvSpPr>
-        <p:spPr>
-          <a:xfrm>
-            <a:off x="457200" y="1591056"/>
-            <a:ext cx="3624986" cy="64008"/>
-          </a:xfrm>
-          <a:prstGeom prst="rect">
-            <a:avLst/>
-          </a:prstGeom>
-          <a:solidFill>
-            <a:srgbClr val="095292"/>
-          </a:solidFill>
-          <a:ln>
-            <a:noFill/>
-          </a:ln>
-        </p:spPr>
-        <p:style>
-          <a:lnRef idx="1">
-            <a:schemeClr val="accent1"/>
-          </a:lnRef>
-          <a:fillRef idx="3">
-            <a:schemeClr val="accent1"/>
-          </a:fillRef>
-          <a:effectRef idx="2">
-            <a:schemeClr val="accent1"/>
-          </a:effectRef>
-          <a:fontRef idx="minor">
-            <a:schemeClr val="lt1"/>
-          </a:fontRef>
-        </p:style>
-        <p:txBody>
-          <a:bodyPr rtlCol="0" anchor="ctr"/>
-          <a:lstStyle/>
-          <a:p>
-            <a:pPr algn="ctr"/>
-          </a:p>
-        </p:txBody>
-      </p:sp>
-      <p:sp>
-        <p:nvSpPr>
-          <p:cNvPr id="8" name="Rectangle 7"/>
-          <p:cNvSpPr/>
-          <p:nvPr/>
-        </p:nvSpPr>
-        <p:spPr>
-          <a:xfrm>
-            <a:off x="457200" y="1655064"/>
-            <a:ext cx="3624986" cy="27432"/>
-          </a:xfrm>
-          <a:prstGeom prst="rect">
-            <a:avLst/>
-          </a:prstGeom>
-          <a:solidFill>
-            <a:srgbClr val="FFD000"/>
-          </a:solidFill>
-          <a:ln>
-            <a:noFill/>
-          </a:ln>
-        </p:spPr>
-        <p:style>
-          <a:lnRef idx="1">
-            <a:schemeClr val="accent1"/>
-          </a:lnRef>
-          <a:fillRef idx="3">
-            <a:schemeClr val="accent1"/>
-          </a:fillRef>
-          <a:effectRef idx="2">
-            <a:schemeClr val="accent1"/>
-          </a:effectRef>
-          <a:fontRef idx="minor">
-            <a:schemeClr val="lt1"/>
-          </a:fontRef>
-        </p:style>
-        <p:txBody>
-          <a:bodyPr rtlCol="0" anchor="ctr"/>
-          <a:lstStyle/>
-          <a:p>
-            <a:pPr algn="ctr"/>
-          </a:p>
-        </p:txBody>
-      </p:sp>
-      <p:pic>
-        <p:nvPicPr>
-          <p:cNvPr id="9" name="Picture 8" descr="excalidraw.png"/>
-          <p:cNvPicPr>
-            <a:picLocks noChangeAspect="1"/>
-          </p:cNvPicPr>
-          <p:nvPr/>
-        </p:nvPicPr>
-        <p:blipFill>
-          <a:blip r:embed="rId2"/>
-          <a:stretch>
-            <a:fillRect/>
-          </a:stretch>
-        </p:blipFill>
-        <p:spPr>
-          <a:xfrm>
-            <a:off x="1643329" y="1847087"/>
-            <a:ext cx="1252728" cy="1252728"/>
-          </a:xfrm>
-          <a:prstGeom prst="rect">
-            <a:avLst/>
-          </a:prstGeom>
-        </p:spPr>
-      </p:pic>
-      <p:sp>
-        <p:nvSpPr>
-          <p:cNvPr id="10" name="TextBox 9"/>
-          <p:cNvSpPr txBox="1"/>
-          <p:nvPr/>
-        </p:nvSpPr>
-        <p:spPr>
-          <a:xfrm>
-            <a:off x="530352" y="3191256"/>
-            <a:ext cx="3478682" cy="621792"/>
-          </a:xfrm>
-          <a:prstGeom prst="rect">
-            <a:avLst/>
-          </a:prstGeom>
-          <a:noFill/>
-        </p:spPr>
-        <p:txBody>
-          <a:bodyPr wrap="square" anchor="t"/>
-          <a:lstStyle/>
-          <a:p>
-            <a:pPr algn="ctr"/>
-            <a:r>
-              <a:rPr sz="1300" b="1" i="0">
-                <a:solidFill>
-                  <a:srgbClr val="095292"/>
-                </a:solidFill>
-                <a:latin typeface="Calibri"/>
-              </a:rPr>
-              <a:t>Excalidraw</a:t>
-            </a:r>
-          </a:p>
-          <a:p>
-            <a:pPr algn="ctr">
-              <a:spcBef>
-                <a:spcPts val="200"/>
-              </a:spcBef>
+            <a:pPr>
+              <a:spcAft>
+                <a:spcPts val="800"/>
+              </a:spcAft>
             </a:pPr>
             <a:r>
-              <a:rPr sz="1000" b="0" i="0">
-                <a:solidFill>
-                  <a:srgbClr val="666666"/>
-                </a:solidFill>
-                <a:latin typeface="Calibri"/>
-              </a:rPr>
-              <a:t>Tabla STRIDE</a:t>
-            </a:r>
-          </a:p>
-        </p:txBody>
-      </p:sp>
-      <p:sp>
-        <p:nvSpPr>
-          <p:cNvPr id="11" name="Rounded Rectangle 10"/>
-          <p:cNvSpPr/>
-          <p:nvPr/>
-        </p:nvSpPr>
-        <p:spPr>
-          <a:xfrm>
-            <a:off x="4283354" y="1591056"/>
-            <a:ext cx="3624986" cy="2331720"/>
-          </a:xfrm>
-          <a:prstGeom prst="roundRect">
-            <a:avLst>
-              <a:gd name="adj" fmla="val 12000"/>
-            </a:avLst>
-          </a:prstGeom>
-          <a:solidFill>
-            <a:srgbClr val="F2F2F2"/>
-          </a:solidFill>
-          <a:ln>
-            <a:noFill/>
-          </a:ln>
-        </p:spPr>
-        <p:style>
-          <a:lnRef idx="1">
-            <a:schemeClr val="accent1"/>
-          </a:lnRef>
-          <a:fillRef idx="3">
-            <a:schemeClr val="accent1"/>
-          </a:fillRef>
-          <a:effectRef idx="2">
-            <a:schemeClr val="accent1"/>
-          </a:effectRef>
-          <a:fontRef idx="minor">
-            <a:schemeClr val="lt1"/>
-          </a:fontRef>
-        </p:style>
-        <p:txBody>
-          <a:bodyPr rtlCol="0" anchor="ctr"/>
-          <a:lstStyle/>
-          <a:p>
-            <a:pPr algn="ctr"/>
-          </a:p>
-        </p:txBody>
-      </p:sp>
-      <p:sp>
-        <p:nvSpPr>
-          <p:cNvPr id="12" name="Rectangle 11"/>
-          <p:cNvSpPr/>
-          <p:nvPr/>
-        </p:nvSpPr>
-        <p:spPr>
-          <a:xfrm>
-            <a:off x="4283354" y="1591056"/>
-            <a:ext cx="3624986" cy="64008"/>
-          </a:xfrm>
-          <a:prstGeom prst="rect">
-            <a:avLst/>
-          </a:prstGeom>
-          <a:solidFill>
-            <a:srgbClr val="095292"/>
-          </a:solidFill>
-          <a:ln>
-            <a:noFill/>
-          </a:ln>
-        </p:spPr>
-        <p:style>
-          <a:lnRef idx="1">
-            <a:schemeClr val="accent1"/>
-          </a:lnRef>
-          <a:fillRef idx="3">
-            <a:schemeClr val="accent1"/>
-          </a:fillRef>
-          <a:effectRef idx="2">
-            <a:schemeClr val="accent1"/>
-          </a:effectRef>
-          <a:fontRef idx="minor">
-            <a:schemeClr val="lt1"/>
-          </a:fontRef>
-        </p:style>
-        <p:txBody>
-          <a:bodyPr rtlCol="0" anchor="ctr"/>
-          <a:lstStyle/>
-          <a:p>
-            <a:pPr algn="ctr"/>
-          </a:p>
-        </p:txBody>
-      </p:sp>
-      <p:sp>
-        <p:nvSpPr>
-          <p:cNvPr id="13" name="Rectangle 12"/>
-          <p:cNvSpPr/>
-          <p:nvPr/>
-        </p:nvSpPr>
-        <p:spPr>
-          <a:xfrm>
-            <a:off x="4283354" y="1655064"/>
-            <a:ext cx="3624986" cy="27432"/>
-          </a:xfrm>
-          <a:prstGeom prst="rect">
-            <a:avLst/>
-          </a:prstGeom>
-          <a:solidFill>
-            <a:srgbClr val="FFD000"/>
-          </a:solidFill>
-          <a:ln>
-            <a:noFill/>
-          </a:ln>
-        </p:spPr>
-        <p:style>
-          <a:lnRef idx="1">
-            <a:schemeClr val="accent1"/>
-          </a:lnRef>
-          <a:fillRef idx="3">
-            <a:schemeClr val="accent1"/>
-          </a:fillRef>
-          <a:effectRef idx="2">
-            <a:schemeClr val="accent1"/>
-          </a:effectRef>
-          <a:fontRef idx="minor">
-            <a:schemeClr val="lt1"/>
-          </a:fontRef>
-        </p:style>
-        <p:txBody>
-          <a:bodyPr rtlCol="0" anchor="ctr"/>
-          <a:lstStyle/>
-          <a:p>
-            <a:pPr algn="ctr"/>
-          </a:p>
-        </p:txBody>
-      </p:sp>
-      <p:pic>
-        <p:nvPicPr>
-          <p:cNvPr id="14" name="Picture 13" descr="google_docs.png"/>
-          <p:cNvPicPr>
-            <a:picLocks noChangeAspect="1"/>
-          </p:cNvPicPr>
-          <p:nvPr/>
-        </p:nvPicPr>
-        <p:blipFill>
-          <a:blip r:embed="rId3"/>
-          <a:stretch>
-            <a:fillRect/>
-          </a:stretch>
-        </p:blipFill>
-        <p:spPr>
-          <a:xfrm>
-            <a:off x="5469483" y="1847087"/>
-            <a:ext cx="1252728" cy="1252728"/>
-          </a:xfrm>
-          <a:prstGeom prst="rect">
-            <a:avLst/>
-          </a:prstGeom>
-        </p:spPr>
-      </p:pic>
-      <p:sp>
-        <p:nvSpPr>
-          <p:cNvPr id="15" name="TextBox 14"/>
-          <p:cNvSpPr txBox="1"/>
-          <p:nvPr/>
-        </p:nvSpPr>
-        <p:spPr>
-          <a:xfrm>
-            <a:off x="4356506" y="3191256"/>
-            <a:ext cx="3478682" cy="621792"/>
-          </a:xfrm>
-          <a:prstGeom prst="rect">
-            <a:avLst/>
-          </a:prstGeom>
-          <a:noFill/>
-        </p:spPr>
-        <p:txBody>
-          <a:bodyPr wrap="square" anchor="t"/>
-          <a:lstStyle/>
-          <a:p>
-            <a:pPr algn="ctr"/>
-            <a:r>
-              <a:rPr sz="1300" b="1" i="0">
-                <a:solidFill>
-                  <a:srgbClr val="095292"/>
-                </a:solidFill>
-                <a:latin typeface="Calibri"/>
-              </a:rPr>
-              <a:t>Google Docs</a:t>
-            </a:r>
-          </a:p>
-          <a:p>
-            <a:pPr algn="ctr">
-              <a:spcBef>
-                <a:spcPts val="200"/>
-              </a:spcBef>
+              <a:rPr sz="1600" b="0" i="0">
+                <a:solidFill>
+                  <a:srgbClr val="333333"/>
+                </a:solidFill>
+                <a:latin typeface="Calibri"/>
+              </a:rPr>
+              <a:t>–   Amenaza → control → dónde se ve, en el diagrama que ya tienen.</a:t>
+            </a:r>
+          </a:p>
+          <a:p>
+            <a:pPr>
+              <a:spcAft>
+                <a:spcPts val="800"/>
+              </a:spcAft>
             </a:pPr>
             <a:r>
-              <a:rPr sz="1000" b="0" i="0">
-                <a:solidFill>
-                  <a:srgbClr val="666666"/>
-                </a:solidFill>
-                <a:latin typeface="Calibri"/>
-              </a:rPr>
-              <a:t>Informe PI</a:t>
-            </a:r>
-          </a:p>
-        </p:txBody>
-      </p:sp>
-      <p:sp>
-        <p:nvSpPr>
-          <p:cNvPr id="16" name="Rounded Rectangle 15"/>
-          <p:cNvSpPr/>
-          <p:nvPr/>
-        </p:nvSpPr>
-        <p:spPr>
-          <a:xfrm>
-            <a:off x="8109508" y="1591056"/>
-            <a:ext cx="3624986" cy="2331720"/>
-          </a:xfrm>
-          <a:prstGeom prst="roundRect">
-            <a:avLst>
-              <a:gd name="adj" fmla="val 12000"/>
-            </a:avLst>
-          </a:prstGeom>
-          <a:solidFill>
-            <a:srgbClr val="F2F2F2"/>
-          </a:solidFill>
-          <a:ln>
-            <a:noFill/>
-          </a:ln>
-        </p:spPr>
-        <p:style>
-          <a:lnRef idx="1">
-            <a:schemeClr val="accent1"/>
-          </a:lnRef>
-          <a:fillRef idx="3">
-            <a:schemeClr val="accent1"/>
-          </a:fillRef>
-          <a:effectRef idx="2">
-            <a:schemeClr val="accent1"/>
-          </a:effectRef>
-          <a:fontRef idx="minor">
-            <a:schemeClr val="lt1"/>
-          </a:fontRef>
-        </p:style>
-        <p:txBody>
-          <a:bodyPr rtlCol="0" anchor="ctr"/>
-          <a:lstStyle/>
-          <a:p>
-            <a:pPr algn="ctr"/>
-          </a:p>
-        </p:txBody>
-      </p:sp>
-      <p:sp>
-        <p:nvSpPr>
-          <p:cNvPr id="17" name="Rectangle 16"/>
-          <p:cNvSpPr/>
-          <p:nvPr/>
-        </p:nvSpPr>
-        <p:spPr>
-          <a:xfrm>
-            <a:off x="8109508" y="1591056"/>
-            <a:ext cx="3624986" cy="64008"/>
-          </a:xfrm>
-          <a:prstGeom prst="rect">
-            <a:avLst/>
-          </a:prstGeom>
-          <a:solidFill>
-            <a:srgbClr val="095292"/>
-          </a:solidFill>
-          <a:ln>
-            <a:noFill/>
-          </a:ln>
-        </p:spPr>
-        <p:style>
-          <a:lnRef idx="1">
-            <a:schemeClr val="accent1"/>
-          </a:lnRef>
-          <a:fillRef idx="3">
-            <a:schemeClr val="accent1"/>
-          </a:fillRef>
-          <a:effectRef idx="2">
-            <a:schemeClr val="accent1"/>
-          </a:effectRef>
-          <a:fontRef idx="minor">
-            <a:schemeClr val="lt1"/>
-          </a:fontRef>
-        </p:style>
-        <p:txBody>
-          <a:bodyPr rtlCol="0" anchor="ctr"/>
-          <a:lstStyle/>
-          <a:p>
-            <a:pPr algn="ctr"/>
-          </a:p>
-        </p:txBody>
-      </p:sp>
-      <p:sp>
-        <p:nvSpPr>
-          <p:cNvPr id="18" name="Rectangle 17"/>
-          <p:cNvSpPr/>
-          <p:nvPr/>
-        </p:nvSpPr>
-        <p:spPr>
-          <a:xfrm>
-            <a:off x="8109508" y="1655064"/>
-            <a:ext cx="3624986" cy="27432"/>
-          </a:xfrm>
-          <a:prstGeom prst="rect">
-            <a:avLst/>
-          </a:prstGeom>
-          <a:solidFill>
-            <a:srgbClr val="FFD000"/>
-          </a:solidFill>
-          <a:ln>
-            <a:noFill/>
-          </a:ln>
-        </p:spPr>
-        <p:style>
-          <a:lnRef idx="1">
-            <a:schemeClr val="accent1"/>
-          </a:lnRef>
-          <a:fillRef idx="3">
-            <a:schemeClr val="accent1"/>
-          </a:fillRef>
-          <a:effectRef idx="2">
-            <a:schemeClr val="accent1"/>
-          </a:effectRef>
-          <a:fontRef idx="minor">
-            <a:schemeClr val="lt1"/>
-          </a:fontRef>
-        </p:style>
-        <p:txBody>
-          <a:bodyPr rtlCol="0" anchor="ctr"/>
-          <a:lstStyle/>
-          <a:p>
-            <a:pPr algn="ctr"/>
-          </a:p>
-        </p:txBody>
-      </p:sp>
-      <p:pic>
-        <p:nvPicPr>
-          <p:cNvPr id="19" name="Picture 18" descr="examlab.png"/>
-          <p:cNvPicPr>
-            <a:picLocks noChangeAspect="1"/>
-          </p:cNvPicPr>
-          <p:nvPr/>
-        </p:nvPicPr>
-        <p:blipFill>
-          <a:blip r:embed="rId4"/>
-          <a:stretch>
-            <a:fillRect/>
-          </a:stretch>
-        </p:blipFill>
-        <p:spPr>
-          <a:xfrm>
-            <a:off x="9295638" y="1847087"/>
-            <a:ext cx="1252728" cy="1252728"/>
-          </a:xfrm>
-          <a:prstGeom prst="rect">
-            <a:avLst/>
-          </a:prstGeom>
-        </p:spPr>
-      </p:pic>
-      <p:sp>
-        <p:nvSpPr>
-          <p:cNvPr id="20" name="TextBox 19"/>
-          <p:cNvSpPr txBox="1"/>
-          <p:nvPr/>
-        </p:nvSpPr>
-        <p:spPr>
-          <a:xfrm>
-            <a:off x="8182660" y="3191256"/>
-            <a:ext cx="3478682" cy="621792"/>
-          </a:xfrm>
-          <a:prstGeom prst="rect">
-            <a:avLst/>
-          </a:prstGeom>
-          <a:noFill/>
-        </p:spPr>
-        <p:txBody>
-          <a:bodyPr wrap="square" anchor="t"/>
-          <a:lstStyle/>
-          <a:p>
-            <a:pPr algn="ctr"/>
-            <a:r>
-              <a:rPr sz="1300" b="1" i="0">
-                <a:solidFill>
-                  <a:srgbClr val="095292"/>
-                </a:solidFill>
-                <a:latin typeface="Calibri"/>
-              </a:rPr>
-              <a:t>ExamLab</a:t>
-            </a:r>
-          </a:p>
-          <a:p>
-            <a:pPr algn="ctr">
-              <a:spcBef>
-                <a:spcPts val="200"/>
-              </a:spcBef>
-            </a:pPr>
-            <a:r>
-              <a:rPr sz="1000" b="0" i="0">
-                <a:solidFill>
-                  <a:srgbClr val="666666"/>
-                </a:solidFill>
-                <a:latin typeface="Calibri"/>
-              </a:rPr>
-              <a:t>Donde se entrega</a:t>
-            </a:r>
-          </a:p>
-        </p:txBody>
-      </p:sp>
-      <p:sp>
-        <p:nvSpPr>
-          <p:cNvPr id="21" name="TextBox 20"/>
+              <a:rPr sz="1600" b="0" i="0">
+                <a:solidFill>
+                  <a:srgbClr val="333333"/>
+                </a:solidFill>
+                <a:latin typeface="Calibri"/>
+              </a:rPr>
+              <a:t>–   Ej.: llaman la API sin autenticar → token verificado → </a:t>
+            </a:r>
+            <a:r>
+              <a:rPr sz="1600" b="1" i="0">
+                <a:solidFill>
+                  <a:srgbClr val="333333"/>
+                </a:solidFill>
+                <a:latin typeface="Calibri"/>
+              </a:rPr>
+              <a:t>flecha</a:t>
+            </a:r>
+            <a:r>
+              <a:rPr sz="1600" b="0" i="0">
+                <a:solidFill>
+                  <a:srgbClr val="333333"/>
+                </a:solidFill>
+                <a:latin typeface="Calibri"/>
+              </a:rPr>
+              <a:t> «App web → API».</a:t>
+            </a:r>
+          </a:p>
+        </p:txBody>
+      </p:sp>
+      <p:sp>
+        <p:nvSpPr>
+          <p:cNvPr id="6" name="TextBox 5"/>
           <p:cNvSpPr txBox="1"/>
           <p:nvPr/>
         </p:nvSpPr>

--- a/Arquitectura de Sistemas Computacionales/Clases/Clase 6 - Seguridad en la nube/Presentacion.pptx
+++ b/Arquitectura de Sistemas Computacionales/Clases/Clase 6 - Seguridad en la nube/Presentacion.pptx
@@ -5699,7 +5699,7 @@
               </a:spcAft>
             </a:pPr>
             <a:r>
-              <a:rPr sz="1600" b="1" i="0">
+              <a:rPr sz="2000" b="1" i="0">
                 <a:solidFill>
                   <a:srgbClr val="333333"/>
                 </a:solidFill>
@@ -5708,7 +5708,7 @@
               <a:t>1.</a:t>
             </a:r>
             <a:r>
-              <a:rPr sz="1600" b="0" i="0">
+              <a:rPr sz="2000" b="0" i="0">
                 <a:solidFill>
                   <a:srgbClr val="333333"/>
                 </a:solidFill>
@@ -5724,7 +5724,7 @@
               </a:spcAft>
             </a:pPr>
             <a:r>
-              <a:rPr sz="1600" b="0" i="0">
+              <a:rPr sz="2000" b="0" i="0">
                 <a:solidFill>
                   <a:srgbClr val="333333"/>
                 </a:solidFill>
@@ -5733,7 +5733,7 @@
               <a:t>–   </a:t>
             </a:r>
             <a:r>
-              <a:rPr sz="1600" b="1" i="0">
+              <a:rPr sz="2000" b="1" i="0">
                 <a:solidFill>
                   <a:srgbClr val="333333"/>
                 </a:solidFill>
@@ -5742,7 +5742,7 @@
               <a:t>2.</a:t>
             </a:r>
             <a:r>
-              <a:rPr sz="1600" b="0" i="0">
+              <a:rPr sz="2000" b="0" i="0">
                 <a:solidFill>
                   <a:srgbClr val="333333"/>
                 </a:solidFill>
@@ -5758,7 +5758,7 @@
               </a:spcAft>
             </a:pPr>
             <a:r>
-              <a:rPr sz="1600" b="0" i="0">
+              <a:rPr sz="2000" b="0" i="0">
                 <a:solidFill>
                   <a:srgbClr val="333333"/>
                 </a:solidFill>
@@ -5767,7 +5767,7 @@
               <a:t>–   </a:t>
             </a:r>
             <a:r>
-              <a:rPr sz="1600" b="1" i="0">
+              <a:rPr sz="2000" b="1" i="0">
                 <a:solidFill>
                   <a:srgbClr val="333333"/>
                 </a:solidFill>
@@ -5776,7 +5776,7 @@
               <a:t>3.</a:t>
             </a:r>
             <a:r>
-              <a:rPr sz="1600" b="0" i="0">
+              <a:rPr sz="2000" b="0" i="0">
                 <a:solidFill>
                   <a:srgbClr val="333333"/>
                 </a:solidFill>
@@ -5792,7 +5792,7 @@
               </a:spcAft>
             </a:pPr>
             <a:r>
-              <a:rPr sz="1600" b="0" i="0">
+              <a:rPr sz="2000" b="0" i="0">
                 <a:solidFill>
                   <a:srgbClr val="333333"/>
                 </a:solidFill>
@@ -5801,7 +5801,7 @@
               <a:t>–   </a:t>
             </a:r>
             <a:r>
-              <a:rPr sz="1600" b="1" i="0">
+              <a:rPr sz="2000" b="1" i="0">
                 <a:solidFill>
                   <a:srgbClr val="333333"/>
                 </a:solidFill>
@@ -5810,7 +5810,7 @@
               <a:t>4.</a:t>
             </a:r>
             <a:r>
-              <a:rPr sz="1600" b="0" i="0">
+              <a:rPr sz="2000" b="0" i="0">
                 <a:solidFill>
                   <a:srgbClr val="333333"/>
                 </a:solidFill>
@@ -6857,7 +6857,7 @@
               </a:spcAft>
             </a:pPr>
             <a:r>
-              <a:rPr sz="1600" b="0" i="0">
+              <a:rPr sz="2000" b="0" i="0">
                 <a:solidFill>
                   <a:srgbClr val="333333"/>
                 </a:solidFill>
@@ -6866,7 +6866,7 @@
               <a:t>–   </a:t>
             </a:r>
             <a:r>
-              <a:rPr sz="1600" b="1" i="0">
+              <a:rPr sz="2000" b="1" i="0">
                 <a:solidFill>
                   <a:srgbClr val="333333"/>
                 </a:solidFill>
@@ -6875,7 +6875,7 @@
               <a:t>0–10</a:t>
             </a:r>
             <a:r>
-              <a:rPr sz="1600" b="0" i="0">
+              <a:rPr sz="2000" b="0" i="0">
                 <a:solidFill>
                   <a:srgbClr val="333333"/>
                 </a:solidFill>
@@ -6891,7 +6891,7 @@
               </a:spcAft>
             </a:pPr>
             <a:r>
-              <a:rPr sz="1600" b="1" i="0">
+              <a:rPr sz="2000" b="1" i="0">
                 <a:solidFill>
                   <a:srgbClr val="333333"/>
                 </a:solidFill>
@@ -6900,7 +6900,7 @@
               <a:t>10–40</a:t>
             </a:r>
             <a:r>
-              <a:rPr sz="1600" b="0" i="0">
+              <a:rPr sz="2000" b="0" i="0">
                 <a:solidFill>
                   <a:srgbClr val="333333"/>
                 </a:solidFill>
@@ -6916,7 +6916,7 @@
               </a:spcAft>
             </a:pPr>
             <a:r>
-              <a:rPr sz="1600" b="0" i="0">
+              <a:rPr sz="2000" b="0" i="0">
                 <a:solidFill>
                   <a:srgbClr val="333333"/>
                 </a:solidFill>
@@ -6925,7 +6925,7 @@
               <a:t>–   </a:t>
             </a:r>
             <a:r>
-              <a:rPr sz="1600" b="1" i="0">
+              <a:rPr sz="2000" b="1" i="0">
                 <a:solidFill>
                   <a:srgbClr val="333333"/>
                 </a:solidFill>
@@ -6934,7 +6934,7 @@
               <a:t>40–100</a:t>
             </a:r>
             <a:r>
-              <a:rPr sz="1600" b="0" i="0">
+              <a:rPr sz="2000" b="0" i="0">
                 <a:solidFill>
                   <a:srgbClr val="333333"/>
                 </a:solidFill>
@@ -6950,7 +6950,7 @@
               </a:spcAft>
             </a:pPr>
             <a:r>
-              <a:rPr sz="1600" b="1" i="0">
+              <a:rPr sz="2000" b="1" i="0">
                 <a:solidFill>
                   <a:srgbClr val="333333"/>
                 </a:solidFill>
@@ -6959,7 +6959,7 @@
               <a:t>100–115</a:t>
             </a:r>
             <a:r>
-              <a:rPr sz="1600" b="0" i="0">
+              <a:rPr sz="2000" b="0" i="0">
                 <a:solidFill>
                   <a:srgbClr val="333333"/>
                 </a:solidFill>
@@ -6975,7 +6975,7 @@
               </a:spcAft>
             </a:pPr>
             <a:r>
-              <a:rPr sz="1600" b="1" i="0">
+              <a:rPr sz="2000" b="1" i="0">
                 <a:solidFill>
                   <a:srgbClr val="333333"/>
                 </a:solidFill>
@@ -6984,7 +6984,7 @@
               <a:t>115–120</a:t>
             </a:r>
             <a:r>
-              <a:rPr sz="1600" b="0" i="0">
+              <a:rPr sz="2000" b="0" i="0">
                 <a:solidFill>
                   <a:srgbClr val="333333"/>
                 </a:solidFill>
@@ -7204,7 +7204,7 @@
               </a:spcAft>
             </a:pPr>
             <a:r>
-              <a:rPr sz="1600" b="0" i="0">
+              <a:rPr sz="2000" b="0" i="0">
                 <a:solidFill>
                   <a:srgbClr val="333333"/>
                 </a:solidFill>
@@ -7220,7 +7220,7 @@
               </a:spcAft>
             </a:pPr>
             <a:r>
-              <a:rPr sz="1600" b="0" i="0">
+              <a:rPr sz="2000" b="0" i="0">
                 <a:solidFill>
                   <a:srgbClr val="333333"/>
                 </a:solidFill>
@@ -7236,7 +7236,7 @@
               </a:spcAft>
             </a:pPr>
             <a:r>
-              <a:rPr sz="1600" b="0" i="0">
+              <a:rPr sz="2000" b="0" i="0">
                 <a:solidFill>
                   <a:srgbClr val="333333"/>
                 </a:solidFill>
@@ -7456,7 +7456,7 @@
               </a:spcAft>
             </a:pPr>
             <a:r>
-              <a:rPr sz="1600" b="0" i="0">
+              <a:rPr sz="2000" b="0" i="0">
                 <a:solidFill>
                   <a:srgbClr val="333333"/>
                 </a:solidFill>
@@ -7465,7 +7465,7 @@
               <a:t>–   </a:t>
             </a:r>
             <a:r>
-              <a:rPr sz="1600" b="1" i="0">
+              <a:rPr sz="2000" b="1" i="0">
                 <a:solidFill>
                   <a:srgbClr val="333333"/>
                 </a:solidFill>
@@ -7474,7 +7474,7 @@
               <a:t>Entregable:</a:t>
             </a:r>
             <a:r>
-              <a:rPr sz="1600" b="0" i="0">
+              <a:rPr sz="2000" b="0" i="0">
                 <a:solidFill>
                   <a:srgbClr val="333333"/>
                 </a:solidFill>
@@ -7490,7 +7490,7 @@
               </a:spcAft>
             </a:pPr>
             <a:r>
-              <a:rPr sz="1600" b="0" i="0">
+              <a:rPr sz="2000" b="0" i="0">
                 <a:solidFill>
                   <a:srgbClr val="333333"/>
                 </a:solidFill>
@@ -7499,7 +7499,7 @@
               <a:t>–   Herramienta: </a:t>
             </a:r>
             <a:r>
-              <a:rPr sz="1600" b="1" i="0">
+              <a:rPr sz="2000" b="1" i="0">
                 <a:solidFill>
                   <a:srgbClr val="333333"/>
                 </a:solidFill>
@@ -7515,7 +7515,7 @@
               </a:spcAft>
             </a:pPr>
             <a:r>
-              <a:rPr sz="1600" b="0" i="0">
+              <a:rPr sz="2000" b="0" i="0">
                 <a:solidFill>
                   <a:srgbClr val="333333"/>
                 </a:solidFill>
@@ -7524,7 +7524,7 @@
               <a:t>–   Todo lo que construyan hoy entra al </a:t>
             </a:r>
             <a:r>
-              <a:rPr sz="1600" b="1" i="0">
+              <a:rPr sz="2000" b="1" i="0">
                 <a:solidFill>
                   <a:srgbClr val="333333"/>
                 </a:solidFill>
@@ -7533,7 +7533,7 @@
               <a:t>informe/repo del PI</a:t>
             </a:r>
             <a:r>
-              <a:rPr sz="1600" b="0" i="0">
+              <a:rPr sz="2000" b="0" i="0">
                 <a:solidFill>
                   <a:srgbClr val="333333"/>
                 </a:solidFill>
@@ -7549,7 +7549,7 @@
               </a:spcAft>
             </a:pPr>
             <a:r>
-              <a:rPr sz="1600" b="0" i="0">
+              <a:rPr sz="2000" b="0" i="0">
                 <a:solidFill>
                   <a:srgbClr val="333333"/>
                 </a:solidFill>
@@ -7769,7 +7769,7 @@
               </a:spcAft>
             </a:pPr>
             <a:r>
-              <a:rPr sz="1600" b="0" i="0">
+              <a:rPr sz="2000" b="0" i="0">
                 <a:solidFill>
                   <a:srgbClr val="333333"/>
                 </a:solidFill>
@@ -7785,7 +7785,7 @@
               </a:spcAft>
             </a:pPr>
             <a:r>
-              <a:rPr sz="1600" b="0" i="0">
+              <a:rPr sz="2000" b="0" i="0">
                 <a:solidFill>
                   <a:srgbClr val="333333"/>
                 </a:solidFill>
@@ -7801,7 +7801,7 @@
               </a:spcAft>
             </a:pPr>
             <a:r>
-              <a:rPr sz="1600" b="0" i="0">
+              <a:rPr sz="2000" b="0" i="0">
                 <a:solidFill>
                   <a:srgbClr val="333333"/>
                 </a:solidFill>
@@ -7810,7 +7810,7 @@
               <a:t>–   Elijan 5 amenazas </a:t>
             </a:r>
             <a:r>
-              <a:rPr sz="1600" b="1" i="0">
+              <a:rPr sz="2000" b="1" i="0">
                 <a:solidFill>
                   <a:srgbClr val="333333"/>
                 </a:solidFill>
@@ -7819,7 +7819,7 @@
               <a:t>del dominio</a:t>
             </a:r>
             <a:r>
-              <a:rPr sz="1600" b="0" i="0">
+              <a:rPr sz="2000" b="0" i="0">
                 <a:solidFill>
                   <a:srgbClr val="333333"/>
                 </a:solidFill>
@@ -7835,7 +7835,7 @@
               </a:spcAft>
             </a:pPr>
             <a:r>
-              <a:rPr sz="1600" b="0" i="0">
+              <a:rPr sz="2000" b="0" i="0">
                 <a:solidFill>
                   <a:srgbClr val="333333"/>
                 </a:solidFill>
@@ -7844,7 +7844,7 @@
               <a:t>–   La forma que se califica: </a:t>
             </a:r>
             <a:r>
-              <a:rPr sz="1600" b="1" i="0">
+              <a:rPr sz="2000" b="1" i="0">
                 <a:solidFill>
                   <a:srgbClr val="333333"/>
                 </a:solidFill>
@@ -7853,7 +7853,7 @@
               <a:t>actor o dato concreto</a:t>
             </a:r>
             <a:r>
-              <a:rPr sz="1600" b="0" i="0">
+              <a:rPr sz="2000" b="0" i="0">
                 <a:solidFill>
                   <a:srgbClr val="333333"/>
                 </a:solidFill>
@@ -7862,7 +7862,7 @@
               <a:t> + </a:t>
             </a:r>
             <a:r>
-              <a:rPr sz="1600" b="1" i="0">
+              <a:rPr sz="2000" b="1" i="0">
                 <a:solidFill>
                   <a:srgbClr val="333333"/>
                 </a:solidFill>
@@ -7871,7 +7871,7 @@
               <a:t>el camino</a:t>
             </a:r>
             <a:r>
-              <a:rPr sz="1600" b="0" i="0">
+              <a:rPr sz="2000" b="0" i="0">
                 <a:solidFill>
                   <a:srgbClr val="333333"/>
                 </a:solidFill>
@@ -7887,7 +7887,7 @@
               </a:spcAft>
             </a:pPr>
             <a:r>
-              <a:rPr sz="1600" b="0" i="0">
+              <a:rPr sz="2000" b="0" i="0">
                 <a:solidFill>
                   <a:srgbClr val="333333"/>
                 </a:solidFill>
@@ -7896,7 +7896,7 @@
               <a:t>–   «Fuga de información» es una categoría. «Un cliente lee el turno de otro porque «GET /turnos/17» no valida a quién pertenece» </a:t>
             </a:r>
             <a:r>
-              <a:rPr sz="1600" b="1" i="0">
+              <a:rPr sz="2000" b="1" i="0">
                 <a:solidFill>
                   <a:srgbClr val="333333"/>
                 </a:solidFill>
@@ -7905,7 +7905,7 @@
               <a:t>sí</a:t>
             </a:r>
             <a:r>
-              <a:rPr sz="1600" b="0" i="0">
+              <a:rPr sz="2000" b="0" i="0">
                 <a:solidFill>
                   <a:srgbClr val="333333"/>
                 </a:solidFill>
@@ -8125,7 +8125,7 @@
               </a:spcAft>
             </a:pPr>
             <a:r>
-              <a:rPr sz="1600" b="0" i="0">
+              <a:rPr sz="2000" b="0" i="0">
                 <a:solidFill>
                   <a:srgbClr val="333333"/>
                 </a:solidFill>
@@ -8134,7 +8134,7 @@
               <a:t>–   Identidad: autenticación con token · autorización por rol · </a:t>
             </a:r>
             <a:r>
-              <a:rPr sz="1600" b="1" i="0">
+              <a:rPr sz="2000" b="1" i="0">
                 <a:solidFill>
                   <a:srgbClr val="333333"/>
                 </a:solidFill>
@@ -8143,7 +8143,7 @@
               <a:t>menor privilegio</a:t>
             </a:r>
             <a:r>
-              <a:rPr sz="1600" b="0" i="0">
+              <a:rPr sz="2000" b="0" i="0">
                 <a:solidFill>
                   <a:srgbClr val="333333"/>
                 </a:solidFill>
@@ -8159,7 +8159,7 @@
               </a:spcAft>
             </a:pPr>
             <a:r>
-              <a:rPr sz="1600" b="0" i="0">
+              <a:rPr sz="2000" b="0" i="0">
                 <a:solidFill>
                   <a:srgbClr val="333333"/>
                 </a:solidFill>
@@ -8175,7 +8175,7 @@
               </a:spcAft>
             </a:pPr>
             <a:r>
-              <a:rPr sz="1600" b="0" i="0">
+              <a:rPr sz="2000" b="0" i="0">
                 <a:solidFill>
                   <a:srgbClr val="333333"/>
                 </a:solidFill>
@@ -8184,7 +8184,7 @@
               <a:t>–   Aplicación: validar en el </a:t>
             </a:r>
             <a:r>
-              <a:rPr sz="1600" b="1" i="0">
+              <a:rPr sz="2000" b="1" i="0">
                 <a:solidFill>
                   <a:srgbClr val="333333"/>
                 </a:solidFill>
@@ -8193,7 +8193,7 @@
               <a:t>servidor</a:t>
             </a:r>
             <a:r>
-              <a:rPr sz="1600" b="0" i="0">
+              <a:rPr sz="2000" b="0" i="0">
                 <a:solidFill>
                   <a:srgbClr val="333333"/>
                 </a:solidFill>
@@ -8209,7 +8209,7 @@
               </a:spcAft>
             </a:pPr>
             <a:r>
-              <a:rPr sz="1600" b="0" i="0">
+              <a:rPr sz="2000" b="0" i="0">
                 <a:solidFill>
                   <a:srgbClr val="333333"/>
                 </a:solidFill>
@@ -8225,7 +8225,7 @@
               </a:spcAft>
             </a:pPr>
             <a:r>
-              <a:rPr sz="1600" b="0" i="0">
+              <a:rPr sz="2000" b="0" i="0">
                 <a:solidFill>
                   <a:srgbClr val="333333"/>
                 </a:solidFill>
@@ -8445,7 +8445,7 @@
               </a:spcAft>
             </a:pPr>
             <a:r>
-              <a:rPr sz="1600" b="0" i="0">
+              <a:rPr sz="2000" b="0" i="0">
                 <a:solidFill>
                   <a:srgbClr val="333333"/>
                 </a:solidFill>
@@ -8454,7 +8454,7 @@
               <a:t>–   No es una definición, es una </a:t>
             </a:r>
             <a:r>
-              <a:rPr sz="1600" b="1" i="0">
+              <a:rPr sz="2000" b="1" i="0">
                 <a:solidFill>
                   <a:srgbClr val="333333"/>
                 </a:solidFill>
@@ -8463,7 +8463,7 @@
               <a:t>resta</a:t>
             </a:r>
             <a:r>
-              <a:rPr sz="1600" b="0" i="0">
+              <a:rPr sz="2000" b="0" i="0">
                 <a:solidFill>
                   <a:srgbClr val="333333"/>
                 </a:solidFill>
@@ -8472,7 +8472,7 @@
               <a:t>: se nombra el componente y lo que </a:t>
             </a:r>
             <a:r>
-              <a:rPr sz="1600" b="1" i="0">
+              <a:rPr sz="2000" b="1" i="0">
                 <a:solidFill>
                   <a:srgbClr val="333333"/>
                 </a:solidFill>
@@ -8481,7 +8481,7 @@
               <a:t>deja de poder hacer</a:t>
             </a:r>
             <a:r>
-              <a:rPr sz="1600" b="0" i="0">
+              <a:rPr sz="2000" b="0" i="0">
                 <a:solidFill>
                   <a:srgbClr val="333333"/>
                 </a:solidFill>
@@ -8497,7 +8497,7 @@
               </a:spcAft>
             </a:pPr>
             <a:r>
-              <a:rPr sz="1600" b="0" i="0">
+              <a:rPr sz="2000" b="0" i="0">
                 <a:solidFill>
                   <a:srgbClr val="333333"/>
                 </a:solidFill>
@@ -8513,7 +8513,7 @@
               </a:spcAft>
             </a:pPr>
             <a:r>
-              <a:rPr sz="1600" b="0" i="0">
+              <a:rPr sz="2000" b="0" i="0">
                 <a:solidFill>
                   <a:srgbClr val="333333"/>
                 </a:solidFill>
@@ -8522,7 +8522,7 @@
               <a:t>–   </a:t>
             </a:r>
             <a:r>
-              <a:rPr sz="1600" b="1" i="0">
+              <a:rPr sz="2000" b="1" i="0">
                 <a:solidFill>
                   <a:srgbClr val="333333"/>
                 </a:solidFill>
@@ -8531,7 +8531,7 @@
               <a:t>Puede</a:t>
             </a:r>
             <a:r>
-              <a:rPr sz="1600" b="0" i="0">
+              <a:rPr sz="2000" b="0" i="0">
                 <a:solidFill>
                   <a:srgbClr val="333333"/>
                 </a:solidFill>
@@ -8547,7 +8547,7 @@
               </a:spcAft>
             </a:pPr>
             <a:r>
-              <a:rPr sz="1600" b="0" i="0">
+              <a:rPr sz="2000" b="0" i="0">
                 <a:solidFill>
                   <a:srgbClr val="333333"/>
                 </a:solidFill>
@@ -8556,7 +8556,7 @@
               <a:t>–   </a:t>
             </a:r>
             <a:r>
-              <a:rPr sz="1600" b="1" i="0">
+              <a:rPr sz="2000" b="1" i="0">
                 <a:solidFill>
                   <a:srgbClr val="333333"/>
                 </a:solidFill>
@@ -8565,7 +8565,7 @@
               <a:t>No puede</a:t>
             </a:r>
             <a:r>
-              <a:rPr sz="1600" b="0" i="0">
+              <a:rPr sz="2000" b="0" i="0">
                 <a:solidFill>
                   <a:srgbClr val="333333"/>
                 </a:solidFill>
@@ -8581,7 +8581,7 @@
               </a:spcAft>
             </a:pPr>
             <a:r>
-              <a:rPr sz="1600" b="0" i="0">
+              <a:rPr sz="2000" b="0" i="0">
                 <a:solidFill>
                   <a:srgbClr val="333333"/>
                 </a:solidFill>
@@ -8590,7 +8590,7 @@
               <a:t>–   Por qué importa: si mañana hay una inyección de SQL, el atacante hereda </a:t>
             </a:r>
             <a:r>
-              <a:rPr sz="1600" b="1" i="0">
+              <a:rPr sz="2000" b="1" i="0">
                 <a:solidFill>
                   <a:srgbClr val="333333"/>
                 </a:solidFill>
@@ -8599,7 +8599,7 @@
               <a:t>esos</a:t>
             </a:r>
             <a:r>
-              <a:rPr sz="1600" b="0" i="0">
+              <a:rPr sz="2000" b="0" i="0">
                 <a:solidFill>
                   <a:srgbClr val="333333"/>
                 </a:solidFill>
@@ -9417,7 +9417,7 @@
               </a:spcAft>
             </a:pPr>
             <a:r>
-              <a:rPr sz="1600" b="0" i="0">
+              <a:rPr sz="2000" b="0" i="0">
                 <a:solidFill>
                   <a:srgbClr val="333333"/>
                 </a:solidFill>
@@ -9433,7 +9433,7 @@
               </a:spcAft>
             </a:pPr>
             <a:r>
-              <a:rPr sz="1600" b="0" i="0">
+              <a:rPr sz="2000" b="0" i="0">
                 <a:solidFill>
                   <a:srgbClr val="333333"/>
                 </a:solidFill>
@@ -9442,7 +9442,7 @@
               <a:t>–   Ej.: llaman la API sin autenticar → token verificado → </a:t>
             </a:r>
             <a:r>
-              <a:rPr sz="1600" b="1" i="0">
+              <a:rPr sz="2000" b="1" i="0">
                 <a:solidFill>
                   <a:srgbClr val="333333"/>
                 </a:solidFill>
@@ -9451,7 +9451,7 @@
               <a:t>flecha</a:t>
             </a:r>
             <a:r>
-              <a:rPr sz="1600" b="0" i="0">
+              <a:rPr sz="2000" b="0" i="0">
                 <a:solidFill>
                   <a:srgbClr val="333333"/>
                 </a:solidFill>

--- a/Arquitectura de Sistemas Computacionales/Clases/Clase 6 - Seguridad en la nube/Presentacion.pptx
+++ b/Arquitectura de Sistemas Computacionales/Clases/Clase 6 - Seguridad en la nube/Presentacion.pptx
@@ -5469,7 +5469,7 @@
                 </a:solidFill>
                 <a:latin typeface="Calibri"/>
               </a:rPr>
-              <a:t>ExamLab</a:t>
+              <a:t>la plataforma del curso</a:t>
             </a:r>
           </a:p>
           <a:p>
@@ -6273,7 +6273,7 @@
                 </a:solidFill>
                 <a:latin typeface="Calibri"/>
               </a:rPr>
-              <a:t>Subir evidencias al paquete CloudLite (Drive/repo) y a ExamLab (https://uniaj.examlab.workers.dev/) domingo 23:59.</a:t>
+              <a:t>Subir evidencias al paquete CloudLite (Drive/repo) y a la plataforma del curso en la fecha que indique el docente.</a:t>
             </a:r>
           </a:p>
         </p:txBody>
@@ -6990,7 +6990,7 @@
                 </a:solidFill>
                 <a:latin typeface="Calibri"/>
               </a:rPr>
-              <a:t> Cierre: criterio de éxito + plazo domingo 23:59.</a:t>
+              <a:t> Cierre: criterio de éxito + plazo en la fecha que indique el docente.</a:t>
             </a:r>
           </a:p>
         </p:txBody>
@@ -7505,7 +7505,7 @@
                 </a:solidFill>
                 <a:latin typeface="Calibri"/>
               </a:rPr>
-              <a:t>Google Docs para la tabla y la política · ExamLab para entregar</a:t>
+              <a:t>Google Docs para la tabla y la política · la plataforma del curso para entregar</a:t>
             </a:r>
           </a:p>
           <a:p>
@@ -7555,7 +7555,7 @@
                 </a:solidFill>
                 <a:latin typeface="Calibri"/>
               </a:rPr>
-              <a:t>–   Individual por defecto · el docente puede autorizar equipos de 2–3; la entrega en ExamLab siempre es individual.</a:t>
+              <a:t>–   Individual por defecto · el docente puede autorizar equipos de 2–3; la entrega en la plataforma del curso siempre es individual.</a:t>
             </a:r>
           </a:p>
         </p:txBody>
